--- a/docs/Veriqo_AI_Builder_Cup_Deck.pptx
+++ b/docs/Veriqo_AI_Builder_Cup_Deck.pptx
@@ -3186,20 +3186,20 @@
           <a:noFill/>
         </p:spPr>
         <p:txBody>
-          <a:bodyPr wrap="square" anchor="t" lIns="0" rIns="0" tIns="0" bIns="0">
+          <a:bodyPr wrap="square" lIns="0" rIns="0" tIns="0" bIns="0">
             <a:spAutoFit/>
           </a:bodyPr>
           <a:lstStyle/>
           <a:p>
             <a:pPr algn="l">
               <a:lnSpc>
-                <a:spcPct val="105000"/>
+                <a:spcPct val="108000"/>
               </a:lnSpc>
             </a:pPr>
             <a:r>
               <a:rPr sz="4000" b="1">
                 <a:solidFill>
-                  <a:srgbClr val="171B22"/>
+                  <a:srgbClr val="2A282A"/>
                 </a:solidFill>
                 <a:latin typeface="Arial"/>
               </a:rPr>
@@ -3225,20 +3225,20 @@
           <a:noFill/>
         </p:spPr>
         <p:txBody>
-          <a:bodyPr wrap="square" anchor="t" lIns="0" rIns="0" tIns="0" bIns="0">
+          <a:bodyPr wrap="square" lIns="0" rIns="0" tIns="0" bIns="0">
             <a:spAutoFit/>
           </a:bodyPr>
           <a:lstStyle/>
           <a:p>
             <a:pPr algn="l">
               <a:lnSpc>
-                <a:spcPct val="105000"/>
+                <a:spcPct val="108000"/>
               </a:lnSpc>
             </a:pPr>
             <a:r>
               <a:rPr sz="1800" b="1">
                 <a:solidFill>
-                  <a:srgbClr val="3B82F6"/>
+                  <a:srgbClr val="734B5E"/>
                 </a:solidFill>
                 <a:latin typeface="Arial"/>
               </a:rPr>
@@ -3264,7 +3264,7 @@
           <a:noFill/>
         </p:spPr>
         <p:txBody>
-          <a:bodyPr wrap="square">
+          <a:bodyPr wrap="none">
             <a:spAutoFit/>
           </a:bodyPr>
           <a:lstStyle/>
@@ -3277,7 +3277,7 @@
             <a:r>
               <a:rPr b="1" sz="1500">
                 <a:solidFill>
-                  <a:srgbClr val="55606E"/>
+                  <a:srgbClr val="5F6266"/>
                 </a:solidFill>
                 <a:latin typeface="Arial"/>
               </a:rPr>
@@ -3286,7 +3286,7 @@
             <a:r>
               <a:rPr sz="1500">
                 <a:solidFill>
-                  <a:srgbClr val="171B22"/>
+                  <a:srgbClr val="2A282A"/>
                 </a:solidFill>
                 <a:latin typeface="Arial"/>
               </a:rPr>
@@ -3302,7 +3302,7 @@
             <a:r>
               <a:rPr b="1" sz="1500">
                 <a:solidFill>
-                  <a:srgbClr val="55606E"/>
+                  <a:srgbClr val="5F6266"/>
                 </a:solidFill>
                 <a:latin typeface="Arial"/>
               </a:rPr>
@@ -3311,7 +3311,7 @@
             <a:r>
               <a:rPr sz="1500">
                 <a:solidFill>
-                  <a:srgbClr val="171B22"/>
+                  <a:srgbClr val="2A282A"/>
                 </a:solidFill>
                 <a:latin typeface="Arial"/>
               </a:rPr>
@@ -3327,7 +3327,7 @@
             <a:r>
               <a:rPr b="1" sz="1500">
                 <a:solidFill>
-                  <a:srgbClr val="55606E"/>
+                  <a:srgbClr val="5F6266"/>
                 </a:solidFill>
                 <a:latin typeface="Arial"/>
               </a:rPr>
@@ -3336,7 +3336,7 @@
             <a:r>
               <a:rPr sz="1500">
                 <a:solidFill>
-                  <a:srgbClr val="171B22"/>
+                  <a:srgbClr val="2A282A"/>
                 </a:solidFill>
                 <a:latin typeface="Arial"/>
               </a:rPr>
@@ -3362,20 +3362,20 @@
           <a:noFill/>
         </p:spPr>
         <p:txBody>
-          <a:bodyPr wrap="square" anchor="t" lIns="0" rIns="0" tIns="0" bIns="0">
+          <a:bodyPr wrap="square" lIns="0" rIns="0" tIns="0" bIns="0">
             <a:spAutoFit/>
           </a:bodyPr>
           <a:lstStyle/>
           <a:p>
             <a:pPr algn="l">
               <a:lnSpc>
-                <a:spcPct val="105000"/>
+                <a:spcPct val="108000"/>
               </a:lnSpc>
             </a:pPr>
             <a:r>
               <a:rPr sz="1400" b="1">
                 <a:solidFill>
-                  <a:srgbClr val="55606E"/>
+                  <a:srgbClr val="5F6266"/>
                 </a:solidFill>
                 <a:latin typeface="Arial"/>
               </a:rPr>
@@ -3393,7 +3393,7 @@
         <p:spPr>
           <a:xfrm>
             <a:off x="6217920" y="5577840"/>
-            <a:ext cx="5394960" cy="1280160"/>
+            <a:ext cx="5394960" cy="1371600"/>
           </a:xfrm>
           <a:prstGeom prst="rect">
             <a:avLst/>
@@ -3401,24 +3401,24 @@
           <a:noFill/>
         </p:spPr>
         <p:txBody>
-          <a:bodyPr wrap="square" anchor="t" lIns="0" rIns="0" tIns="0" bIns="0">
+          <a:bodyPr wrap="square" lIns="0" rIns="0" tIns="0" bIns="0">
             <a:spAutoFit/>
           </a:bodyPr>
           <a:lstStyle/>
           <a:p>
             <a:pPr algn="l">
               <a:lnSpc>
-                <a:spcPct val="110000"/>
+                <a:spcPct val="112000"/>
               </a:lnSpc>
             </a:pPr>
             <a:r>
               <a:rPr sz="1350" b="0">
                 <a:solidFill>
-                  <a:srgbClr val="171B22"/>
-                </a:solidFill>
-                <a:latin typeface="Arial"/>
-              </a:rPr>
-              <a:t>Used-car buyers can't quickly tell a car's real condition or registration status before paying — so they overpay or get defrauded. Veriqo gives a fast, evidence-based pre-purchase check that shows exactly what to verify.</a:t>
+                  <a:srgbClr val="2A282A"/>
+                </a:solidFill>
+                <a:latin typeface="Arial"/>
+              </a:rPr>
+              <a:t>Used-car buyers can't quickly tell what a car's photos actually show, what its registration record says, or what still needs checking — so they overpay or buy hidden problems. Veriqo gives a fast, evidence-based pre-purchase report that is honest about what it could not verify.</a:t>
             </a:r>
           </a:p>
         </p:txBody>
@@ -3526,20 +3526,20 @@
           <a:noFill/>
         </p:spPr>
         <p:txBody>
-          <a:bodyPr wrap="square" anchor="t" lIns="0" rIns="0" tIns="0" bIns="0">
+          <a:bodyPr wrap="square" lIns="0" rIns="0" tIns="0" bIns="0">
             <a:spAutoFit/>
           </a:bodyPr>
           <a:lstStyle/>
           <a:p>
             <a:pPr algn="l">
               <a:lnSpc>
-                <a:spcPct val="105000"/>
+                <a:spcPct val="108000"/>
               </a:lnSpc>
             </a:pPr>
             <a:r>
               <a:rPr sz="2700" b="1">
                 <a:solidFill>
-                  <a:srgbClr val="171B22"/>
+                  <a:srgbClr val="2A282A"/>
                 </a:solidFill>
                 <a:latin typeface="Arial"/>
               </a:rPr>
@@ -3548,52 +3548,35 @@
           </a:p>
         </p:txBody>
       </p:sp>
-      <p:sp>
-        <p:nvSpPr>
-          <p:cNvPr id="5" name="Rounded Rectangle 4"/>
-          <p:cNvSpPr/>
-          <p:nvPr/>
-        </p:nvSpPr>
-        <p:spPr>
-          <a:xfrm>
-            <a:off x="502920" y="1920240"/>
-            <a:ext cx="3566160" cy="3108960"/>
-          </a:xfrm>
-          <a:prstGeom prst="roundRect">
-            <a:avLst/>
-          </a:prstGeom>
-          <a:solidFill>
-            <a:srgbClr val="F2F4F7"/>
-          </a:solidFill>
-          <a:ln w="15875">
+      <p:pic>
+        <p:nvPicPr>
+          <p:cNvPr id="5" name="Picture 4" descr="04-report-summary.png"/>
+          <p:cNvPicPr>
+            <a:picLocks noChangeAspect="1"/>
+          </p:cNvPicPr>
+          <p:nvPr/>
+        </p:nvPicPr>
+        <p:blipFill>
+          <a:blip r:embed="rId3"/>
+          <a:stretch>
+            <a:fillRect/>
+          </a:stretch>
+        </p:blipFill>
+        <p:spPr>
+          <a:xfrm>
+            <a:off x="502920" y="1554480"/>
+            <a:ext cx="3611880" cy="3611880"/>
+          </a:xfrm>
+          <a:prstGeom prst="rect">
+            <a:avLst/>
+          </a:prstGeom>
+          <a:ln w="12700">
             <a:solidFill>
-              <a:srgbClr val="D4DAE2"/>
+              <a:srgbClr val="D6D2D0"/>
             </a:solidFill>
           </a:ln>
-          <a:effectLst/>
-        </p:spPr>
-        <p:style>
-          <a:lnRef idx="1">
-            <a:schemeClr val="accent1"/>
-          </a:lnRef>
-          <a:fillRef idx="3">
-            <a:schemeClr val="accent1"/>
-          </a:fillRef>
-          <a:effectRef idx="2">
-            <a:schemeClr val="accent1"/>
-          </a:effectRef>
-          <a:fontRef idx="minor">
-            <a:schemeClr val="lt1"/>
-          </a:fontRef>
-        </p:style>
-        <p:txBody>
-          <a:bodyPr rtlCol="0" anchor="ctr"/>
-          <a:lstStyle/>
-          <a:p>
-            <a:pPr algn="ctr"/>
-          </a:p>
-        </p:txBody>
-      </p:sp>
+        </p:spPr>
+      </p:pic>
       <p:sp>
         <p:nvSpPr>
           <p:cNvPr id="6" name="TextBox 5"/>
@@ -3602,8 +3585,8 @@
         </p:nvSpPr>
         <p:spPr>
           <a:xfrm>
-            <a:off x="502920" y="3108960"/>
-            <a:ext cx="3566160" cy="457200"/>
+            <a:off x="502920" y="5239512"/>
+            <a:ext cx="3611880" cy="365760"/>
           </a:xfrm>
           <a:prstGeom prst="rect">
             <a:avLst/>
@@ -3611,38 +3594,67 @@
           <a:noFill/>
         </p:spPr>
         <p:txBody>
-          <a:bodyPr wrap="square" anchor="t" lIns="0" rIns="0" tIns="0" bIns="0">
+          <a:bodyPr wrap="square" lIns="0" rIns="0" tIns="0" bIns="0">
             <a:spAutoFit/>
           </a:bodyPr>
           <a:lstStyle/>
           <a:p>
             <a:pPr algn="ctr">
               <a:lnSpc>
-                <a:spcPct val="105000"/>
+                <a:spcPct val="108000"/>
               </a:lnSpc>
             </a:pPr>
             <a:r>
-              <a:rPr sz="1300" b="1">
-                <a:solidFill>
-                  <a:srgbClr val="55606E"/>
-                </a:solidFill>
-                <a:latin typeface="Arial"/>
-              </a:rPr>
-              <a:t>[ Insert screenshot ]</a:t>
-            </a:r>
-          </a:p>
-        </p:txBody>
-      </p:sp>
-      <p:sp>
-        <p:nvSpPr>
-          <p:cNvPr id="7" name="TextBox 6"/>
+              <a:rPr sz="1200" b="1">
+                <a:solidFill>
+                  <a:srgbClr val="2A282A"/>
+                </a:solidFill>
+                <a:latin typeface="Arial"/>
+              </a:rPr>
+              <a:t>Score, breakdown, simulated label</a:t>
+            </a:r>
+          </a:p>
+        </p:txBody>
+      </p:sp>
+      <p:pic>
+        <p:nvPicPr>
+          <p:cNvPr id="7" name="Picture 6" descr="06-checklist.png"/>
+          <p:cNvPicPr>
+            <a:picLocks noChangeAspect="1"/>
+          </p:cNvPicPr>
+          <p:nvPr/>
+        </p:nvPicPr>
+        <p:blipFill>
+          <a:blip r:embed="rId4"/>
+          <a:stretch>
+            <a:fillRect/>
+          </a:stretch>
+        </p:blipFill>
+        <p:spPr>
+          <a:xfrm>
+            <a:off x="4288536" y="1554480"/>
+            <a:ext cx="3611880" cy="3611880"/>
+          </a:xfrm>
+          <a:prstGeom prst="rect">
+            <a:avLst/>
+          </a:prstGeom>
+          <a:ln w="12700">
+            <a:solidFill>
+              <a:srgbClr val="D6D2D0"/>
+            </a:solidFill>
+          </a:ln>
+        </p:spPr>
+      </p:pic>
+      <p:sp>
+        <p:nvSpPr>
+          <p:cNvPr id="8" name="TextBox 7"/>
           <p:cNvSpPr txBox="1"/>
           <p:nvPr/>
         </p:nvSpPr>
         <p:spPr>
           <a:xfrm>
-            <a:off x="502920" y="5120640"/>
-            <a:ext cx="3566160" cy="365760"/>
+            <a:off x="4288536" y="5239512"/>
+            <a:ext cx="3611880" cy="365760"/>
           </a:xfrm>
           <a:prstGeom prst="rect">
             <a:avLst/>
@@ -3650,84 +3662,67 @@
           <a:noFill/>
         </p:spPr>
         <p:txBody>
-          <a:bodyPr wrap="square" anchor="t" lIns="0" rIns="0" tIns="0" bIns="0">
+          <a:bodyPr wrap="square" lIns="0" rIns="0" tIns="0" bIns="0">
             <a:spAutoFit/>
           </a:bodyPr>
           <a:lstStyle/>
           <a:p>
             <a:pPr algn="ctr">
               <a:lnSpc>
-                <a:spcPct val="105000"/>
+                <a:spcPct val="108000"/>
               </a:lnSpc>
             </a:pPr>
             <a:r>
-              <a:rPr sz="1300" b="1">
-                <a:solidFill>
-                  <a:srgbClr val="171B22"/>
-                </a:solidFill>
-                <a:latin typeface="Arial"/>
-              </a:rPr>
-              <a:t>Upload screen</a:t>
-            </a:r>
-          </a:p>
-        </p:txBody>
-      </p:sp>
-      <p:sp>
-        <p:nvSpPr>
-          <p:cNvPr id="8" name="Rounded Rectangle 7"/>
-          <p:cNvSpPr/>
-          <p:nvPr/>
-        </p:nvSpPr>
-        <p:spPr>
-          <a:xfrm>
-            <a:off x="4315968" y="1920240"/>
-            <a:ext cx="3566160" cy="3108960"/>
-          </a:xfrm>
-          <a:prstGeom prst="roundRect">
-            <a:avLst/>
-          </a:prstGeom>
-          <a:solidFill>
-            <a:srgbClr val="F2F4F7"/>
-          </a:solidFill>
-          <a:ln w="15875">
+              <a:rPr sz="1200" b="1">
+                <a:solidFill>
+                  <a:srgbClr val="2A282A"/>
+                </a:solidFill>
+                <a:latin typeface="Arial"/>
+              </a:rPr>
+              <a:t>Prioritised buyer checklist</a:t>
+            </a:r>
+          </a:p>
+        </p:txBody>
+      </p:sp>
+      <p:pic>
+        <p:nvPicPr>
+          <p:cNvPr id="9" name="Picture 8" descr="07-rc-not-verified.png"/>
+          <p:cNvPicPr>
+            <a:picLocks noChangeAspect="1"/>
+          </p:cNvPicPr>
+          <p:nvPr/>
+        </p:nvPicPr>
+        <p:blipFill>
+          <a:blip r:embed="rId5"/>
+          <a:stretch>
+            <a:fillRect/>
+          </a:stretch>
+        </p:blipFill>
+        <p:spPr>
+          <a:xfrm>
+            <a:off x="8074152" y="1554480"/>
+            <a:ext cx="3611880" cy="3611880"/>
+          </a:xfrm>
+          <a:prstGeom prst="rect">
+            <a:avLst/>
+          </a:prstGeom>
+          <a:ln w="12700">
             <a:solidFill>
-              <a:srgbClr val="D4DAE2"/>
+              <a:srgbClr val="D6D2D0"/>
             </a:solidFill>
           </a:ln>
-          <a:effectLst/>
-        </p:spPr>
-        <p:style>
-          <a:lnRef idx="1">
-            <a:schemeClr val="accent1"/>
-          </a:lnRef>
-          <a:fillRef idx="3">
-            <a:schemeClr val="accent1"/>
-          </a:fillRef>
-          <a:effectRef idx="2">
-            <a:schemeClr val="accent1"/>
-          </a:effectRef>
-          <a:fontRef idx="minor">
-            <a:schemeClr val="lt1"/>
-          </a:fontRef>
-        </p:style>
-        <p:txBody>
-          <a:bodyPr rtlCol="0" anchor="ctr"/>
-          <a:lstStyle/>
-          <a:p>
-            <a:pPr algn="ctr"/>
-          </a:p>
-        </p:txBody>
-      </p:sp>
-      <p:sp>
-        <p:nvSpPr>
-          <p:cNvPr id="9" name="TextBox 8"/>
+        </p:spPr>
+      </p:pic>
+      <p:sp>
+        <p:nvSpPr>
+          <p:cNvPr id="10" name="TextBox 9"/>
           <p:cNvSpPr txBox="1"/>
           <p:nvPr/>
         </p:nvSpPr>
         <p:spPr>
           <a:xfrm>
-            <a:off x="4315968" y="3108960"/>
-            <a:ext cx="3566160" cy="457200"/>
+            <a:off x="8074152" y="5239512"/>
+            <a:ext cx="3611880" cy="365760"/>
           </a:xfrm>
           <a:prstGeom prst="rect">
             <a:avLst/>
@@ -3735,38 +3730,38 @@
           <a:noFill/>
         </p:spPr>
         <p:txBody>
-          <a:bodyPr wrap="square" anchor="t" lIns="0" rIns="0" tIns="0" bIns="0">
+          <a:bodyPr wrap="square" lIns="0" rIns="0" tIns="0" bIns="0">
             <a:spAutoFit/>
           </a:bodyPr>
           <a:lstStyle/>
           <a:p>
             <a:pPr algn="ctr">
               <a:lnSpc>
-                <a:spcPct val="105000"/>
+                <a:spcPct val="108000"/>
               </a:lnSpc>
             </a:pPr>
             <a:r>
-              <a:rPr sz="1300" b="1">
-                <a:solidFill>
-                  <a:srgbClr val="55606E"/>
-                </a:solidFill>
-                <a:latin typeface="Arial"/>
-              </a:rPr>
-              <a:t>[ Insert screenshot ]</a:t>
-            </a:r>
-          </a:p>
-        </p:txBody>
-      </p:sp>
-      <p:sp>
-        <p:nvSpPr>
-          <p:cNvPr id="10" name="TextBox 9"/>
+              <a:rPr sz="1200" b="1">
+                <a:solidFill>
+                  <a:srgbClr val="2A282A"/>
+                </a:solidFill>
+                <a:latin typeface="Arial"/>
+              </a:rPr>
+              <a:t>Unknown plate → not verified</a:t>
+            </a:r>
+          </a:p>
+        </p:txBody>
+      </p:sp>
+      <p:sp>
+        <p:nvSpPr>
+          <p:cNvPr id="11" name="TextBox 10"/>
           <p:cNvSpPr txBox="1"/>
           <p:nvPr/>
         </p:nvSpPr>
         <p:spPr>
           <a:xfrm>
-            <a:off x="4315968" y="5120640"/>
-            <a:ext cx="3566160" cy="365760"/>
+            <a:off x="502920" y="5989320"/>
+            <a:ext cx="11155680" cy="457200"/>
           </a:xfrm>
           <a:prstGeom prst="rect">
             <a:avLst/>
@@ -3774,187 +3769,24 @@
           <a:noFill/>
         </p:spPr>
         <p:txBody>
-          <a:bodyPr wrap="square" anchor="t" lIns="0" rIns="0" tIns="0" bIns="0">
+          <a:bodyPr wrap="square" lIns="0" rIns="0" tIns="0" bIns="0">
             <a:spAutoFit/>
           </a:bodyPr>
           <a:lstStyle/>
           <a:p>
-            <a:pPr algn="ctr">
+            <a:pPr algn="l">
               <a:lnSpc>
-                <a:spcPct val="105000"/>
+                <a:spcPct val="108000"/>
               </a:lnSpc>
             </a:pPr>
             <a:r>
-              <a:rPr sz="1300" b="1">
-                <a:solidFill>
-                  <a:srgbClr val="171B22"/>
-                </a:solidFill>
-                <a:latin typeface="Arial"/>
-              </a:rPr>
-              <a:t>Report with evidence tags</a:t>
-            </a:r>
-          </a:p>
-        </p:txBody>
-      </p:sp>
-      <p:sp>
-        <p:nvSpPr>
-          <p:cNvPr id="11" name="Rounded Rectangle 10"/>
-          <p:cNvSpPr/>
-          <p:nvPr/>
-        </p:nvSpPr>
-        <p:spPr>
-          <a:xfrm>
-            <a:off x="8138160" y="1920240"/>
-            <a:ext cx="3566160" cy="3108960"/>
-          </a:xfrm>
-          <a:prstGeom prst="roundRect">
-            <a:avLst/>
-          </a:prstGeom>
-          <a:solidFill>
-            <a:srgbClr val="F2F4F7"/>
-          </a:solidFill>
-          <a:ln w="15875">
-            <a:solidFill>
-              <a:srgbClr val="D4DAE2"/>
-            </a:solidFill>
-          </a:ln>
-          <a:effectLst/>
-        </p:spPr>
-        <p:style>
-          <a:lnRef idx="1">
-            <a:schemeClr val="accent1"/>
-          </a:lnRef>
-          <a:fillRef idx="3">
-            <a:schemeClr val="accent1"/>
-          </a:fillRef>
-          <a:effectRef idx="2">
-            <a:schemeClr val="accent1"/>
-          </a:effectRef>
-          <a:fontRef idx="minor">
-            <a:schemeClr val="lt1"/>
-          </a:fontRef>
-        </p:style>
-        <p:txBody>
-          <a:bodyPr rtlCol="0" anchor="ctr"/>
-          <a:lstStyle/>
-          <a:p>
-            <a:pPr algn="ctr"/>
-          </a:p>
-        </p:txBody>
-      </p:sp>
-      <p:sp>
-        <p:nvSpPr>
-          <p:cNvPr id="12" name="TextBox 11"/>
-          <p:cNvSpPr txBox="1"/>
-          <p:nvPr/>
-        </p:nvSpPr>
-        <p:spPr>
-          <a:xfrm>
-            <a:off x="8138160" y="3108960"/>
-            <a:ext cx="3566160" cy="457200"/>
-          </a:xfrm>
-          <a:prstGeom prst="rect">
-            <a:avLst/>
-          </a:prstGeom>
-          <a:noFill/>
-        </p:spPr>
-        <p:txBody>
-          <a:bodyPr wrap="square" anchor="t" lIns="0" rIns="0" tIns="0" bIns="0">
-            <a:spAutoFit/>
-          </a:bodyPr>
-          <a:lstStyle/>
-          <a:p>
-            <a:pPr algn="ctr">
-              <a:lnSpc>
-                <a:spcPct val="105000"/>
-              </a:lnSpc>
-            </a:pPr>
-            <a:r>
-              <a:rPr sz="1300" b="1">
-                <a:solidFill>
-                  <a:srgbClr val="55606E"/>
-                </a:solidFill>
-                <a:latin typeface="Arial"/>
-              </a:rPr>
-              <a:t>[ Insert screenshot ]</a:t>
-            </a:r>
-          </a:p>
-        </p:txBody>
-      </p:sp>
-      <p:sp>
-        <p:nvSpPr>
-          <p:cNvPr id="13" name="TextBox 12"/>
-          <p:cNvSpPr txBox="1"/>
-          <p:nvPr/>
-        </p:nvSpPr>
-        <p:spPr>
-          <a:xfrm>
-            <a:off x="8138160" y="5120640"/>
-            <a:ext cx="3566160" cy="365760"/>
-          </a:xfrm>
-          <a:prstGeom prst="rect">
-            <a:avLst/>
-          </a:prstGeom>
-          <a:noFill/>
-        </p:spPr>
-        <p:txBody>
-          <a:bodyPr wrap="square" anchor="t" lIns="0" rIns="0" tIns="0" bIns="0">
-            <a:spAutoFit/>
-          </a:bodyPr>
-          <a:lstStyle/>
-          <a:p>
-            <a:pPr algn="ctr">
-              <a:lnSpc>
-                <a:spcPct val="105000"/>
-              </a:lnSpc>
-            </a:pPr>
-            <a:r>
-              <a:rPr sz="1300" b="1">
-                <a:solidFill>
-                  <a:srgbClr val="171B22"/>
-                </a:solidFill>
-                <a:latin typeface="Arial"/>
-              </a:rPr>
-              <a:t>RC record + audit trail</a:t>
-            </a:r>
-          </a:p>
-        </p:txBody>
-      </p:sp>
-      <p:sp>
-        <p:nvSpPr>
-          <p:cNvPr id="14" name="TextBox 13"/>
-          <p:cNvSpPr txBox="1"/>
-          <p:nvPr/>
-        </p:nvSpPr>
-        <p:spPr>
-          <a:xfrm>
-            <a:off x="502920" y="5760720"/>
-            <a:ext cx="10972800" cy="365760"/>
-          </a:xfrm>
-          <a:prstGeom prst="rect">
-            <a:avLst/>
-          </a:prstGeom>
-          <a:noFill/>
-        </p:spPr>
-        <p:txBody>
-          <a:bodyPr wrap="square" anchor="t" lIns="0" rIns="0" tIns="0" bIns="0">
-            <a:spAutoFit/>
-          </a:bodyPr>
-          <a:lstStyle/>
-          <a:p>
-            <a:pPr algn="l">
-              <a:lnSpc>
-                <a:spcPct val="105000"/>
-              </a:lnSpc>
-            </a:pPr>
-            <a:r>
-              <a:rPr sz="1200" b="1">
-                <a:solidFill>
-                  <a:srgbClr val="B42318"/>
-                </a:solidFill>
-                <a:latin typeface="Arial"/>
-              </a:rPr>
-              <a:t>ACTION: replace the three placeholders with real screenshots from the live deployed app.</a:t>
+              <a:rPr sz="1150" b="0">
+                <a:solidFill>
+                  <a:srgbClr val="5F6266"/>
+                </a:solidFill>
+                <a:latin typeface="Arial"/>
+              </a:rPr>
+              <a:t>Captured from the live deployment with real Gemini output. Test photos: openly licensed Wikimedia Commons images (credits in the repo). Registration data is synthetic and labelled as simulated.</a:t>
             </a:r>
           </a:p>
         </p:txBody>
@@ -4062,253 +3894,437 @@
           <a:noFill/>
         </p:spPr>
         <p:txBody>
-          <a:bodyPr wrap="square" anchor="t" lIns="0" rIns="0" tIns="0" bIns="0">
-            <a:spAutoFit/>
-          </a:bodyPr>
-          <a:lstStyle/>
-          <a:p>
-            <a:pPr algn="l">
-              <a:lnSpc>
-                <a:spcPct val="105000"/>
-              </a:lnSpc>
-            </a:pPr>
-            <a:r>
-              <a:rPr sz="2700" b="1">
-                <a:solidFill>
-                  <a:srgbClr val="171B22"/>
-                </a:solidFill>
-                <a:latin typeface="Arial"/>
-              </a:rPr>
-              <a:t>Prototype Performance report / Benchmarking</a:t>
-            </a:r>
-          </a:p>
-        </p:txBody>
-      </p:sp>
-      <p:sp>
-        <p:nvSpPr>
-          <p:cNvPr id="5" name="TextBox 4"/>
-          <p:cNvSpPr txBox="1"/>
-          <p:nvPr/>
-        </p:nvSpPr>
-        <p:spPr>
-          <a:xfrm>
-            <a:off x="502920" y="1645920"/>
-            <a:ext cx="10972800" cy="365760"/>
-          </a:xfrm>
-          <a:prstGeom prst="rect">
-            <a:avLst/>
-          </a:prstGeom>
-          <a:noFill/>
-        </p:spPr>
-        <p:txBody>
-          <a:bodyPr wrap="square" anchor="t" lIns="0" rIns="0" tIns="0" bIns="0">
-            <a:spAutoFit/>
-          </a:bodyPr>
-          <a:lstStyle/>
-          <a:p>
-            <a:pPr algn="l">
-              <a:lnSpc>
-                <a:spcPct val="105000"/>
-              </a:lnSpc>
-            </a:pPr>
-            <a:r>
-              <a:rPr sz="1500" b="1">
-                <a:solidFill>
-                  <a:srgbClr val="171B22"/>
-                </a:solidFill>
-                <a:latin typeface="Arial"/>
-              </a:rPr>
-              <a:t>How we measure Veriqo (honest method, no invented numbers):</a:t>
-            </a:r>
-          </a:p>
-        </p:txBody>
-      </p:sp>
-      <p:sp>
-        <p:nvSpPr>
-          <p:cNvPr id="6" name="TextBox 5"/>
-          <p:cNvSpPr txBox="1"/>
-          <p:nvPr/>
-        </p:nvSpPr>
-        <p:spPr>
-          <a:xfrm>
-            <a:off x="502920" y="2194560"/>
-            <a:ext cx="11155680" cy="2377440"/>
-          </a:xfrm>
-          <a:prstGeom prst="rect">
-            <a:avLst/>
-          </a:prstGeom>
-          <a:noFill/>
-        </p:spPr>
-        <p:txBody>
           <a:bodyPr wrap="square" lIns="0" rIns="0" tIns="0" bIns="0">
             <a:spAutoFit/>
           </a:bodyPr>
           <a:lstStyle/>
           <a:p>
+            <a:pPr algn="l">
+              <a:lnSpc>
+                <a:spcPct val="108000"/>
+              </a:lnSpc>
+            </a:pPr>
+            <a:r>
+              <a:rPr sz="2700" b="1">
+                <a:solidFill>
+                  <a:srgbClr val="2A282A"/>
+                </a:solidFill>
+                <a:latin typeface="Arial"/>
+              </a:rPr>
+              <a:t>Prototype Performance report/Benchmarking</a:t>
+            </a:r>
+          </a:p>
+        </p:txBody>
+      </p:sp>
+      <p:graphicFrame>
+        <p:nvGraphicFramePr>
+          <p:cNvPr id="5" name="Table 4"/>
+          <p:cNvGraphicFramePr>
+            <a:graphicFrameLocks noGrp="1"/>
+          </p:cNvGraphicFramePr>
+          <p:nvPr/>
+        </p:nvGraphicFramePr>
+        <p:xfrm>
+          <a:off x="502920" y="1645920"/>
+          <a:ext cx="11155680" cy="1920240"/>
+        </p:xfrm>
+        <a:graphic>
+          <a:graphicData uri="http://schemas.openxmlformats.org/drawingml/2006/table">
+            <a:tbl>
+              <a:tblPr firstRow="1" bandRow="1">
+                <a:tableStyleId>{5C22544A-7EE6-4342-B048-85BDC9FD1C3A}</a:tableStyleId>
+              </a:tblPr>
+              <a:tblGrid>
+                <a:gridCol w="7680960"/>
+                <a:gridCol w="3474720"/>
+              </a:tblGrid>
+              <a:tr h="384048">
+                <a:tc>
+                  <a:txBody>
+                    <a:bodyPr/>
+                    <a:lstStyle/>
+                    <a:p>
+                      <a:r>
+                        <a:rPr sz="1300" b="1">
+                          <a:solidFill>
+                            <a:srgbClr val="FFFFFF"/>
+                          </a:solidFill>
+                          <a:latin typeface="Arial"/>
+                        </a:rPr>
+                        <a:t>What we measured</a:t>
+                      </a:r>
+                    </a:p>
+                  </a:txBody>
+                  <a:tcPr>
+                    <a:solidFill>
+                      <a:srgbClr val="2A282A"/>
+                    </a:solidFill>
+                  </a:tcPr>
+                </a:tc>
+                <a:tc>
+                  <a:txBody>
+                    <a:bodyPr/>
+                    <a:lstStyle/>
+                    <a:p>
+                      <a:r>
+                        <a:rPr sz="1300" b="1">
+                          <a:solidFill>
+                            <a:srgbClr val="FFFFFF"/>
+                          </a:solidFill>
+                          <a:latin typeface="Arial"/>
+                        </a:rPr>
+                        <a:t>Result</a:t>
+                      </a:r>
+                    </a:p>
+                  </a:txBody>
+                  <a:tcPr>
+                    <a:solidFill>
+                      <a:srgbClr val="2A282A"/>
+                    </a:solidFill>
+                  </a:tcPr>
+                </a:tc>
+              </a:tr>
+              <a:tr h="384048">
+                <a:tc>
+                  <a:txBody>
+                    <a:bodyPr/>
+                    <a:lstStyle/>
+                    <a:p>
+                      <a:r>
+                        <a:rPr sz="1300" b="0">
+                          <a:solidFill>
+                            <a:srgbClr val="2A282A"/>
+                          </a:solidFill>
+                          <a:latin typeface="Arial"/>
+                        </a:rPr>
+                        <a:t>API tests (pytest, 21 cases incl. invalid files, model failures, persistence)</a:t>
+                      </a:r>
+                    </a:p>
+                  </a:txBody>
+                  <a:tcPr>
+                    <a:solidFill>
+                      <a:srgbClr val="FFFFFF"/>
+                    </a:solidFill>
+                  </a:tcPr>
+                </a:tc>
+                <a:tc>
+                  <a:txBody>
+                    <a:bodyPr/>
+                    <a:lstStyle/>
+                    <a:p>
+                      <a:r>
+                        <a:rPr sz="1300" b="0">
+                          <a:solidFill>
+                            <a:srgbClr val="2A282A"/>
+                          </a:solidFill>
+                          <a:latin typeface="Arial"/>
+                        </a:rPr>
+                        <a:t>21 / 21 pass</a:t>
+                      </a:r>
+                    </a:p>
+                  </a:txBody>
+                  <a:tcPr>
+                    <a:solidFill>
+                      <a:srgbClr val="FFFFFF"/>
+                    </a:solidFill>
+                  </a:tcPr>
+                </a:tc>
+              </a:tr>
+              <a:tr h="384048">
+                <a:tc>
+                  <a:txBody>
+                    <a:bodyPr/>
+                    <a:lstStyle/>
+                    <a:p>
+                      <a:r>
+                        <a:rPr sz="1300" b="0">
+                          <a:solidFill>
+                            <a:srgbClr val="2A282A"/>
+                          </a:solidFill>
+                          <a:latin typeface="Arial"/>
+                        </a:rPr>
+                        <a:t>Scoring-rule evaluation (11 labelled cases)</a:t>
+                      </a:r>
+                    </a:p>
+                  </a:txBody>
+                  <a:tcPr>
+                    <a:solidFill>
+                      <a:srgbClr val="F6F3F2"/>
+                    </a:solidFill>
+                  </a:tcPr>
+                </a:tc>
+                <a:tc>
+                  <a:txBody>
+                    <a:bodyPr/>
+                    <a:lstStyle/>
+                    <a:p>
+                      <a:r>
+                        <a:rPr sz="1300" b="0">
+                          <a:solidFill>
+                            <a:srgbClr val="2A282A"/>
+                          </a:solidFill>
+                          <a:latin typeface="Arial"/>
+                        </a:rPr>
+                        <a:t>67 / 67 checks pass</a:t>
+                      </a:r>
+                    </a:p>
+                  </a:txBody>
+                  <a:tcPr>
+                    <a:solidFill>
+                      <a:srgbClr val="F6F3F2"/>
+                    </a:solidFill>
+                  </a:tcPr>
+                </a:tc>
+              </a:tr>
+              <a:tr h="384048">
+                <a:tc>
+                  <a:txBody>
+                    <a:bodyPr/>
+                    <a:lstStyle/>
+                    <a:p>
+                      <a:r>
+                        <a:rPr sz="1300" b="0">
+                          <a:solidFill>
+                            <a:srgbClr val="2A282A"/>
+                          </a:solidFill>
+                          <a:latin typeface="Arial"/>
+                        </a:rPr>
+                        <a:t>Browser tests on the live deployment (15 scenarios)</a:t>
+                      </a:r>
+                    </a:p>
+                  </a:txBody>
+                  <a:tcPr>
+                    <a:solidFill>
+                      <a:srgbClr val="FFFFFF"/>
+                    </a:solidFill>
+                  </a:tcPr>
+                </a:tc>
+                <a:tc>
+                  <a:txBody>
+                    <a:bodyPr/>
+                    <a:lstStyle/>
+                    <a:p>
+                      <a:r>
+                        <a:rPr sz="1300" b="0">
+                          <a:solidFill>
+                            <a:srgbClr val="2A282A"/>
+                          </a:solidFill>
+                          <a:latin typeface="Arial"/>
+                        </a:rPr>
+                        <a:t>15 / 15 pass  (first run: 14 / 15)</a:t>
+                      </a:r>
+                    </a:p>
+                  </a:txBody>
+                  <a:tcPr>
+                    <a:solidFill>
+                      <a:srgbClr val="FFFFFF"/>
+                    </a:solidFill>
+                  </a:tcPr>
+                </a:tc>
+              </a:tr>
+              <a:tr h="384048">
+                <a:tc>
+                  <a:txBody>
+                    <a:bodyPr/>
+                    <a:lstStyle/>
+                    <a:p>
+                      <a:r>
+                        <a:rPr sz="1300" b="0">
+                          <a:solidFill>
+                            <a:srgbClr val="2A282A"/>
+                          </a:solidFill>
+                          <a:latin typeface="Arial"/>
+                        </a:rPr>
+                        <a:t>Upload → report time, 13 live runs</a:t>
+                      </a:r>
+                    </a:p>
+                  </a:txBody>
+                  <a:tcPr>
+                    <a:solidFill>
+                      <a:srgbClr val="F6F3F2"/>
+                    </a:solidFill>
+                  </a:tcPr>
+                </a:tc>
+                <a:tc>
+                  <a:txBody>
+                    <a:bodyPr/>
+                    <a:lstStyle/>
+                    <a:p>
+                      <a:r>
+                        <a:rPr sz="1300" b="0">
+                          <a:solidFill>
+                            <a:srgbClr val="2A282A"/>
+                          </a:solidFill>
+                          <a:latin typeface="Arial"/>
+                        </a:rPr>
+                        <a:t>median 9.8 s · range 6.8–17.2 s</a:t>
+                      </a:r>
+                    </a:p>
+                  </a:txBody>
+                  <a:tcPr>
+                    <a:solidFill>
+                      <a:srgbClr val="F6F3F2"/>
+                    </a:solidFill>
+                  </a:tcPr>
+                </a:tc>
+              </a:tr>
+            </a:tbl>
+          </a:graphicData>
+        </a:graphic>
+      </p:graphicFrame>
+      <p:sp>
+        <p:nvSpPr>
+          <p:cNvPr id="6" name="TextBox 5"/>
+          <p:cNvSpPr txBox="1"/>
+          <p:nvPr/>
+        </p:nvSpPr>
+        <p:spPr>
+          <a:xfrm>
+            <a:off x="502920" y="3794760"/>
+            <a:ext cx="11155680" cy="365760"/>
+          </a:xfrm>
+          <a:prstGeom prst="rect">
+            <a:avLst/>
+          </a:prstGeom>
+          <a:noFill/>
+        </p:spPr>
+        <p:txBody>
+          <a:bodyPr wrap="square" lIns="0" rIns="0" tIns="0" bIns="0">
+            <a:spAutoFit/>
+          </a:bodyPr>
+          <a:lstStyle/>
+          <a:p>
+            <a:pPr algn="l">
+              <a:lnSpc>
+                <a:spcPct val="108000"/>
+              </a:lnSpc>
+            </a:pPr>
+            <a:r>
+              <a:rPr sz="1400" b="1">
+                <a:solidFill>
+                  <a:srgbClr val="2A282A"/>
+                </a:solidFill>
+                <a:latin typeface="Arial"/>
+              </a:rPr>
+              <a:t>Model review (checked by hand, before → after prompt and rule fixes)</a:t>
+            </a:r>
+          </a:p>
+        </p:txBody>
+      </p:sp>
+      <p:sp>
+        <p:nvSpPr>
+          <p:cNvPr id="7" name="TextBox 6"/>
+          <p:cNvSpPr txBox="1"/>
+          <p:nvPr/>
+        </p:nvSpPr>
+        <p:spPr>
+          <a:xfrm>
+            <a:off x="502920" y="4206240"/>
+            <a:ext cx="11155680" cy="1463040"/>
+          </a:xfrm>
+          <a:prstGeom prst="rect">
+            <a:avLst/>
+          </a:prstGeom>
+          <a:noFill/>
+        </p:spPr>
+        <p:txBody>
+          <a:bodyPr wrap="square" lIns="0" rIns="0" tIns="0" bIns="0">
+            <a:spAutoFit/>
+          </a:bodyPr>
+          <a:lstStyle/>
+          <a:p>
             <a:pPr>
               <a:lnSpc>
-                <a:spcPct val="105000"/>
+                <a:spcPct val="108000"/>
               </a:lnSpc>
               <a:spcAft>
-                <a:spcPts val="1000"/>
+                <a:spcPts val="700"/>
               </a:spcAft>
             </a:pPr>
             <a:r>
-              <a:rPr b="1" sz="1400">
-                <a:solidFill>
-                  <a:srgbClr val="171B22"/>
-                </a:solidFill>
-                <a:latin typeface="Arial"/>
-              </a:rPr>
-              <a:t>•  Visible-issue recall. </a:t>
-            </a:r>
-            <a:r>
-              <a:rPr sz="1400">
-                <a:solidFill>
-                  <a:srgbClr val="171B22"/>
-                </a:solidFill>
-                <a:latin typeface="Arial"/>
-              </a:rPr>
-              <a:t>On a labelled set of photo-sets with known visible issues, what fraction does Gemini flag?</a:t>
+              <a:rPr b="1" sz="1300">
+                <a:solidFill>
+                  <a:srgbClr val="2A282A"/>
+                </a:solidFill>
+                <a:latin typeface="Arial"/>
+              </a:rPr>
+              <a:t>•  Fixed: </a:t>
+            </a:r>
+            <a:r>
+              <a:rPr sz="1300">
+                <a:solidFill>
+                  <a:srgbClr val="2A282A"/>
+                </a:solidFill>
+                <a:latin typeface="Arial"/>
+              </a:rPr>
+              <a:t>one key scratch scored 100/100 → now 26 (one moderate item); sharp close-ups were marked low-confidence → now 0.7–1.0; a blurry photo claimed views → now claims none; repeat runs disagreed → now identical.</a:t>
             </a:r>
           </a:p>
           <a:p>
             <a:pPr>
               <a:lnSpc>
-                <a:spcPct val="105000"/>
+                <a:spcPct val="108000"/>
               </a:lnSpc>
               <a:spcAft>
-                <a:spcPts val="1000"/>
+                <a:spcPts val="700"/>
               </a:spcAft>
             </a:pPr>
             <a:r>
-              <a:rPr b="1" sz="1400">
-                <a:solidFill>
-                  <a:srgbClr val="171B22"/>
-                </a:solidFill>
-                <a:latin typeface="Arial"/>
-              </a:rPr>
-              <a:t>•  False “all-clear” rate. </a:t>
-            </a:r>
-            <a:r>
-              <a:rPr sz="1400">
-                <a:solidFill>
-                  <a:srgbClr val="171B22"/>
-                </a:solidFill>
-                <a:latin typeface="Arial"/>
-              </a:rPr>
-              <a:t>How often is a car with known visible issues reported with no flags? (Target: 0.)</a:t>
-            </a:r>
-          </a:p>
-          <a:p>
-            <a:pPr>
+              <a:rPr b="1" sz="1300">
+                <a:solidFill>
+                  <a:srgbClr val="2A282A"/>
+                </a:solidFill>
+                <a:latin typeface="Arial"/>
+              </a:rPr>
+              <a:t>•  Still open: </a:t>
+            </a:r>
+            <a:r>
+              <a:rPr sz="1300">
+                <a:solidFill>
+                  <a:srgbClr val="2A282A"/>
+                </a:solidFill>
+                <a:latin typeface="Arial"/>
+              </a:rPr>
+              <a:t>headlight severity varies between photo sets; a dent photo still yields 6 items. No precision/recall is claimed — 11 photos are not a labelled benchmark.</a:t>
+            </a:r>
+          </a:p>
+        </p:txBody>
+      </p:sp>
+      <p:sp>
+        <p:nvSpPr>
+          <p:cNvPr id="8" name="TextBox 7"/>
+          <p:cNvSpPr txBox="1"/>
+          <p:nvPr/>
+        </p:nvSpPr>
+        <p:spPr>
+          <a:xfrm>
+            <a:off x="502920" y="5989320"/>
+            <a:ext cx="11155680" cy="365760"/>
+          </a:xfrm>
+          <a:prstGeom prst="rect">
+            <a:avLst/>
+          </a:prstGeom>
+          <a:noFill/>
+        </p:spPr>
+        <p:txBody>
+          <a:bodyPr wrap="square" lIns="0" rIns="0" tIns="0" bIns="0">
+            <a:spAutoFit/>
+          </a:bodyPr>
+          <a:lstStyle/>
+          <a:p>
+            <a:pPr algn="l">
               <a:lnSpc>
-                <a:spcPct val="105000"/>
+                <a:spcPct val="108000"/>
               </a:lnSpc>
-              <a:spcAft>
-                <a:spcPts val="1000"/>
-              </a:spcAft>
             </a:pPr>
             <a:r>
-              <a:rPr b="1" sz="1400">
-                <a:solidFill>
-                  <a:srgbClr val="171B22"/>
-                </a:solidFill>
-                <a:latin typeface="Arial"/>
-              </a:rPr>
-              <a:t>•  End-to-end latency. </a:t>
-            </a:r>
-            <a:r>
-              <a:rPr sz="1400">
-                <a:solidFill>
-                  <a:srgbClr val="171B22"/>
-                </a:solidFill>
-                <a:latin typeface="Arial"/>
-              </a:rPr>
-              <a:t>Time from submit to report — currently a few seconds per verification.</a:t>
-            </a:r>
-          </a:p>
-          <a:p>
-            <a:pPr>
-              <a:lnSpc>
-                <a:spcPct val="105000"/>
-              </a:lnSpc>
-              <a:spcAft>
-                <a:spcPts val="1000"/>
-              </a:spcAft>
-            </a:pPr>
-            <a:r>
-              <a:rPr b="1" sz="1400">
-                <a:solidFill>
-                  <a:srgbClr val="171B22"/>
-                </a:solidFill>
-                <a:latin typeface="Arial"/>
-              </a:rPr>
-              <a:t>•  Transparency check. </a:t>
-            </a:r>
-            <a:r>
-              <a:rPr sz="1400">
-                <a:solidFill>
-                  <a:srgbClr val="171B22"/>
-                </a:solidFill>
-                <a:latin typeface="Arial"/>
-              </a:rPr>
-              <a:t>Every finding carries a source tag and evidence; the score equals the sum of its rules (unit-tested).</a:t>
-            </a:r>
-          </a:p>
-        </p:txBody>
-      </p:sp>
-      <p:sp>
-        <p:nvSpPr>
-          <p:cNvPr id="7" name="Rounded Rectangle 6"/>
-          <p:cNvSpPr/>
-          <p:nvPr/>
-        </p:nvSpPr>
-        <p:spPr>
-          <a:xfrm>
-            <a:off x="502920" y="4937760"/>
-            <a:ext cx="11155680" cy="1005840"/>
-          </a:xfrm>
-          <a:prstGeom prst="roundRect">
-            <a:avLst/>
-          </a:prstGeom>
-          <a:solidFill>
-            <a:srgbClr val="FFF4E5"/>
-          </a:solidFill>
-          <a:ln w="12700">
-            <a:solidFill>
-              <a:srgbClr val="B26A00"/>
-            </a:solidFill>
-          </a:ln>
-          <a:effectLst/>
-        </p:spPr>
-        <p:style>
-          <a:lnRef idx="1">
-            <a:schemeClr val="accent1"/>
-          </a:lnRef>
-          <a:fillRef idx="3">
-            <a:schemeClr val="accent1"/>
-          </a:fillRef>
-          <a:effectRef idx="2">
-            <a:schemeClr val="accent1"/>
-          </a:effectRef>
-          <a:fontRef idx="minor">
-            <a:schemeClr val="lt1"/>
-          </a:fontRef>
-        </p:style>
-        <p:txBody>
-          <a:bodyPr rtlCol="0" anchor="ctr" wrap="square" lIns="76200" rIns="76200" tIns="50800" bIns="50800"/>
-          <a:lstStyle/>
-          <a:p>
-            <a:pPr algn="ctr"/>
-            <a:r>
-              <a:rPr b="1" sz="1300">
-                <a:solidFill>
-                  <a:srgbClr val="171B22"/>
-                </a:solidFill>
-                <a:latin typeface="Arial"/>
-              </a:rPr>
-              <a:t>[ Insert your measured results here, e.g. “caught 9/10 known visible issues, 0 false all-clears across N cars; median latency ~X s.”  Do not state numbers you have not actually measured. ]</a:t>
+              <a:rPr sz="1150" b="0">
+                <a:solidFill>
+                  <a:srgbClr val="5F6266"/>
+                </a:solidFill>
+                <a:latin typeface="Arial"/>
+              </a:rPr>
+              <a:t>Sources: docs/05-TEST-RESULTS.md · docs/05b-MODEL-REVIEW.md</a:t>
             </a:r>
           </a:p>
         </p:txBody>
@@ -4416,187 +4432,215 @@
           <a:noFill/>
         </p:spPr>
         <p:txBody>
-          <a:bodyPr wrap="square" anchor="t" lIns="0" rIns="0" tIns="0" bIns="0">
-            <a:spAutoFit/>
-          </a:bodyPr>
-          <a:lstStyle/>
-          <a:p>
-            <a:pPr algn="l">
-              <a:lnSpc>
-                <a:spcPct val="105000"/>
-              </a:lnSpc>
-            </a:pPr>
-            <a:r>
-              <a:rPr sz="2700" b="1">
-                <a:solidFill>
-                  <a:srgbClr val="171B22"/>
-                </a:solidFill>
-                <a:latin typeface="Arial"/>
-              </a:rPr>
-              <a:t>Additional Details / Future Development</a:t>
-            </a:r>
-          </a:p>
-        </p:txBody>
-      </p:sp>
-      <p:sp>
-        <p:nvSpPr>
-          <p:cNvPr id="5" name="TextBox 4"/>
-          <p:cNvSpPr txBox="1"/>
-          <p:nvPr/>
-        </p:nvSpPr>
-        <p:spPr>
-          <a:xfrm>
-            <a:off x="502920" y="1737360"/>
-            <a:ext cx="11155680" cy="3657600"/>
-          </a:xfrm>
-          <a:prstGeom prst="rect">
-            <a:avLst/>
-          </a:prstGeom>
-          <a:noFill/>
-        </p:spPr>
-        <p:txBody>
           <a:bodyPr wrap="square" lIns="0" rIns="0" tIns="0" bIns="0">
             <a:spAutoFit/>
           </a:bodyPr>
           <a:lstStyle/>
           <a:p>
+            <a:pPr algn="l">
+              <a:lnSpc>
+                <a:spcPct val="108000"/>
+              </a:lnSpc>
+            </a:pPr>
+            <a:r>
+              <a:rPr sz="2700" b="1">
+                <a:solidFill>
+                  <a:srgbClr val="2A282A"/>
+                </a:solidFill>
+                <a:latin typeface="Arial"/>
+              </a:rPr>
+              <a:t>Additional Details/Future Development</a:t>
+            </a:r>
+          </a:p>
+        </p:txBody>
+      </p:sp>
+      <p:sp>
+        <p:nvSpPr>
+          <p:cNvPr id="5" name="TextBox 4"/>
+          <p:cNvSpPr txBox="1"/>
+          <p:nvPr/>
+        </p:nvSpPr>
+        <p:spPr>
+          <a:xfrm>
+            <a:off x="502920" y="1737360"/>
+            <a:ext cx="11155680" cy="4206240"/>
+          </a:xfrm>
+          <a:prstGeom prst="rect">
+            <a:avLst/>
+          </a:prstGeom>
+          <a:noFill/>
+        </p:spPr>
+        <p:txBody>
+          <a:bodyPr wrap="square" lIns="0" rIns="0" tIns="0" bIns="0">
+            <a:spAutoFit/>
+          </a:bodyPr>
+          <a:lstStyle/>
+          <a:p>
             <a:pPr>
               <a:lnSpc>
-                <a:spcPct val="105000"/>
+                <a:spcPct val="108000"/>
               </a:lnSpc>
               <a:spcAft>
-                <a:spcPts val="1200"/>
+                <a:spcPts val="1100"/>
               </a:spcAft>
             </a:pPr>
             <a:r>
               <a:rPr b="1" sz="1500">
                 <a:solidFill>
-                  <a:srgbClr val="171B22"/>
-                </a:solidFill>
-                <a:latin typeface="Arial"/>
-              </a:rPr>
-              <a:t>•  Live RC integration. </a:t>
+                  <a:srgbClr val="2A282A"/>
+                </a:solidFill>
+                <a:latin typeface="Arial"/>
+              </a:rPr>
+              <a:t>•  Live registration data. </a:t>
             </a:r>
             <a:r>
               <a:rPr sz="1500">
                 <a:solidFill>
-                  <a:srgbClr val="171B22"/>
-                </a:solidFill>
-                <a:latin typeface="Arial"/>
-              </a:rPr>
-              <a:t>Connect an authorized VAHAN provider to replace simulated registration data.</a:t>
+                  <a:srgbClr val="2A282A"/>
+                </a:solidFill>
+                <a:latin typeface="Arial"/>
+              </a:rPr>
+              <a:t>Connect a licensed provider so records become “Record verified”, not simulated.</a:t>
             </a:r>
           </a:p>
           <a:p>
             <a:pPr>
               <a:lnSpc>
-                <a:spcPct val="105000"/>
+                <a:spcPct val="108000"/>
               </a:lnSpc>
               <a:spcAft>
-                <a:spcPts val="1200"/>
+                <a:spcPts val="1100"/>
               </a:spcAft>
             </a:pPr>
             <a:r>
               <a:rPr b="1" sz="1500">
                 <a:solidFill>
-                  <a:srgbClr val="171B22"/>
-                </a:solidFill>
-                <a:latin typeface="Arial"/>
-              </a:rPr>
-              <a:t>•  History signals. </a:t>
+                  <a:srgbClr val="2A282A"/>
+                </a:solidFill>
+                <a:latin typeface="Arial"/>
+              </a:rPr>
+              <a:t>•  A real accuracy benchmark. </a:t>
             </a:r>
             <a:r>
               <a:rPr sz="1500">
                 <a:solidFill>
-                  <a:srgbClr val="171B22"/>
-                </a:solidFill>
-                <a:latin typeface="Arial"/>
-              </a:rPr>
-              <a:t>Partner data for accident / service history and odometer-tampering checks (not available via API today).</a:t>
+                  <a:srgbClr val="2A282A"/>
+                </a:solidFill>
+                <a:latin typeface="Arial"/>
+              </a:rPr>
+              <a:t>~100 labelled photo sets checked by mechanics → per-defect precision/recall.</a:t>
             </a:r>
           </a:p>
           <a:p>
             <a:pPr>
               <a:lnSpc>
-                <a:spcPct val="105000"/>
+                <a:spcPct val="108000"/>
               </a:lnSpc>
               <a:spcAft>
-                <a:spcPts val="1200"/>
+                <a:spcPts val="1100"/>
               </a:spcAft>
             </a:pPr>
             <a:r>
               <a:rPr b="1" sz="1500">
                 <a:solidFill>
-                  <a:srgbClr val="171B22"/>
-                </a:solidFill>
-                <a:latin typeface="Arial"/>
-              </a:rPr>
-              <a:t>•  Multilingual + voice. </a:t>
+                  <a:srgbClr val="2A282A"/>
+                </a:solidFill>
+                <a:latin typeface="Arial"/>
+              </a:rPr>
+              <a:t>•  Accounts. </a:t>
             </a:r>
             <a:r>
               <a:rPr sz="1500">
                 <a:solidFill>
-                  <a:srgbClr val="171B22"/>
-                </a:solidFill>
-                <a:latin typeface="Arial"/>
-              </a:rPr>
-              <a:t>Gemini-native local-language and spoken reports for wider reach.</a:t>
+                  <a:srgbClr val="2A282A"/>
+                </a:solidFill>
+                <a:latin typeface="Arial"/>
+              </a:rPr>
+              <a:t>Firebase Authentication so buyers can keep and share their reports.</a:t>
             </a:r>
           </a:p>
           <a:p>
             <a:pPr>
               <a:lnSpc>
-                <a:spcPct val="105000"/>
+                <a:spcPct val="108000"/>
               </a:lnSpc>
               <a:spcAft>
-                <a:spcPts val="1200"/>
+                <a:spcPts val="1100"/>
               </a:spcAft>
             </a:pPr>
             <a:r>
               <a:rPr b="1" sz="1500">
                 <a:solidFill>
-                  <a:srgbClr val="171B22"/>
-                </a:solidFill>
-                <a:latin typeface="Arial"/>
-              </a:rPr>
-              <a:t>•  Seller &amp; dealer mode. </a:t>
+                  <a:srgbClr val="2A282A"/>
+                </a:solidFill>
+                <a:latin typeface="Arial"/>
+              </a:rPr>
+              <a:t>•  History signals. </a:t>
             </a:r>
             <a:r>
               <a:rPr sz="1500">
                 <a:solidFill>
-                  <a:srgbClr val="171B22"/>
-                </a:solidFill>
-                <a:latin typeface="Arial"/>
-              </a:rPr>
-              <a:t>Shareable trust reports; an API for marketplaces and inspectors.</a:t>
+                  <a:srgbClr val="2A282A"/>
+                </a:solidFill>
+                <a:latin typeface="Arial"/>
+              </a:rPr>
+              <a:t>Partner data for accident, service and odometer history.</a:t>
             </a:r>
           </a:p>
           <a:p>
             <a:pPr>
               <a:lnSpc>
-                <a:spcPct val="105000"/>
+                <a:spcPct val="108000"/>
               </a:lnSpc>
               <a:spcAft>
-                <a:spcPts val="1200"/>
+                <a:spcPts val="1100"/>
               </a:spcAft>
             </a:pPr>
             <a:r>
               <a:rPr b="1" sz="1500">
                 <a:solidFill>
-                  <a:srgbClr val="171B22"/>
-                </a:solidFill>
-                <a:latin typeface="Arial"/>
-              </a:rPr>
-              <a:t>•  Adjacent products. </a:t>
+                  <a:srgbClr val="2A282A"/>
+                </a:solidFill>
+                <a:latin typeface="Arial"/>
+              </a:rPr>
+              <a:t>•  Local languages. </a:t>
             </a:r>
             <a:r>
               <a:rPr sz="1500">
                 <a:solidFill>
-                  <a:srgbClr val="171B22"/>
-                </a:solidFill>
-                <a:latin typeface="Arial"/>
-              </a:rPr>
-              <a:t>Same evidence-tagged engine applied to rental-listing verification (DwellCheck).</a:t>
+                  <a:srgbClr val="2A282A"/>
+                </a:solidFill>
+                <a:latin typeface="Arial"/>
+              </a:rPr>
+              <a:t>Reports in Hindi and regional languages with Gemini.</a:t>
+            </a:r>
+          </a:p>
+          <a:p>
+            <a:pPr>
+              <a:lnSpc>
+                <a:spcPct val="108000"/>
+              </a:lnSpc>
+              <a:spcAft>
+                <a:spcPts val="1100"/>
+              </a:spcAft>
+            </a:pPr>
+            <a:r>
+              <a:rPr b="1" sz="1500">
+                <a:solidFill>
+                  <a:srgbClr val="2A282A"/>
+                </a:solidFill>
+                <a:latin typeface="Arial"/>
+              </a:rPr>
+              <a:t>•  Same engine, new listings. </a:t>
+            </a:r>
+            <a:r>
+              <a:rPr sz="1500">
+                <a:solidFill>
+                  <a:srgbClr val="2A282A"/>
+                </a:solidFill>
+                <a:latin typeface="Arial"/>
+              </a:rPr>
+              <a:t>Verify rental-flat listings with the same evidence-tagged approach.</a:t>
             </a:r>
           </a:p>
         </p:txBody>
@@ -4704,20 +4748,20 @@
           <a:noFill/>
         </p:spPr>
         <p:txBody>
-          <a:bodyPr wrap="square" anchor="t" lIns="0" rIns="0" tIns="0" bIns="0">
+          <a:bodyPr wrap="square" lIns="0" rIns="0" tIns="0" bIns="0">
             <a:spAutoFit/>
           </a:bodyPr>
           <a:lstStyle/>
           <a:p>
             <a:pPr algn="l">
               <a:lnSpc>
-                <a:spcPct val="105000"/>
+                <a:spcPct val="108000"/>
               </a:lnSpc>
             </a:pPr>
             <a:r>
               <a:rPr sz="2700" b="1">
                 <a:solidFill>
-                  <a:srgbClr val="171B22"/>
+                  <a:srgbClr val="2A282A"/>
                 </a:solidFill>
                 <a:latin typeface="Arial"/>
               </a:rPr>
@@ -4735,7 +4779,7 @@
         <p:spPr>
           <a:xfrm>
             <a:off x="731520" y="1920240"/>
-            <a:ext cx="4937760" cy="457200"/>
+            <a:ext cx="4480560" cy="457200"/>
           </a:xfrm>
           <a:prstGeom prst="rect">
             <a:avLst/>
@@ -4743,20 +4787,20 @@
           <a:noFill/>
         </p:spPr>
         <p:txBody>
-          <a:bodyPr wrap="square" anchor="t" lIns="0" rIns="0" tIns="0" bIns="0">
+          <a:bodyPr wrap="square" lIns="0" rIns="0" tIns="0" bIns="0">
             <a:spAutoFit/>
           </a:bodyPr>
           <a:lstStyle/>
           <a:p>
             <a:pPr algn="l">
               <a:lnSpc>
-                <a:spcPct val="105000"/>
+                <a:spcPct val="108000"/>
               </a:lnSpc>
             </a:pPr>
             <a:r>
               <a:rPr sz="1700" b="1">
                 <a:solidFill>
-                  <a:srgbClr val="171B22"/>
+                  <a:srgbClr val="2A282A"/>
                 </a:solidFill>
                 <a:latin typeface="Arial"/>
               </a:rPr>
@@ -4773,18 +4817,18 @@
         </p:nvSpPr>
         <p:spPr>
           <a:xfrm>
-            <a:off x="5760720" y="1920240"/>
-            <a:ext cx="5852160" cy="502920"/>
+            <a:off x="5212080" y="1874520"/>
+            <a:ext cx="6446520" cy="502920"/>
           </a:xfrm>
           <a:prstGeom prst="roundRect">
             <a:avLst/>
           </a:prstGeom>
           <a:solidFill>
-            <a:srgbClr val="F2F4F7"/>
+            <a:srgbClr val="F6F3F2"/>
           </a:solidFill>
           <a:ln w="12700">
             <a:solidFill>
-              <a:srgbClr val="D4DAE2"/>
+              <a:srgbClr val="D6D2D0"/>
             </a:solidFill>
           </a:ln>
           <a:effectLst/>
@@ -4819,8 +4863,8 @@
         </p:nvSpPr>
         <p:spPr>
           <a:xfrm>
-            <a:off x="5943600" y="2029968"/>
-            <a:ext cx="5486400" cy="365760"/>
+            <a:off x="5394960" y="1984248"/>
+            <a:ext cx="6126480" cy="365760"/>
           </a:xfrm>
           <a:prstGeom prst="rect">
             <a:avLst/>
@@ -4828,24 +4872,24 @@
           <a:noFill/>
         </p:spPr>
         <p:txBody>
-          <a:bodyPr wrap="square" anchor="t" lIns="0" rIns="0" tIns="0" bIns="0">
+          <a:bodyPr wrap="square" lIns="0" rIns="0" tIns="0" bIns="0">
             <a:spAutoFit/>
           </a:bodyPr>
           <a:lstStyle/>
           <a:p>
             <a:pPr algn="l">
               <a:lnSpc>
-                <a:spcPct val="105000"/>
+                <a:spcPct val="108000"/>
               </a:lnSpc>
             </a:pPr>
             <a:r>
               <a:rPr sz="1300" b="0">
                 <a:solidFill>
-                  <a:srgbClr val="55606E"/>
-                </a:solidFill>
-                <a:latin typeface="Arial"/>
-              </a:rPr>
-              <a:t>[ add public GitHub URL ]</a:t>
+                  <a:srgbClr val="2A282A"/>
+                </a:solidFill>
+                <a:latin typeface="Arial"/>
+              </a:rPr>
+              <a:t>https://github.com/radhikaaudi/Veriqo</a:t>
             </a:r>
           </a:p>
         </p:txBody>
@@ -4859,7 +4903,7 @@
         <p:spPr>
           <a:xfrm>
             <a:off x="731520" y="2834640"/>
-            <a:ext cx="4937760" cy="457200"/>
+            <a:ext cx="4480560" cy="457200"/>
           </a:xfrm>
           <a:prstGeom prst="rect">
             <a:avLst/>
@@ -4867,24 +4911,24 @@
           <a:noFill/>
         </p:spPr>
         <p:txBody>
-          <a:bodyPr wrap="square" anchor="t" lIns="0" rIns="0" tIns="0" bIns="0">
+          <a:bodyPr wrap="square" lIns="0" rIns="0" tIns="0" bIns="0">
             <a:spAutoFit/>
           </a:bodyPr>
           <a:lstStyle/>
           <a:p>
             <a:pPr algn="l">
               <a:lnSpc>
-                <a:spcPct val="105000"/>
+                <a:spcPct val="108000"/>
               </a:lnSpc>
             </a:pPr>
             <a:r>
               <a:rPr sz="1700" b="1">
                 <a:solidFill>
-                  <a:srgbClr val="171B22"/>
-                </a:solidFill>
-                <a:latin typeface="Arial"/>
-              </a:rPr>
-              <a:t>●  Demo Video Link (3 minutes)</a:t>
+                  <a:srgbClr val="2A282A"/>
+                </a:solidFill>
+                <a:latin typeface="Arial"/>
+              </a:rPr>
+              <a:t>●  Demo Video Link (3 Minutes)</a:t>
             </a:r>
           </a:p>
         </p:txBody>
@@ -4897,18 +4941,18 @@
         </p:nvSpPr>
         <p:spPr>
           <a:xfrm>
-            <a:off x="5760720" y="2834640"/>
-            <a:ext cx="5852160" cy="502920"/>
+            <a:off x="5212080" y="2788920"/>
+            <a:ext cx="6446520" cy="502920"/>
           </a:xfrm>
           <a:prstGeom prst="roundRect">
             <a:avLst/>
           </a:prstGeom>
           <a:solidFill>
-            <a:srgbClr val="F2F4F7"/>
+            <a:srgbClr val="F6F3F2"/>
           </a:solidFill>
           <a:ln w="12700">
             <a:solidFill>
-              <a:srgbClr val="D4DAE2"/>
+              <a:srgbClr val="D6D2D0"/>
             </a:solidFill>
           </a:ln>
           <a:effectLst/>
@@ -4943,8 +4987,8 @@
         </p:nvSpPr>
         <p:spPr>
           <a:xfrm>
-            <a:off x="5943600" y="2944368"/>
-            <a:ext cx="5486400" cy="365760"/>
+            <a:off x="5394960" y="2898648"/>
+            <a:ext cx="6126480" cy="365760"/>
           </a:xfrm>
           <a:prstGeom prst="rect">
             <a:avLst/>
@@ -4952,24 +4996,24 @@
           <a:noFill/>
         </p:spPr>
         <p:txBody>
-          <a:bodyPr wrap="square" anchor="t" lIns="0" rIns="0" tIns="0" bIns="0">
+          <a:bodyPr wrap="square" lIns="0" rIns="0" tIns="0" bIns="0">
             <a:spAutoFit/>
           </a:bodyPr>
           <a:lstStyle/>
           <a:p>
             <a:pPr algn="l">
               <a:lnSpc>
-                <a:spcPct val="105000"/>
+                <a:spcPct val="108000"/>
               </a:lnSpc>
             </a:pPr>
             <a:r>
               <a:rPr sz="1300" b="0">
                 <a:solidFill>
-                  <a:srgbClr val="55606E"/>
-                </a:solidFill>
-                <a:latin typeface="Arial"/>
-              </a:rPr>
-              <a:t>[ add video URL — must show the working flow ]</a:t>
+                  <a:srgbClr val="5F6266"/>
+                </a:solidFill>
+                <a:latin typeface="Arial"/>
+              </a:rPr>
+              <a:t>[ paste the video link after upload ]</a:t>
             </a:r>
           </a:p>
         </p:txBody>
@@ -4983,7 +5027,7 @@
         <p:spPr>
           <a:xfrm>
             <a:off x="731520" y="3749040"/>
-            <a:ext cx="4937760" cy="457200"/>
+            <a:ext cx="4480560" cy="457200"/>
           </a:xfrm>
           <a:prstGeom prst="rect">
             <a:avLst/>
@@ -4991,24 +5035,24 @@
           <a:noFill/>
         </p:spPr>
         <p:txBody>
-          <a:bodyPr wrap="square" anchor="t" lIns="0" rIns="0" tIns="0" bIns="0">
+          <a:bodyPr wrap="square" lIns="0" rIns="0" tIns="0" bIns="0">
             <a:spAutoFit/>
           </a:bodyPr>
           <a:lstStyle/>
           <a:p>
             <a:pPr algn="l">
               <a:lnSpc>
-                <a:spcPct val="105000"/>
+                <a:spcPct val="108000"/>
               </a:lnSpc>
             </a:pPr>
             <a:r>
               <a:rPr sz="1700" b="1">
                 <a:solidFill>
-                  <a:srgbClr val="171B22"/>
-                </a:solidFill>
-                <a:latin typeface="Arial"/>
-              </a:rPr>
-              <a:t>●  Final Product Link (deployed)</a:t>
+                  <a:srgbClr val="2A282A"/>
+                </a:solidFill>
+                <a:latin typeface="Arial"/>
+              </a:rPr>
+              <a:t>●  Final Product Link</a:t>
             </a:r>
           </a:p>
         </p:txBody>
@@ -5021,18 +5065,18 @@
         </p:nvSpPr>
         <p:spPr>
           <a:xfrm>
-            <a:off x="5760720" y="3749040"/>
-            <a:ext cx="5852160" cy="502920"/>
+            <a:off x="5212080" y="3703320"/>
+            <a:ext cx="6446520" cy="502920"/>
           </a:xfrm>
           <a:prstGeom prst="roundRect">
             <a:avLst/>
           </a:prstGeom>
           <a:solidFill>
-            <a:srgbClr val="F2F4F7"/>
+            <a:srgbClr val="F6F3F2"/>
           </a:solidFill>
           <a:ln w="12700">
             <a:solidFill>
-              <a:srgbClr val="D4DAE2"/>
+              <a:srgbClr val="D6D2D0"/>
             </a:solidFill>
           </a:ln>
           <a:effectLst/>
@@ -5067,8 +5111,8 @@
         </p:nvSpPr>
         <p:spPr>
           <a:xfrm>
-            <a:off x="5943600" y="3858768"/>
-            <a:ext cx="5486400" cy="365760"/>
+            <a:off x="5394960" y="3813048"/>
+            <a:ext cx="6126480" cy="365760"/>
           </a:xfrm>
           <a:prstGeom prst="rect">
             <a:avLst/>
@@ -5076,24 +5120,24 @@
           <a:noFill/>
         </p:spPr>
         <p:txBody>
-          <a:bodyPr wrap="square" anchor="t" lIns="0" rIns="0" tIns="0" bIns="0">
+          <a:bodyPr wrap="square" lIns="0" rIns="0" tIns="0" bIns="0">
             <a:spAutoFit/>
           </a:bodyPr>
           <a:lstStyle/>
           <a:p>
             <a:pPr algn="l">
               <a:lnSpc>
-                <a:spcPct val="105000"/>
+                <a:spcPct val="108000"/>
               </a:lnSpc>
             </a:pPr>
             <a:r>
               <a:rPr sz="1300" b="0">
                 <a:solidFill>
-                  <a:srgbClr val="55606E"/>
-                </a:solidFill>
-                <a:latin typeface="Arial"/>
-              </a:rPr>
-              <a:t>[ add live Firebase Hosting URL — must stay up during evaluation ]</a:t>
+                  <a:srgbClr val="2A282A"/>
+                </a:solidFill>
+                <a:latin typeface="Arial"/>
+              </a:rPr>
+              <a:t>https://veriqo-api-920194228751.us-central1.run.app</a:t>
             </a:r>
           </a:p>
         </p:txBody>
@@ -5106,18 +5150,18 @@
         </p:nvSpPr>
         <p:spPr>
           <a:xfrm>
-            <a:off x="731520" y="4937760"/>
-            <a:ext cx="10881360" cy="914400"/>
+            <a:off x="502920" y="4937760"/>
+            <a:ext cx="11155680" cy="640080"/>
           </a:xfrm>
           <a:prstGeom prst="roundRect">
             <a:avLst/>
           </a:prstGeom>
           <a:solidFill>
-            <a:srgbClr val="FDECEA"/>
+            <a:srgbClr val="F6F3F2"/>
           </a:solidFill>
-          <a:ln w="12700">
+          <a:ln w="15875">
             <a:solidFill>
-              <a:srgbClr val="B42318"/>
+              <a:srgbClr val="D6D2D0"/>
             </a:solidFill>
           </a:ln>
           <a:effectLst/>
@@ -5137,18 +5181,18 @@
           </a:fontRef>
         </p:style>
         <p:txBody>
-          <a:bodyPr rtlCol="0" anchor="ctr" wrap="square" lIns="76200" rIns="76200" tIns="50800" bIns="50800"/>
+          <a:bodyPr rtlCol="0" anchor="ctr" wrap="square" lIns="152400" rIns="152400"/>
           <a:lstStyle/>
           <a:p>
             <a:pPr algn="ctr"/>
             <a:r>
-              <a:rPr b="1" sz="1300">
-                <a:solidFill>
-                  <a:srgbClr val="171B22"/>
-                </a:solidFill>
-                <a:latin typeface="Arial"/>
-              </a:rPr>
-              <a:t>These three links are the evaluation gates. The deployed app must remain live and the video must clearly show the working flow — a broken link or a non-demonstrative video stops evaluation.</a:t>
+              <a:rPr sz="1250">
+                <a:solidFill>
+                  <a:srgbClr val="2A282A"/>
+                </a:solidFill>
+                <a:latin typeface="Arial"/>
+              </a:rPr>
+              <a:t>The live app is kept warm (1 always-on Cloud Run instance) for the evaluation period.</a:t>
             </a:r>
           </a:p>
         </p:txBody>
@@ -5342,20 +5386,20 @@
           <a:noFill/>
         </p:spPr>
         <p:txBody>
-          <a:bodyPr wrap="square" anchor="t" lIns="0" rIns="0" tIns="0" bIns="0">
+          <a:bodyPr wrap="square" lIns="0" rIns="0" tIns="0" bIns="0">
             <a:spAutoFit/>
           </a:bodyPr>
           <a:lstStyle/>
           <a:p>
             <a:pPr algn="l">
               <a:lnSpc>
-                <a:spcPct val="105000"/>
+                <a:spcPct val="108000"/>
               </a:lnSpc>
             </a:pPr>
             <a:r>
               <a:rPr sz="2700" b="1">
                 <a:solidFill>
-                  <a:srgbClr val="171B22"/>
+                  <a:srgbClr val="2A282A"/>
                 </a:solidFill>
                 <a:latin typeface="Arial"/>
               </a:rPr>
@@ -5381,7 +5425,7 @@
           <a:noFill/>
         </p:spPr>
         <p:txBody>
-          <a:bodyPr wrap="square" anchor="t" lIns="0" rIns="0" tIns="0" bIns="0">
+          <a:bodyPr wrap="square" lIns="0" rIns="0" tIns="0" bIns="0">
             <a:spAutoFit/>
           </a:bodyPr>
           <a:lstStyle/>
@@ -5394,11 +5438,11 @@
             <a:r>
               <a:rPr sz="1700" b="0">
                 <a:solidFill>
-                  <a:srgbClr val="171B22"/>
-                </a:solidFill>
-                <a:latin typeface="Arial"/>
-              </a:rPr>
-              <a:t>Veriqo turns a used-car buyer's photos + the registration number into one clear, evidence-tagged report in about a minute — before they pay or travel to see the car.</a:t>
+                  <a:srgbClr val="2A282A"/>
+                </a:solidFill>
+                <a:latin typeface="Arial"/>
+              </a:rPr>
+              <a:t>Veriqo turns a used-car buyer's photos, the registration number and the seller's listing into one evidence-tagged report — measured median 9.8 seconds from upload to report on the live deployment.</a:t>
             </a:r>
           </a:p>
         </p:txBody>
@@ -5411,8 +5455,8 @@
         </p:nvSpPr>
         <p:spPr>
           <a:xfrm>
-            <a:off x="502920" y="2651760"/>
-            <a:ext cx="11155680" cy="2377440"/>
+            <a:off x="502920" y="2606040"/>
+            <a:ext cx="11155680" cy="2560320"/>
           </a:xfrm>
           <a:prstGeom prst="rect">
             <a:avLst/>
@@ -5427,7 +5471,7 @@
           <a:p>
             <a:pPr>
               <a:lnSpc>
-                <a:spcPct val="105000"/>
+                <a:spcPct val="108000"/>
               </a:lnSpc>
               <a:spcAft>
                 <a:spcPts val="1000"/>
@@ -5436,26 +5480,26 @@
             <a:r>
               <a:rPr b="1" sz="1500">
                 <a:solidFill>
-                  <a:srgbClr val="171B22"/>
-                </a:solidFill>
-                <a:latin typeface="Arial"/>
-              </a:rPr>
-              <a:t>•  Gemini reads the photos </a:t>
+                  <a:srgbClr val="2A282A"/>
+                </a:solidFill>
+                <a:latin typeface="Arial"/>
+              </a:rPr>
+              <a:t>•  Gemini 2.5 Flash reads every photo: </a:t>
             </a:r>
             <a:r>
               <a:rPr sz="1500">
                 <a:solidFill>
-                  <a:srgbClr val="171B22"/>
-                </a:solidFill>
-                <a:latin typeface="Arial"/>
-              </a:rPr>
-              <a:t>for visible issues (damage, rust, tyre wear, paint mismatch) with a confidence level.</a:t>
+                  <a:srgbClr val="2A282A"/>
+                </a:solidFill>
+                <a:latin typeface="Arial"/>
+              </a:rPr>
+              <a:t>visible damage, rust, tyre wear and interior damage — each finding linked to the photo it came from.</a:t>
             </a:r>
           </a:p>
           <a:p>
             <a:pPr>
               <a:lnSpc>
-                <a:spcPct val="105000"/>
+                <a:spcPct val="108000"/>
               </a:lnSpc>
               <a:spcAft>
                 <a:spcPts val="1000"/>
@@ -5464,26 +5508,26 @@
             <a:r>
               <a:rPr b="1" sz="1500">
                 <a:solidFill>
-                  <a:srgbClr val="171B22"/>
-                </a:solidFill>
-                <a:latin typeface="Arial"/>
-              </a:rPr>
-              <a:t>•  A registration (RC) lookup </a:t>
+                  <a:srgbClr val="2A282A"/>
+                </a:solidFill>
+                <a:latin typeface="Arial"/>
+              </a:rPr>
+              <a:t>•  A registration lookup adds record facts </a:t>
             </a:r>
             <a:r>
               <a:rPr sz="1500">
                 <a:solidFill>
-                  <a:srgbClr val="171B22"/>
-                </a:solidFill>
-                <a:latin typeface="Arial"/>
-              </a:rPr>
-              <a:t>adds official facts: insurance validity, active loan, challans, blacklist status.</a:t>
+                  <a:srgbClr val="2A282A"/>
+                </a:solidFill>
+                <a:latin typeface="Arial"/>
+              </a:rPr>
+              <a:t>(insurance, loan, challans, blacklist). In this prototype it is SIMULATED with synthetic test plates; any other plate is shown as “not verified”.</a:t>
             </a:r>
           </a:p>
           <a:p>
             <a:pPr>
               <a:lnSpc>
-                <a:spcPct val="105000"/>
+                <a:spcPct val="108000"/>
               </a:lnSpc>
               <a:spcAft>
                 <a:spcPts val="1000"/>
@@ -5492,26 +5536,26 @@
             <a:r>
               <a:rPr b="1" sz="1500">
                 <a:solidFill>
-                  <a:srgbClr val="171B22"/>
-                </a:solidFill>
-                <a:latin typeface="Arial"/>
-              </a:rPr>
-              <a:t>•  Deterministic rules combine both </a:t>
+                  <a:srgbClr val="2A282A"/>
+                </a:solidFill>
+                <a:latin typeface="Arial"/>
+              </a:rPr>
+              <a:t>•  Deterministic rules </a:t>
             </a:r>
             <a:r>
               <a:rPr sz="1500">
                 <a:solidFill>
-                  <a:srgbClr val="171B22"/>
-                </a:solidFill>
-                <a:latin typeface="Arial"/>
-              </a:rPr>
-              <a:t>into a transparent risk read and a list of what to get professionally inspected.</a:t>
+                  <a:srgbClr val="2A282A"/>
+                </a:solidFill>
+                <a:latin typeface="Arial"/>
+              </a:rPr>
+              <a:t>build a transparent score, flag a listing that doesn't match the record, and flag missing photo angles.</a:t>
             </a:r>
           </a:p>
           <a:p>
             <a:pPr>
               <a:lnSpc>
-                <a:spcPct val="105000"/>
+                <a:spcPct val="108000"/>
               </a:lnSpc>
               <a:spcAft>
                 <a:spcPts val="1000"/>
@@ -5520,20 +5564,20 @@
             <a:r>
               <a:rPr b="1" sz="1500">
                 <a:solidFill>
-                  <a:srgbClr val="171B22"/>
-                </a:solidFill>
-                <a:latin typeface="Arial"/>
-              </a:rPr>
-              <a:t>•  Every finding is labelled by source </a:t>
+                  <a:srgbClr val="2A282A"/>
+                </a:solidFill>
+                <a:latin typeface="Arial"/>
+              </a:rPr>
+              <a:t>•  Every finding is labelled </a:t>
             </a:r>
             <a:r>
               <a:rPr sz="1500">
                 <a:solidFill>
-                  <a:srgbClr val="171B22"/>
-                </a:solidFill>
-                <a:latin typeface="Arial"/>
-              </a:rPr>
-              <a:t>— Observed, Record, Inferred, or Not checked — so nothing is a black box.</a:t>
+                  <a:srgbClr val="2A282A"/>
+                </a:solidFill>
+                <a:latin typeface="Arial"/>
+              </a:rPr>
+              <a:t>Observed · Record · Inferred · Not checked — and every report ends with a prioritised “what to check before paying” list.</a:t>
             </a:r>
           </a:p>
         </p:txBody>
@@ -5546,18 +5590,18 @@
         </p:nvSpPr>
         <p:spPr>
           <a:xfrm>
-            <a:off x="502920" y="5257800"/>
-            <a:ext cx="11155680" cy="777240"/>
+            <a:off x="502920" y="5394960"/>
+            <a:ext cx="11155680" cy="731520"/>
           </a:xfrm>
           <a:prstGeom prst="roundRect">
             <a:avLst/>
           </a:prstGeom>
           <a:solidFill>
-            <a:srgbClr val="FFF4E5"/>
+            <a:srgbClr val="FDF3E4"/>
           </a:solidFill>
-          <a:ln w="12700">
+          <a:ln w="15875">
             <a:solidFill>
-              <a:srgbClr val="B26A00"/>
+              <a:srgbClr val="A9700C"/>
             </a:solidFill>
           </a:ln>
           <a:effectLst/>
@@ -5577,18 +5621,18 @@
           </a:fontRef>
         </p:style>
         <p:txBody>
-          <a:bodyPr rtlCol="0" anchor="ctr" wrap="square" lIns="76200" rIns="76200" tIns="50800" bIns="50800"/>
+          <a:bodyPr rtlCol="0" anchor="ctr" wrap="square" lIns="152400" rIns="152400"/>
           <a:lstStyle/>
           <a:p>
             <a:pPr algn="ctr"/>
             <a:r>
-              <a:rPr b="1" sz="1300">
-                <a:solidFill>
-                  <a:srgbClr val="171B22"/>
-                </a:solidFill>
-                <a:latin typeface="Arial"/>
-              </a:rPr>
-              <a:t>Veriqo is a red-flag triage — it tells you what to check. It never certifies a car as safe, and a photo is never treated as proof of a hidden mechanical fault.</a:t>
+              <a:rPr sz="1250">
+                <a:solidFill>
+                  <a:srgbClr val="2A282A"/>
+                </a:solidFill>
+                <a:latin typeface="Arial"/>
+              </a:rPr>
+              <a:t>Veriqo is a red-flag triage. It never certifies a car as safe — accident history and hidden mechanical condition are always listed as Not checked, so a clean-looking car never gets an “all clear”.</a:t>
             </a:r>
           </a:p>
         </p:txBody>
@@ -5696,53 +5740,53 @@
           <a:noFill/>
         </p:spPr>
         <p:txBody>
-          <a:bodyPr wrap="square" anchor="t" lIns="0" rIns="0" tIns="0" bIns="0">
-            <a:spAutoFit/>
-          </a:bodyPr>
-          <a:lstStyle/>
-          <a:p>
-            <a:pPr algn="l">
-              <a:lnSpc>
-                <a:spcPct val="105000"/>
-              </a:lnSpc>
-            </a:pPr>
-            <a:r>
-              <a:rPr sz="2700" b="1">
-                <a:solidFill>
-                  <a:srgbClr val="171B22"/>
-                </a:solidFill>
-                <a:latin typeface="Arial"/>
-              </a:rPr>
-              <a:t>Opportunities</a:t>
-            </a:r>
-          </a:p>
-        </p:txBody>
-      </p:sp>
-      <p:sp>
-        <p:nvSpPr>
-          <p:cNvPr id="5" name="TextBox 4"/>
-          <p:cNvSpPr txBox="1"/>
-          <p:nvPr/>
-        </p:nvSpPr>
-        <p:spPr>
-          <a:xfrm>
-            <a:off x="502920" y="1737360"/>
-            <a:ext cx="11155680" cy="2926080"/>
-          </a:xfrm>
-          <a:prstGeom prst="rect">
-            <a:avLst/>
-          </a:prstGeom>
-          <a:noFill/>
-        </p:spPr>
-        <p:txBody>
           <a:bodyPr wrap="square" lIns="0" rIns="0" tIns="0" bIns="0">
             <a:spAutoFit/>
           </a:bodyPr>
           <a:lstStyle/>
           <a:p>
+            <a:pPr algn="l">
+              <a:lnSpc>
+                <a:spcPct val="108000"/>
+              </a:lnSpc>
+            </a:pPr>
+            <a:r>
+              <a:rPr sz="2700" b="1">
+                <a:solidFill>
+                  <a:srgbClr val="2A282A"/>
+                </a:solidFill>
+                <a:latin typeface="Arial"/>
+              </a:rPr>
+              <a:t>Opportunities</a:t>
+            </a:r>
+          </a:p>
+        </p:txBody>
+      </p:sp>
+      <p:sp>
+        <p:nvSpPr>
+          <p:cNvPr id="5" name="TextBox 4"/>
+          <p:cNvSpPr txBox="1"/>
+          <p:nvPr/>
+        </p:nvSpPr>
+        <p:spPr>
+          <a:xfrm>
+            <a:off x="502920" y="1737360"/>
+            <a:ext cx="11155680" cy="2926080"/>
+          </a:xfrm>
+          <a:prstGeom prst="rect">
+            <a:avLst/>
+          </a:prstGeom>
+          <a:noFill/>
+        </p:spPr>
+        <p:txBody>
+          <a:bodyPr wrap="square" lIns="0" rIns="0" tIns="0" bIns="0">
+            <a:spAutoFit/>
+          </a:bodyPr>
+          <a:lstStyle/>
+          <a:p>
             <a:pPr>
               <a:lnSpc>
-                <a:spcPct val="105000"/>
+                <a:spcPct val="108000"/>
               </a:lnSpc>
               <a:spcAft>
                 <a:spcPts val="1600"/>
@@ -5751,7 +5795,7 @@
             <a:r>
               <a:rPr b="1" sz="1600">
                 <a:solidFill>
-                  <a:srgbClr val="171B22"/>
+                  <a:srgbClr val="2A282A"/>
                 </a:solidFill>
                 <a:latin typeface="Arial"/>
               </a:rPr>
@@ -5760,17 +5804,17 @@
             <a:r>
               <a:rPr sz="1600">
                 <a:solidFill>
-                  <a:srgbClr val="171B22"/>
-                </a:solidFill>
-                <a:latin typeface="Arial"/>
-              </a:rPr>
-              <a:t>Cars24 / Spinny inspect only the cars they sell; independent inspections are paid, physical and next-day. No self-serve AI photo check exists for ANY car or a private listing.</a:t>
+                  <a:srgbClr val="2A282A"/>
+                </a:solidFill>
+                <a:latin typeface="Arial"/>
+              </a:rPr>
+              <a:t>Marketplaces inspect only the cars they sell; independent inspections are paid, physical and take a day. Veriqo is an instant, self-serve first check for any car — including a private listing.</a:t>
             </a:r>
           </a:p>
           <a:p>
             <a:pPr>
               <a:lnSpc>
-                <a:spcPct val="105000"/>
+                <a:spcPct val="108000"/>
               </a:lnSpc>
               <a:spcAft>
                 <a:spcPts val="1600"/>
@@ -5779,7 +5823,7 @@
             <a:r>
               <a:rPr b="1" sz="1600">
                 <a:solidFill>
-                  <a:srgbClr val="171B22"/>
+                  <a:srgbClr val="2A282A"/>
                 </a:solidFill>
                 <a:latin typeface="Arial"/>
               </a:rPr>
@@ -5788,17 +5832,17 @@
             <a:r>
               <a:rPr sz="1600">
                 <a:solidFill>
-                  <a:srgbClr val="171B22"/>
-                </a:solidFill>
-                <a:latin typeface="Arial"/>
-              </a:rPr>
-              <a:t>An instant first-pass BEFORE money or travel — it surfaces red flags and the exact questions to ask the seller, and flags what needs a mechanic.</a:t>
+                  <a:srgbClr val="2A282A"/>
+                </a:solidFill>
+                <a:latin typeface="Arial"/>
+              </a:rPr>
+              <a:t>Before any money or travel, the buyer sees what the photos show, what the record says, what doesn't match, and exactly what to inspect.</a:t>
             </a:r>
           </a:p>
           <a:p>
             <a:pPr>
               <a:lnSpc>
-                <a:spcPct val="105000"/>
+                <a:spcPct val="108000"/>
               </a:lnSpc>
               <a:spcAft>
                 <a:spcPts val="1600"/>
@@ -5807,20 +5851,20 @@
             <a:r>
               <a:rPr b="1" sz="1600">
                 <a:solidFill>
-                  <a:srgbClr val="171B22"/>
-                </a:solidFill>
-                <a:latin typeface="Arial"/>
-              </a:rPr>
-              <a:t>•  USP — transparent provenance.  </a:t>
+                  <a:srgbClr val="2A282A"/>
+                </a:solidFill>
+                <a:latin typeface="Arial"/>
+              </a:rPr>
+              <a:t>•  USP — evidence you can trace.  </a:t>
             </a:r>
             <a:r>
               <a:rPr sz="1600">
                 <a:solidFill>
-                  <a:srgbClr val="171B22"/>
-                </a:solidFill>
-                <a:latin typeface="Arial"/>
-              </a:rPr>
-              <a:t>Every finding is tagged Observed (photo) / Record (RC) / Inferred (rules) / Not checked, and the risk score is just the sum of stated rules — auditable, not a mystery number.</a:t>
+                  <a:srgbClr val="2A282A"/>
+                </a:solidFill>
+                <a:latin typeface="Arial"/>
+              </a:rPr>
+              <a:t>Every finding says where it came from and what it's based on; the score is the sum of published rules; anything simulated or unverified is labelled as such.</a:t>
             </a:r>
           </a:p>
         </p:txBody>
@@ -5842,24 +5886,24 @@
           <a:noFill/>
         </p:spPr>
         <p:txBody>
-          <a:bodyPr wrap="square" anchor="t" lIns="0" rIns="0" tIns="0" bIns="0">
+          <a:bodyPr wrap="square" lIns="0" rIns="0" tIns="0" bIns="0">
             <a:spAutoFit/>
           </a:bodyPr>
           <a:lstStyle/>
           <a:p>
             <a:pPr algn="l">
               <a:lnSpc>
-                <a:spcPct val="105000"/>
+                <a:spcPct val="108000"/>
               </a:lnSpc>
             </a:pPr>
             <a:r>
               <a:rPr sz="1300" b="1">
                 <a:solidFill>
-                  <a:srgbClr val="55606E"/>
-                </a:solidFill>
-                <a:latin typeface="Arial"/>
-              </a:rPr>
-              <a:t>Four provenance tags used across the product:</a:t>
+                  <a:srgbClr val="5F6266"/>
+                </a:solidFill>
+                <a:latin typeface="Arial"/>
+              </a:rPr>
+              <a:t>The four provenance labels used in every report:</a:t>
             </a:r>
           </a:p>
         </p:txBody>
@@ -5873,13 +5917,13 @@
         <p:spPr>
           <a:xfrm>
             <a:off x="502920" y="5257800"/>
-            <a:ext cx="1828800" cy="274320"/>
+            <a:ext cx="1828800" cy="292608"/>
           </a:xfrm>
           <a:prstGeom prst="roundRect">
             <a:avLst/>
           </a:prstGeom>
           <a:solidFill>
-            <a:srgbClr val="3B82F6"/>
+            <a:srgbClr val="734B5E"/>
           </a:solidFill>
           <a:ln>
             <a:noFill/>
@@ -5901,12 +5945,12 @@
           </a:fontRef>
         </p:style>
         <p:txBody>
-          <a:bodyPr rtlCol="0" anchor="ctr" lIns="25400" rIns="25400" tIns="12700" bIns="12700"/>
+          <a:bodyPr rtlCol="0" anchor="ctr"/>
           <a:lstStyle/>
           <a:p>
             <a:pPr algn="ctr"/>
             <a:r>
-              <a:rPr sz="1000" b="1">
+              <a:rPr sz="1100" b="1">
                 <a:solidFill>
                   <a:srgbClr val="FFFFFF"/>
                 </a:solidFill>
@@ -5926,13 +5970,13 @@
         <p:spPr>
           <a:xfrm>
             <a:off x="2514600" y="5257800"/>
-            <a:ext cx="1828800" cy="274320"/>
+            <a:ext cx="1828800" cy="292608"/>
           </a:xfrm>
           <a:prstGeom prst="roundRect">
             <a:avLst/>
           </a:prstGeom>
           <a:solidFill>
-            <a:srgbClr val="8B5CF6"/>
+            <a:srgbClr val="3F6EA3"/>
           </a:solidFill>
           <a:ln>
             <a:noFill/>
@@ -5954,12 +5998,12 @@
           </a:fontRef>
         </p:style>
         <p:txBody>
-          <a:bodyPr rtlCol="0" anchor="ctr" lIns="25400" rIns="25400" tIns="12700" bIns="12700"/>
+          <a:bodyPr rtlCol="0" anchor="ctr"/>
           <a:lstStyle/>
           <a:p>
             <a:pPr algn="ctr"/>
             <a:r>
-              <a:rPr sz="1000" b="1">
+              <a:rPr sz="1100" b="1">
                 <a:solidFill>
                   <a:srgbClr val="FFFFFF"/>
                 </a:solidFill>
@@ -5979,13 +6023,13 @@
         <p:spPr>
           <a:xfrm>
             <a:off x="4526280" y="5257800"/>
-            <a:ext cx="1828800" cy="274320"/>
+            <a:ext cx="1828800" cy="292608"/>
           </a:xfrm>
           <a:prstGeom prst="roundRect">
             <a:avLst/>
           </a:prstGeom>
           <a:solidFill>
-            <a:srgbClr val="0891B2"/>
+            <a:srgbClr val="4A4C4B"/>
           </a:solidFill>
           <a:ln>
             <a:noFill/>
@@ -6007,12 +6051,12 @@
           </a:fontRef>
         </p:style>
         <p:txBody>
-          <a:bodyPr rtlCol="0" anchor="ctr" lIns="25400" rIns="25400" tIns="12700" bIns="12700"/>
+          <a:bodyPr rtlCol="0" anchor="ctr"/>
           <a:lstStyle/>
           <a:p>
             <a:pPr algn="ctr"/>
             <a:r>
-              <a:rPr sz="1000" b="1">
+              <a:rPr sz="1100" b="1">
                 <a:solidFill>
                   <a:srgbClr val="FFFFFF"/>
                 </a:solidFill>
@@ -6032,13 +6076,13 @@
         <p:spPr>
           <a:xfrm>
             <a:off x="6537960" y="5257800"/>
-            <a:ext cx="1828800" cy="274320"/>
+            <a:ext cx="1828800" cy="292608"/>
           </a:xfrm>
           <a:prstGeom prst="roundRect">
             <a:avLst/>
           </a:prstGeom>
           <a:solidFill>
-            <a:srgbClr val="64748B"/>
+            <a:srgbClr val="74777B"/>
           </a:solidFill>
           <a:ln>
             <a:noFill/>
@@ -6060,12 +6104,12 @@
           </a:fontRef>
         </p:style>
         <p:txBody>
-          <a:bodyPr rtlCol="0" anchor="ctr" lIns="25400" rIns="25400" tIns="12700" bIns="12700"/>
+          <a:bodyPr rtlCol="0" anchor="ctr"/>
           <a:lstStyle/>
           <a:p>
             <a:pPr algn="ctr"/>
             <a:r>
-              <a:rPr sz="1000" b="1">
+              <a:rPr sz="1100" b="1">
                 <a:solidFill>
                   <a:srgbClr val="FFFFFF"/>
                 </a:solidFill>
@@ -6179,145 +6223,38 @@
           <a:noFill/>
         </p:spPr>
         <p:txBody>
-          <a:bodyPr wrap="square" anchor="t" lIns="0" rIns="0" tIns="0" bIns="0">
-            <a:spAutoFit/>
-          </a:bodyPr>
-          <a:lstStyle/>
-          <a:p>
-            <a:pPr algn="l">
-              <a:lnSpc>
-                <a:spcPct val="105000"/>
-              </a:lnSpc>
-            </a:pPr>
-            <a:r>
-              <a:rPr sz="2700" b="1">
-                <a:solidFill>
-                  <a:srgbClr val="171B22"/>
-                </a:solidFill>
-                <a:latin typeface="Arial"/>
-              </a:rPr>
-              <a:t>List of features offered by the solution</a:t>
-            </a:r>
-          </a:p>
-        </p:txBody>
-      </p:sp>
-      <p:sp>
-        <p:nvSpPr>
-          <p:cNvPr id="5" name="TextBox 4"/>
-          <p:cNvSpPr txBox="1"/>
-          <p:nvPr/>
-        </p:nvSpPr>
-        <p:spPr>
-          <a:xfrm>
-            <a:off x="502920" y="1737360"/>
-            <a:ext cx="5486400" cy="4114800"/>
-          </a:xfrm>
-          <a:prstGeom prst="rect">
-            <a:avLst/>
-          </a:prstGeom>
-          <a:noFill/>
-        </p:spPr>
-        <p:txBody>
           <a:bodyPr wrap="square" lIns="0" rIns="0" tIns="0" bIns="0">
             <a:spAutoFit/>
           </a:bodyPr>
           <a:lstStyle/>
           <a:p>
-            <a:pPr>
+            <a:pPr algn="l">
               <a:lnSpc>
-                <a:spcPct val="105000"/>
+                <a:spcPct val="108000"/>
               </a:lnSpc>
-              <a:spcAft>
-                <a:spcPts val="1400"/>
-              </a:spcAft>
             </a:pPr>
             <a:r>
-              <a:rPr b="1" sz="1400">
-                <a:solidFill>
-                  <a:srgbClr val="171B22"/>
-                </a:solidFill>
-                <a:latin typeface="Arial"/>
-              </a:rPr>
-              <a:t>•  Photo condition analysis (Gemini). </a:t>
-            </a:r>
-            <a:r>
-              <a:rPr sz="1400">
-                <a:solidFill>
-                  <a:srgbClr val="171B22"/>
-                </a:solidFill>
-                <a:latin typeface="Arial"/>
-              </a:rPr>
-              <a:t>Visible damage, rust, tyre wear, paint mismatch — each with a confidence level.</a:t>
-            </a:r>
-          </a:p>
-          <a:p>
-            <a:pPr>
-              <a:lnSpc>
-                <a:spcPct val="105000"/>
-              </a:lnSpc>
-              <a:spcAft>
-                <a:spcPts val="1400"/>
-              </a:spcAft>
-            </a:pPr>
-            <a:r>
-              <a:rPr b="1" sz="1400">
-                <a:solidFill>
-                  <a:srgbClr val="171B22"/>
-                </a:solidFill>
-                <a:latin typeface="Arial"/>
-              </a:rPr>
-              <a:t>•  Registration (RC) verification. </a:t>
-            </a:r>
-            <a:r>
-              <a:rPr sz="1400">
-                <a:solidFill>
-                  <a:srgbClr val="171B22"/>
-                </a:solidFill>
-                <a:latin typeface="Arial"/>
-              </a:rPr>
-              <a:t>Make/model, insurance validity, active loan/hypothecation, challans, blacklist.</a:t>
-            </a:r>
-          </a:p>
-          <a:p>
-            <a:pPr>
-              <a:lnSpc>
-                <a:spcPct val="105000"/>
-              </a:lnSpc>
-              <a:spcAft>
-                <a:spcPts val="1400"/>
-              </a:spcAft>
-            </a:pPr>
-            <a:r>
-              <a:rPr b="1" sz="1400">
-                <a:solidFill>
-                  <a:srgbClr val="171B22"/>
-                </a:solidFill>
-                <a:latin typeface="Arial"/>
-              </a:rPr>
-              <a:t>•  Evidence-tagged findings. </a:t>
-            </a:r>
-            <a:r>
-              <a:rPr sz="1400">
-                <a:solidFill>
-                  <a:srgbClr val="171B22"/>
-                </a:solidFill>
-                <a:latin typeface="Arial"/>
-              </a:rPr>
-              <a:t>Observed / Record / Inferred / Not checked — the line is never blurred.</a:t>
-            </a:r>
-          </a:p>
-        </p:txBody>
-      </p:sp>
-      <p:sp>
-        <p:nvSpPr>
-          <p:cNvPr id="6" name="TextBox 5"/>
+              <a:rPr sz="2700" b="1">
+                <a:solidFill>
+                  <a:srgbClr val="2A282A"/>
+                </a:solidFill>
+                <a:latin typeface="Arial"/>
+              </a:rPr>
+              <a:t>List of features offered by the solution</a:t>
+            </a:r>
+          </a:p>
+        </p:txBody>
+      </p:sp>
+      <p:sp>
+        <p:nvSpPr>
+          <p:cNvPr id="5" name="TextBox 4"/>
           <p:cNvSpPr txBox="1"/>
           <p:nvPr/>
         </p:nvSpPr>
         <p:spPr>
           <a:xfrm>
-            <a:off x="6263640" y="1737360"/>
-            <a:ext cx="5486400" cy="4114800"/>
+            <a:off x="502920" y="1737360"/>
+            <a:ext cx="5486400" cy="3657600"/>
           </a:xfrm>
           <a:prstGeom prst="rect">
             <a:avLst/>
@@ -6332,85 +6269,248 @@
           <a:p>
             <a:pPr>
               <a:lnSpc>
-                <a:spcPct val="105000"/>
+                <a:spcPct val="108000"/>
               </a:lnSpc>
               <a:spcAft>
-                <a:spcPts val="1400"/>
+                <a:spcPts val="1300"/>
               </a:spcAft>
             </a:pPr>
             <a:r>
               <a:rPr b="1" sz="1400">
                 <a:solidFill>
-                  <a:srgbClr val="171B22"/>
-                </a:solidFill>
-                <a:latin typeface="Arial"/>
-              </a:rPr>
-              <a:t>•  Transparent risk breakdown. </a:t>
+                  <a:srgbClr val="2A282A"/>
+                </a:solidFill>
+                <a:latin typeface="Arial"/>
+              </a:rPr>
+              <a:t>•  Photo analysis with evidence. </a:t>
             </a:r>
             <a:r>
               <a:rPr sz="1400">
                 <a:solidFill>
-                  <a:srgbClr val="171B22"/>
-                </a:solidFill>
-                <a:latin typeface="Arial"/>
-              </a:rPr>
-              <a:t>Score = sum of published rules across visible condition, record and uncertainty.</a:t>
+                  <a:srgbClr val="2A282A"/>
+                </a:solidFill>
+                <a:latin typeface="Arial"/>
+              </a:rPr>
+              <a:t>Each finding shows the photo it came from, with Gemini's confidence.</a:t>
             </a:r>
           </a:p>
           <a:p>
             <a:pPr>
               <a:lnSpc>
-                <a:spcPct val="105000"/>
+                <a:spcPct val="108000"/>
               </a:lnSpc>
               <a:spcAft>
-                <a:spcPts val="1400"/>
+                <a:spcPts val="1300"/>
               </a:spcAft>
             </a:pPr>
             <a:r>
               <a:rPr b="1" sz="1400">
                 <a:solidFill>
-                  <a:srgbClr val="171B22"/>
-                </a:solidFill>
-                <a:latin typeface="Arial"/>
-              </a:rPr>
-              <a:t>•  “Get inspected” action list. </a:t>
+                  <a:srgbClr val="2A282A"/>
+                </a:solidFill>
+                <a:latin typeface="Arial"/>
+              </a:rPr>
+              <a:t>•  Registration check. </a:t>
             </a:r>
             <a:r>
               <a:rPr sz="1400">
                 <a:solidFill>
-                  <a:srgbClr val="171B22"/>
-                </a:solidFill>
-                <a:latin typeface="Arial"/>
-              </a:rPr>
-              <a:t>Clear next steps and questions to ask before paying.</a:t>
+                  <a:srgbClr val="2A282A"/>
+                </a:solidFill>
+                <a:latin typeface="Arial"/>
+              </a:rPr>
+              <a:t>Insurance, loan, challans, blacklist — simulated in this prototype and labelled so.</a:t>
             </a:r>
           </a:p>
           <a:p>
             <a:pPr>
               <a:lnSpc>
-                <a:spcPct val="105000"/>
+                <a:spcPct val="108000"/>
               </a:lnSpc>
               <a:spcAft>
-                <a:spcPts val="1400"/>
+                <a:spcPts val="1300"/>
               </a:spcAft>
             </a:pPr>
             <a:r>
               <a:rPr b="1" sz="1400">
                 <a:solidFill>
-                  <a:srgbClr val="171B22"/>
-                </a:solidFill>
-                <a:latin typeface="Arial"/>
-              </a:rPr>
-              <a:t>•  Shareable report + audit trail. </a:t>
+                  <a:srgbClr val="2A282A"/>
+                </a:solidFill>
+                <a:latin typeface="Arial"/>
+              </a:rPr>
+              <a:t>•  Listing vs record check. </a:t>
             </a:r>
             <a:r>
               <a:rPr sz="1400">
                 <a:solidFill>
-                  <a:srgbClr val="171B22"/>
-                </a:solidFill>
-                <a:latin typeface="Arial"/>
-              </a:rPr>
-              <a:t>Every report is saved with an append-only log of how it was produced.</a:t>
+                  <a:srgbClr val="2A282A"/>
+                </a:solidFill>
+                <a:latin typeface="Arial"/>
+              </a:rPr>
+              <a:t>Flags when the seller's make/model differs from the record.</a:t>
+            </a:r>
+          </a:p>
+          <a:p>
+            <a:pPr>
+              <a:lnSpc>
+                <a:spcPct val="108000"/>
+              </a:lnSpc>
+              <a:spcAft>
+                <a:spcPts val="1300"/>
+              </a:spcAft>
+            </a:pPr>
+            <a:r>
+              <a:rPr b="1" sz="1400">
+                <a:solidFill>
+                  <a:srgbClr val="2A282A"/>
+                </a:solidFill>
+                <a:latin typeface="Arial"/>
+              </a:rPr>
+              <a:t>•  Missing-angle detection. </a:t>
+            </a:r>
+            <a:r>
+              <a:rPr sz="1400">
+                <a:solidFill>
+                  <a:srgbClr val="2A282A"/>
+                </a:solidFill>
+                <a:latin typeface="Arial"/>
+              </a:rPr>
+              <a:t>Says which views (rear, sides, tyres, interior) were never shown.</a:t>
+            </a:r>
+          </a:p>
+        </p:txBody>
+      </p:sp>
+      <p:sp>
+        <p:nvSpPr>
+          <p:cNvPr id="6" name="TextBox 5"/>
+          <p:cNvSpPr txBox="1"/>
+          <p:nvPr/>
+        </p:nvSpPr>
+        <p:spPr>
+          <a:xfrm>
+            <a:off x="6263640" y="1737360"/>
+            <a:ext cx="5486400" cy="3657600"/>
+          </a:xfrm>
+          <a:prstGeom prst="rect">
+            <a:avLst/>
+          </a:prstGeom>
+          <a:noFill/>
+        </p:spPr>
+        <p:txBody>
+          <a:bodyPr wrap="square" lIns="0" rIns="0" tIns="0" bIns="0">
+            <a:spAutoFit/>
+          </a:bodyPr>
+          <a:lstStyle/>
+          <a:p>
+            <a:pPr>
+              <a:lnSpc>
+                <a:spcPct val="108000"/>
+              </a:lnSpc>
+              <a:spcAft>
+                <a:spcPts val="1300"/>
+              </a:spcAft>
+            </a:pPr>
+            <a:r>
+              <a:rPr b="1" sz="1400">
+                <a:solidFill>
+                  <a:srgbClr val="2A282A"/>
+                </a:solidFill>
+                <a:latin typeface="Arial"/>
+              </a:rPr>
+              <a:t>•  Transparent score. </a:t>
+            </a:r>
+            <a:r>
+              <a:rPr sz="1400">
+                <a:solidFill>
+                  <a:srgbClr val="2A282A"/>
+                </a:solidFill>
+                <a:latin typeface="Arial"/>
+              </a:rPr>
+              <a:t>Sum of published rules; photos alone can't max it out (capped at 60).</a:t>
+            </a:r>
+          </a:p>
+          <a:p>
+            <a:pPr>
+              <a:lnSpc>
+                <a:spcPct val="108000"/>
+              </a:lnSpc>
+              <a:spcAft>
+                <a:spcPts val="1300"/>
+              </a:spcAft>
+            </a:pPr>
+            <a:r>
+              <a:rPr b="1" sz="1400">
+                <a:solidFill>
+                  <a:srgbClr val="2A282A"/>
+                </a:solidFill>
+                <a:latin typeface="Arial"/>
+              </a:rPr>
+              <a:t>•  Prioritised checklist. </a:t>
+            </a:r>
+            <a:r>
+              <a:rPr sz="1400">
+                <a:solidFill>
+                  <a:srgbClr val="2A282A"/>
+                </a:solidFill>
+                <a:latin typeface="Arial"/>
+              </a:rPr>
+              <a:t>“What to check before paying”, highest-impact first.</a:t>
+            </a:r>
+          </a:p>
+          <a:p>
+            <a:pPr>
+              <a:lnSpc>
+                <a:spcPct val="108000"/>
+              </a:lnSpc>
+              <a:spcAft>
+                <a:spcPts val="1300"/>
+              </a:spcAft>
+            </a:pPr>
+            <a:r>
+              <a:rPr b="1" sz="1400">
+                <a:solidFill>
+                  <a:srgbClr val="2A282A"/>
+                </a:solidFill>
+                <a:latin typeface="Arial"/>
+              </a:rPr>
+              <a:t>•  Saved, shareable report. </a:t>
+            </a:r>
+            <a:r>
+              <a:rPr sz="1400">
+                <a:solidFill>
+                  <a:srgbClr val="2A282A"/>
+                </a:solidFill>
+                <a:latin typeface="Arial"/>
+              </a:rPr>
+              <a:t>Stored in Firestore; the link reopens it after a refresh.</a:t>
+            </a:r>
+          </a:p>
+          <a:p>
+            <a:pPr>
+              <a:lnSpc>
+                <a:spcPct val="108000"/>
+              </a:lnSpc>
+              <a:spcAft>
+                <a:spcPts val="1300"/>
+              </a:spcAft>
+            </a:pPr>
+            <a:r>
+              <a:rPr b="1" sz="1400">
+                <a:solidFill>
+                  <a:srgbClr val="2A282A"/>
+                </a:solidFill>
+                <a:latin typeface="Arial"/>
+              </a:rPr>
+              <a:t>•  Safe failure handling. </a:t>
+            </a:r>
+            <a:r>
+              <a:rPr sz="1400">
+                <a:solidFill>
+                  <a:srgbClr val="2A282A"/>
+                </a:solidFill>
+                <a:latin typeface="Arial"/>
+              </a:rPr>
+              <a:t>Rejects non-images and &gt;12 MB files; clear messages if the model or network fails.</a:t>
             </a:r>
           </a:p>
         </p:txBody>
@@ -6430,11 +6530,11 @@
             <a:avLst/>
           </a:prstGeom>
           <a:solidFill>
-            <a:srgbClr val="F2F4F7"/>
+            <a:srgbClr val="FDF3E4"/>
           </a:solidFill>
-          <a:ln w="12700">
+          <a:ln w="15875">
             <a:solidFill>
-              <a:srgbClr val="D4DAE2"/>
+              <a:srgbClr val="A9700C"/>
             </a:solidFill>
           </a:ln>
           <a:effectLst/>
@@ -6454,18 +6554,18 @@
           </a:fontRef>
         </p:style>
         <p:txBody>
-          <a:bodyPr rtlCol="0" anchor="ctr" wrap="square" lIns="76200" rIns="76200" tIns="50800" bIns="50800"/>
+          <a:bodyPr rtlCol="0" anchor="ctr" wrap="square" lIns="152400" rIns="152400"/>
           <a:lstStyle/>
           <a:p>
             <a:pPr algn="ctr"/>
             <a:r>
-              <a:rPr b="1" sz="1200">
-                <a:solidFill>
-                  <a:srgbClr val="171B22"/>
-                </a:solidFill>
-                <a:latin typeface="Arial"/>
-              </a:rPr>
-              <a:t>Honesty built in: when any source is mocked for the demo, the report shows a “SIMULATED DATA” banner and the RC record is labelled “not government-verified.”</a:t>
+              <a:rPr sz="1250">
+                <a:solidFill>
+                  <a:srgbClr val="2A282A"/>
+                </a:solidFill>
+                <a:latin typeface="Arial"/>
+              </a:rPr>
+              <a:t>Honesty built in: simulated registration data is labelled “SIMULATED — NOT GOVERNMENT VERIFIED”; an unknown plate is shown as “not verified” — never filled with invented data.</a:t>
             </a:r>
           </a:p>
         </p:txBody>
@@ -6573,20 +6673,20 @@
           <a:noFill/>
         </p:spPr>
         <p:txBody>
-          <a:bodyPr wrap="square" anchor="t" lIns="0" rIns="0" tIns="0" bIns="0">
+          <a:bodyPr wrap="square" lIns="0" rIns="0" tIns="0" bIns="0">
             <a:spAutoFit/>
           </a:bodyPr>
           <a:lstStyle/>
           <a:p>
             <a:pPr algn="l">
               <a:lnSpc>
-                <a:spcPct val="105000"/>
+                <a:spcPct val="108000"/>
               </a:lnSpc>
             </a:pPr>
             <a:r>
               <a:rPr sz="2700" b="1">
                 <a:solidFill>
-                  <a:srgbClr val="171B22"/>
+                  <a:srgbClr val="2A282A"/>
                 </a:solidFill>
                 <a:latin typeface="Arial"/>
               </a:rPr>
@@ -6603,18 +6703,18 @@
         </p:nvSpPr>
         <p:spPr>
           <a:xfrm>
-            <a:off x="502920" y="2651760"/>
-            <a:ext cx="2026310" cy="1554480"/>
+            <a:off x="502920" y="2606040"/>
+            <a:ext cx="1691640" cy="1645920"/>
           </a:xfrm>
           <a:prstGeom prst="roundRect">
             <a:avLst/>
           </a:prstGeom>
           <a:solidFill>
-            <a:srgbClr val="F2F4F7"/>
+            <a:srgbClr val="F6F3F2"/>
           </a:solidFill>
-          <a:ln w="12700">
+          <a:ln w="15875">
             <a:solidFill>
-              <a:srgbClr val="1A7F37"/>
+              <a:srgbClr val="2F8A4E"/>
             </a:solidFill>
           </a:ln>
           <a:effectLst/>
@@ -6634,14 +6734,14 @@
           </a:fontRef>
         </p:style>
         <p:txBody>
-          <a:bodyPr rtlCol="0" anchor="ctr" wrap="square" lIns="76200" rIns="76200" tIns="50800" bIns="50800"/>
+          <a:bodyPr rtlCol="0" anchor="ctr" wrap="square" lIns="88900" rIns="88900" tIns="50800" bIns="50800"/>
           <a:lstStyle/>
           <a:p>
             <a:pPr algn="ctr"/>
             <a:r>
               <a:rPr b="1" sz="1200">
                 <a:solidFill>
-                  <a:srgbClr val="171B22"/>
+                  <a:srgbClr val="2A282A"/>
                 </a:solidFill>
                 <a:latin typeface="Arial"/>
               </a:rPr>
@@ -6649,19 +6749,15 @@
             </a:r>
           </a:p>
           <a:p>
-            <a:pPr algn="ctr">
-              <a:lnSpc>
-                <a:spcPct val="100000"/>
-              </a:lnSpc>
-            </a:pPr>
+            <a:pPr algn="ctr"/>
             <a:r>
               <a:rPr sz="950">
                 <a:solidFill>
-                  <a:srgbClr val="171B22"/>
-                </a:solidFill>
-                <a:latin typeface="Arial"/>
-              </a:rPr>
-              <a:t>Uploads car photos + enters the registration number</a:t>
+                  <a:srgbClr val="2A282A"/>
+                </a:solidFill>
+                <a:latin typeface="Arial"/>
+              </a:rPr>
+              <a:t>Photos + registration no. + listing make/model</a:t>
             </a:r>
           </a:p>
         </p:txBody>
@@ -6674,14 +6770,14 @@
         </p:nvSpPr>
         <p:spPr>
           <a:xfrm>
-            <a:off x="2538374" y="3300984"/>
-            <a:ext cx="237744" cy="256032"/>
+            <a:off x="2203704" y="3300984"/>
+            <a:ext cx="182880" cy="256032"/>
           </a:xfrm>
           <a:prstGeom prst="rightArrow">
             <a:avLst/>
           </a:prstGeom>
           <a:solidFill>
-            <a:srgbClr val="64748B"/>
+            <a:srgbClr val="74777B"/>
           </a:solidFill>
           <a:ln>
             <a:noFill/>
@@ -6718,18 +6814,18 @@
         </p:nvSpPr>
         <p:spPr>
           <a:xfrm>
-            <a:off x="2785262" y="2651760"/>
-            <a:ext cx="2026310" cy="1554480"/>
+            <a:off x="2395728" y="2606040"/>
+            <a:ext cx="1691640" cy="1645920"/>
           </a:xfrm>
           <a:prstGeom prst="roundRect">
             <a:avLst/>
           </a:prstGeom>
           <a:solidFill>
-            <a:srgbClr val="F2F4F7"/>
+            <a:srgbClr val="F6F3F2"/>
           </a:solidFill>
-          <a:ln w="12700">
+          <a:ln w="15875">
             <a:solidFill>
-              <a:srgbClr val="3B82F6"/>
+              <a:srgbClr val="74777B"/>
             </a:solidFill>
           </a:ln>
           <a:effectLst/>
@@ -6749,34 +6845,30 @@
           </a:fontRef>
         </p:style>
         <p:txBody>
-          <a:bodyPr rtlCol="0" anchor="ctr" wrap="square" lIns="76200" rIns="76200" tIns="50800" bIns="50800"/>
+          <a:bodyPr rtlCol="0" anchor="ctr" wrap="square" lIns="88900" rIns="88900" tIns="50800" bIns="50800"/>
           <a:lstStyle/>
           <a:p>
             <a:pPr algn="ctr"/>
             <a:r>
               <a:rPr b="1" sz="1200">
                 <a:solidFill>
-                  <a:srgbClr val="171B22"/>
-                </a:solidFill>
-                <a:latin typeface="Arial"/>
-              </a:rPr>
-              <a:t>2. Gemini vision</a:t>
-            </a:r>
-          </a:p>
-          <a:p>
-            <a:pPr algn="ctr">
-              <a:lnSpc>
-                <a:spcPct val="100000"/>
-              </a:lnSpc>
-            </a:pPr>
+                  <a:srgbClr val="2A282A"/>
+                </a:solidFill>
+                <a:latin typeface="Arial"/>
+              </a:rPr>
+              <a:t>2. Validate &amp; store</a:t>
+            </a:r>
+          </a:p>
+          <a:p>
+            <a:pPr algn="ctr"/>
             <a:r>
               <a:rPr sz="950">
                 <a:solidFill>
-                  <a:srgbClr val="171B22"/>
-                </a:solidFill>
-                <a:latin typeface="Arial"/>
-              </a:rPr>
-              <a:t>Extracts visible condition (Observed)</a:t>
+                  <a:srgbClr val="2A282A"/>
+                </a:solidFill>
+                <a:latin typeface="Arial"/>
+              </a:rPr>
+              <a:t>Real-image check · private Cloud Storage</a:t>
             </a:r>
           </a:p>
         </p:txBody>
@@ -6789,14 +6881,14 @@
         </p:nvSpPr>
         <p:spPr>
           <a:xfrm>
-            <a:off x="4820716" y="3300984"/>
-            <a:ext cx="237744" cy="256032"/>
+            <a:off x="4096512" y="3300984"/>
+            <a:ext cx="182880" cy="256032"/>
           </a:xfrm>
           <a:prstGeom prst="rightArrow">
             <a:avLst/>
           </a:prstGeom>
           <a:solidFill>
-            <a:srgbClr val="64748B"/>
+            <a:srgbClr val="74777B"/>
           </a:solidFill>
           <a:ln>
             <a:noFill/>
@@ -6833,18 +6925,18 @@
         </p:nvSpPr>
         <p:spPr>
           <a:xfrm>
-            <a:off x="5067604" y="2651760"/>
-            <a:ext cx="2026310" cy="1554480"/>
+            <a:off x="4288536" y="2606040"/>
+            <a:ext cx="1691640" cy="1645920"/>
           </a:xfrm>
           <a:prstGeom prst="roundRect">
             <a:avLst/>
           </a:prstGeom>
           <a:solidFill>
-            <a:srgbClr val="F2F4F7"/>
+            <a:srgbClr val="F6F3F2"/>
           </a:solidFill>
-          <a:ln w="12700">
+          <a:ln w="15875">
             <a:solidFill>
-              <a:srgbClr val="8B5CF6"/>
+              <a:srgbClr val="734B5E"/>
             </a:solidFill>
           </a:ln>
           <a:effectLst/>
@@ -6864,34 +6956,30 @@
           </a:fontRef>
         </p:style>
         <p:txBody>
-          <a:bodyPr rtlCol="0" anchor="ctr" wrap="square" lIns="76200" rIns="76200" tIns="50800" bIns="50800"/>
+          <a:bodyPr rtlCol="0" anchor="ctr" wrap="square" lIns="88900" rIns="88900" tIns="50800" bIns="50800"/>
           <a:lstStyle/>
           <a:p>
             <a:pPr algn="ctr"/>
             <a:r>
               <a:rPr b="1" sz="1200">
                 <a:solidFill>
-                  <a:srgbClr val="171B22"/>
-                </a:solidFill>
-                <a:latin typeface="Arial"/>
-              </a:rPr>
-              <a:t>3. RC lookup</a:t>
-            </a:r>
-          </a:p>
-          <a:p>
-            <a:pPr algn="ctr">
-              <a:lnSpc>
-                <a:spcPct val="100000"/>
-              </a:lnSpc>
-            </a:pPr>
+                  <a:srgbClr val="2A282A"/>
+                </a:solidFill>
+                <a:latin typeface="Arial"/>
+              </a:rPr>
+              <a:t>3. Gemini vision</a:t>
+            </a:r>
+          </a:p>
+          <a:p>
+            <a:pPr algn="ctr"/>
             <a:r>
               <a:rPr sz="950">
                 <a:solidFill>
-                  <a:srgbClr val="171B22"/>
-                </a:solidFill>
-                <a:latin typeface="Arial"/>
-              </a:rPr>
-              <a:t>Registration facts (Record) — Simulated in demo</a:t>
+                  <a:srgbClr val="2A282A"/>
+                </a:solidFill>
+                <a:latin typeface="Arial"/>
+              </a:rPr>
+              <a:t>Structured findings per photo (Observed)</a:t>
             </a:r>
           </a:p>
         </p:txBody>
@@ -6904,14 +6992,14 @@
         </p:nvSpPr>
         <p:spPr>
           <a:xfrm>
-            <a:off x="7103059" y="3300984"/>
-            <a:ext cx="237744" cy="256032"/>
+            <a:off x="5989320" y="3300984"/>
+            <a:ext cx="182880" cy="256032"/>
           </a:xfrm>
           <a:prstGeom prst="rightArrow">
             <a:avLst/>
           </a:prstGeom>
           <a:solidFill>
-            <a:srgbClr val="64748B"/>
+            <a:srgbClr val="74777B"/>
           </a:solidFill>
           <a:ln>
             <a:noFill/>
@@ -6948,18 +7036,18 @@
         </p:nvSpPr>
         <p:spPr>
           <a:xfrm>
-            <a:off x="7349947" y="2651760"/>
-            <a:ext cx="2026310" cy="1554480"/>
+            <a:off x="6181344" y="2606040"/>
+            <a:ext cx="1691640" cy="1645920"/>
           </a:xfrm>
           <a:prstGeom prst="roundRect">
             <a:avLst/>
           </a:prstGeom>
           <a:solidFill>
-            <a:srgbClr val="F2F4F7"/>
+            <a:srgbClr val="F6F3F2"/>
           </a:solidFill>
-          <a:ln w="12700">
+          <a:ln w="15875">
             <a:solidFill>
-              <a:srgbClr val="0891B2"/>
+              <a:srgbClr val="3F6EA3"/>
             </a:solidFill>
           </a:ln>
           <a:effectLst/>
@@ -6979,34 +7067,30 @@
           </a:fontRef>
         </p:style>
         <p:txBody>
-          <a:bodyPr rtlCol="0" anchor="ctr" wrap="square" lIns="76200" rIns="76200" tIns="50800" bIns="50800"/>
+          <a:bodyPr rtlCol="0" anchor="ctr" wrap="square" lIns="88900" rIns="88900" tIns="50800" bIns="50800"/>
           <a:lstStyle/>
           <a:p>
             <a:pPr algn="ctr"/>
             <a:r>
               <a:rPr b="1" sz="1200">
                 <a:solidFill>
-                  <a:srgbClr val="171B22"/>
-                </a:solidFill>
-                <a:latin typeface="Arial"/>
-              </a:rPr>
-              <a:t>4. Rules engine</a:t>
-            </a:r>
-          </a:p>
-          <a:p>
-            <a:pPr algn="ctr">
-              <a:lnSpc>
-                <a:spcPct val="100000"/>
-              </a:lnSpc>
-            </a:pPr>
+                  <a:srgbClr val="2A282A"/>
+                </a:solidFill>
+                <a:latin typeface="Arial"/>
+              </a:rPr>
+              <a:t>4. Registration lookup</a:t>
+            </a:r>
+          </a:p>
+          <a:p>
+            <a:pPr algn="ctr"/>
             <a:r>
               <a:rPr sz="950">
                 <a:solidFill>
-                  <a:srgbClr val="171B22"/>
-                </a:solidFill>
-                <a:latin typeface="Arial"/>
-              </a:rPr>
-              <a:t>Cross-check + findings + risk score (deterministic)</a:t>
+                  <a:srgbClr val="2A282A"/>
+                </a:solidFill>
+                <a:latin typeface="Arial"/>
+              </a:rPr>
+              <a:t>Record facts — simulated in this prototype</a:t>
             </a:r>
           </a:p>
         </p:txBody>
@@ -7019,14 +7103,14 @@
         </p:nvSpPr>
         <p:spPr>
           <a:xfrm>
-            <a:off x="9385401" y="3300984"/>
-            <a:ext cx="237744" cy="256032"/>
+            <a:off x="7882128" y="3300984"/>
+            <a:ext cx="182880" cy="256032"/>
           </a:xfrm>
           <a:prstGeom prst="rightArrow">
             <a:avLst/>
           </a:prstGeom>
           <a:solidFill>
-            <a:srgbClr val="64748B"/>
+            <a:srgbClr val="74777B"/>
           </a:solidFill>
           <a:ln>
             <a:noFill/>
@@ -7063,18 +7147,18 @@
         </p:nvSpPr>
         <p:spPr>
           <a:xfrm>
-            <a:off x="9632289" y="2651760"/>
-            <a:ext cx="2026310" cy="1554480"/>
+            <a:off x="8074152" y="2606040"/>
+            <a:ext cx="1691640" cy="1645920"/>
           </a:xfrm>
           <a:prstGeom prst="roundRect">
             <a:avLst/>
           </a:prstGeom>
           <a:solidFill>
-            <a:srgbClr val="F2F4F7"/>
+            <a:srgbClr val="F6F3F2"/>
           </a:solidFill>
-          <a:ln w="12700">
+          <a:ln w="15875">
             <a:solidFill>
-              <a:srgbClr val="171B22"/>
+              <a:srgbClr val="4A4C4B"/>
             </a:solidFill>
           </a:ln>
           <a:effectLst/>
@@ -7094,73 +7178,180 @@
           </a:fontRef>
         </p:style>
         <p:txBody>
-          <a:bodyPr rtlCol="0" anchor="ctr" wrap="square" lIns="76200" rIns="76200" tIns="50800" bIns="50800"/>
+          <a:bodyPr rtlCol="0" anchor="ctr" wrap="square" lIns="88900" rIns="88900" tIns="50800" bIns="50800"/>
           <a:lstStyle/>
           <a:p>
             <a:pPr algn="ctr"/>
             <a:r>
               <a:rPr b="1" sz="1200">
                 <a:solidFill>
-                  <a:srgbClr val="171B22"/>
-                </a:solidFill>
-                <a:latin typeface="Arial"/>
-              </a:rPr>
-              <a:t>5. Report</a:t>
-            </a:r>
-          </a:p>
-          <a:p>
-            <a:pPr algn="ctr">
+                  <a:srgbClr val="2A282A"/>
+                </a:solidFill>
+                <a:latin typeface="Arial"/>
+              </a:rPr>
+              <a:t>5. Rules engine</a:t>
+            </a:r>
+          </a:p>
+          <a:p>
+            <a:pPr algn="ctr"/>
+            <a:r>
+              <a:rPr sz="950">
+                <a:solidFill>
+                  <a:srgbClr val="2A282A"/>
+                </a:solidFill>
+                <a:latin typeface="Arial"/>
+              </a:rPr>
+              <a:t>Cross-checks · coverage · score (deterministic)</a:t>
+            </a:r>
+          </a:p>
+        </p:txBody>
+      </p:sp>
+      <p:sp>
+        <p:nvSpPr>
+          <p:cNvPr id="14" name="Right Arrow 13"/>
+          <p:cNvSpPr/>
+          <p:nvPr/>
+        </p:nvSpPr>
+        <p:spPr>
+          <a:xfrm>
+            <a:off x="9774936" y="3300984"/>
+            <a:ext cx="182880" cy="256032"/>
+          </a:xfrm>
+          <a:prstGeom prst="rightArrow">
+            <a:avLst/>
+          </a:prstGeom>
+          <a:solidFill>
+            <a:srgbClr val="74777B"/>
+          </a:solidFill>
+          <a:ln>
+            <a:noFill/>
+          </a:ln>
+          <a:effectLst/>
+        </p:spPr>
+        <p:style>
+          <a:lnRef idx="1">
+            <a:schemeClr val="accent1"/>
+          </a:lnRef>
+          <a:fillRef idx="3">
+            <a:schemeClr val="accent1"/>
+          </a:fillRef>
+          <a:effectRef idx="2">
+            <a:schemeClr val="accent1"/>
+          </a:effectRef>
+          <a:fontRef idx="minor">
+            <a:schemeClr val="lt1"/>
+          </a:fontRef>
+        </p:style>
+        <p:txBody>
+          <a:bodyPr rtlCol="0" anchor="ctr"/>
+          <a:lstStyle/>
+          <a:p>
+            <a:pPr algn="ctr"/>
+          </a:p>
+        </p:txBody>
+      </p:sp>
+      <p:sp>
+        <p:nvSpPr>
+          <p:cNvPr id="15" name="Rounded Rectangle 14"/>
+          <p:cNvSpPr/>
+          <p:nvPr/>
+        </p:nvSpPr>
+        <p:spPr>
+          <a:xfrm>
+            <a:off x="9966960" y="2606040"/>
+            <a:ext cx="1691640" cy="1645920"/>
+          </a:xfrm>
+          <a:prstGeom prst="roundRect">
+            <a:avLst/>
+          </a:prstGeom>
+          <a:solidFill>
+            <a:srgbClr val="F6F3F2"/>
+          </a:solidFill>
+          <a:ln w="15875">
+            <a:solidFill>
+              <a:srgbClr val="2A282A"/>
+            </a:solidFill>
+          </a:ln>
+          <a:effectLst/>
+        </p:spPr>
+        <p:style>
+          <a:lnRef idx="1">
+            <a:schemeClr val="accent1"/>
+          </a:lnRef>
+          <a:fillRef idx="3">
+            <a:schemeClr val="accent1"/>
+          </a:fillRef>
+          <a:effectRef idx="2">
+            <a:schemeClr val="accent1"/>
+          </a:effectRef>
+          <a:fontRef idx="minor">
+            <a:schemeClr val="lt1"/>
+          </a:fontRef>
+        </p:style>
+        <p:txBody>
+          <a:bodyPr rtlCol="0" anchor="ctr" wrap="square" lIns="88900" rIns="88900" tIns="50800" bIns="50800"/>
+          <a:lstStyle/>
+          <a:p>
+            <a:pPr algn="ctr"/>
+            <a:r>
+              <a:rPr b="1" sz="1200">
+                <a:solidFill>
+                  <a:srgbClr val="2A282A"/>
+                </a:solidFill>
+                <a:latin typeface="Arial"/>
+              </a:rPr>
+              <a:t>6. Report</a:t>
+            </a:r>
+          </a:p>
+          <a:p>
+            <a:pPr algn="ctr"/>
+            <a:r>
+              <a:rPr sz="950">
+                <a:solidFill>
+                  <a:srgbClr val="2A282A"/>
+                </a:solidFill>
+                <a:latin typeface="Arial"/>
+              </a:rPr>
+              <a:t>4 labels + checklist → Firestore + audit trail</a:t>
+            </a:r>
+          </a:p>
+        </p:txBody>
+      </p:sp>
+      <p:sp>
+        <p:nvSpPr>
+          <p:cNvPr id="16" name="TextBox 15"/>
+          <p:cNvSpPr txBox="1"/>
+          <p:nvPr/>
+        </p:nvSpPr>
+        <p:spPr>
+          <a:xfrm>
+            <a:off x="502920" y="4754880"/>
+            <a:ext cx="11155680" cy="548640"/>
+          </a:xfrm>
+          <a:prstGeom prst="rect">
+            <a:avLst/>
+          </a:prstGeom>
+          <a:noFill/>
+        </p:spPr>
+        <p:txBody>
+          <a:bodyPr wrap="square" lIns="0" rIns="0" tIns="0" bIns="0">
+            <a:spAutoFit/>
+          </a:bodyPr>
+          <a:lstStyle/>
+          <a:p>
+            <a:pPr algn="l">
               <a:lnSpc>
-                <a:spcPct val="100000"/>
+                <a:spcPct val="108000"/>
               </a:lnSpc>
             </a:pPr>
             <a:r>
-              <a:rPr sz="950">
-                <a:solidFill>
-                  <a:srgbClr val="171B22"/>
-                </a:solidFill>
-                <a:latin typeface="Arial"/>
-              </a:rPr>
-              <a:t>Risk + tagged findings + inspect list → saved to Firestore + audit</a:t>
-            </a:r>
-          </a:p>
-        </p:txBody>
-      </p:sp>
-      <p:sp>
-        <p:nvSpPr>
-          <p:cNvPr id="14" name="TextBox 13"/>
-          <p:cNvSpPr txBox="1"/>
-          <p:nvPr/>
-        </p:nvSpPr>
-        <p:spPr>
-          <a:xfrm>
-            <a:off x="502920" y="4846320"/>
-            <a:ext cx="11155680" cy="457200"/>
-          </a:xfrm>
-          <a:prstGeom prst="rect">
-            <a:avLst/>
-          </a:prstGeom>
-          <a:noFill/>
-        </p:spPr>
-        <p:txBody>
-          <a:bodyPr wrap="square" anchor="t" lIns="0" rIns="0" tIns="0" bIns="0">
-            <a:spAutoFit/>
-          </a:bodyPr>
-          <a:lstStyle/>
-          <a:p>
-            <a:pPr algn="l">
-              <a:lnSpc>
-                <a:spcPct val="105000"/>
-              </a:lnSpc>
-            </a:pPr>
-            <a:r>
               <a:rPr sz="1400" b="0">
                 <a:solidFill>
-                  <a:srgbClr val="55606E"/>
-                </a:solidFill>
-                <a:latin typeface="Arial"/>
-              </a:rPr>
-              <a:t>One buyer action in, one transparent report out — each stage's output is traceable to its source.</a:t>
+                  <a:srgbClr val="5F6266"/>
+                </a:solidFill>
+                <a:latin typeface="Arial"/>
+              </a:rPr>
+              <a:t>One buyer action in, one traceable report out. If Gemini fails, nothing is saved and the buyer sees a clear retry message.</a:t>
             </a:r>
           </a:p>
         </p:txBody>
@@ -7268,20 +7459,20 @@
           <a:noFill/>
         </p:spPr>
         <p:txBody>
-          <a:bodyPr wrap="square" anchor="t" lIns="0" rIns="0" tIns="0" bIns="0">
+          <a:bodyPr wrap="square" lIns="0" rIns="0" tIns="0" bIns="0">
             <a:spAutoFit/>
           </a:bodyPr>
           <a:lstStyle/>
           <a:p>
             <a:pPr algn="l">
               <a:lnSpc>
-                <a:spcPct val="105000"/>
+                <a:spcPct val="108000"/>
               </a:lnSpc>
             </a:pPr>
             <a:r>
               <a:rPr sz="2700" b="1">
                 <a:solidFill>
-                  <a:srgbClr val="171B22"/>
+                  <a:srgbClr val="2A282A"/>
                 </a:solidFill>
                 <a:latin typeface="Arial"/>
               </a:rPr>
@@ -7290,52 +7481,35 @@
           </a:p>
         </p:txBody>
       </p:sp>
-      <p:sp>
-        <p:nvSpPr>
-          <p:cNvPr id="5" name="Rounded Rectangle 4"/>
-          <p:cNvSpPr/>
-          <p:nvPr/>
-        </p:nvSpPr>
-        <p:spPr>
-          <a:xfrm>
-            <a:off x="1097280" y="1828800"/>
-            <a:ext cx="4206240" cy="3840480"/>
-          </a:xfrm>
-          <a:prstGeom prst="roundRect">
-            <a:avLst/>
-          </a:prstGeom>
-          <a:solidFill>
-            <a:srgbClr val="FFFFFF"/>
-          </a:solidFill>
-          <a:ln w="19050">
+      <p:pic>
+        <p:nvPicPr>
+          <p:cNvPr id="5" name="Picture 4" descr="02-upload-filled.png"/>
+          <p:cNvPicPr>
+            <a:picLocks noChangeAspect="1"/>
+          </p:cNvPicPr>
+          <p:nvPr/>
+        </p:nvPicPr>
+        <p:blipFill>
+          <a:blip r:embed="rId3"/>
+          <a:stretch>
+            <a:fillRect/>
+          </a:stretch>
+        </p:blipFill>
+        <p:spPr>
+          <a:xfrm>
+            <a:off x="502920" y="1691640"/>
+            <a:ext cx="5440680" cy="3400425"/>
+          </a:xfrm>
+          <a:prstGeom prst="rect">
+            <a:avLst/>
+          </a:prstGeom>
+          <a:ln w="12700">
             <a:solidFill>
-              <a:srgbClr val="D4DAE2"/>
+              <a:srgbClr val="D6D2D0"/>
             </a:solidFill>
           </a:ln>
-          <a:effectLst/>
-        </p:spPr>
-        <p:style>
-          <a:lnRef idx="1">
-            <a:schemeClr val="accent1"/>
-          </a:lnRef>
-          <a:fillRef idx="3">
-            <a:schemeClr val="accent1"/>
-          </a:fillRef>
-          <a:effectRef idx="2">
-            <a:schemeClr val="accent1"/>
-          </a:effectRef>
-          <a:fontRef idx="minor">
-            <a:schemeClr val="lt1"/>
-          </a:fontRef>
-        </p:style>
-        <p:txBody>
-          <a:bodyPr rtlCol="0" anchor="ctr"/>
-          <a:lstStyle/>
-          <a:p>
-            <a:pPr algn="ctr"/>
-          </a:p>
-        </p:txBody>
-      </p:sp>
+        </p:spPr>
+      </p:pic>
       <p:sp>
         <p:nvSpPr>
           <p:cNvPr id="6" name="TextBox 5"/>
@@ -7344,8 +7518,8 @@
         </p:nvSpPr>
         <p:spPr>
           <a:xfrm>
-            <a:off x="1371600" y="2057400"/>
-            <a:ext cx="3657600" cy="365760"/>
+            <a:off x="502920" y="5165217"/>
+            <a:ext cx="5440680" cy="365760"/>
           </a:xfrm>
           <a:prstGeom prst="rect">
             <a:avLst/>
@@ -7353,834 +7527,131 @@
           <a:noFill/>
         </p:spPr>
         <p:txBody>
-          <a:bodyPr wrap="square" anchor="t" lIns="0" rIns="0" tIns="0" bIns="0">
+          <a:bodyPr wrap="square" lIns="0" rIns="0" tIns="0" bIns="0">
             <a:spAutoFit/>
           </a:bodyPr>
           <a:lstStyle/>
           <a:p>
+            <a:pPr algn="ctr">
+              <a:lnSpc>
+                <a:spcPct val="108000"/>
+              </a:lnSpc>
+            </a:pPr>
+            <a:r>
+              <a:rPr sz="1200" b="1">
+                <a:solidFill>
+                  <a:srgbClr val="2A282A"/>
+                </a:solidFill>
+                <a:latin typeface="Arial"/>
+              </a:rPr>
+              <a:t>Upload: plate, listing, numbered photos</a:t>
+            </a:r>
+          </a:p>
+        </p:txBody>
+      </p:sp>
+      <p:pic>
+        <p:nvPicPr>
+          <p:cNvPr id="7" name="Picture 6" descr="05-findings.png"/>
+          <p:cNvPicPr>
+            <a:picLocks noChangeAspect="1"/>
+          </p:cNvPicPr>
+          <p:nvPr/>
+        </p:nvPicPr>
+        <p:blipFill>
+          <a:blip r:embed="rId4"/>
+          <a:stretch>
+            <a:fillRect/>
+          </a:stretch>
+        </p:blipFill>
+        <p:spPr>
+          <a:xfrm>
+            <a:off x="6217920" y="1691640"/>
+            <a:ext cx="5440680" cy="3400425"/>
+          </a:xfrm>
+          <a:prstGeom prst="rect">
+            <a:avLst/>
+          </a:prstGeom>
+          <a:ln w="12700">
+            <a:solidFill>
+              <a:srgbClr val="D6D2D0"/>
+            </a:solidFill>
+          </a:ln>
+        </p:spPr>
+      </p:pic>
+      <p:sp>
+        <p:nvSpPr>
+          <p:cNvPr id="8" name="TextBox 7"/>
+          <p:cNvSpPr txBox="1"/>
+          <p:nvPr/>
+        </p:nvSpPr>
+        <p:spPr>
+          <a:xfrm>
+            <a:off x="6217920" y="5165217"/>
+            <a:ext cx="5440680" cy="365760"/>
+          </a:xfrm>
+          <a:prstGeom prst="rect">
+            <a:avLst/>
+          </a:prstGeom>
+          <a:noFill/>
+        </p:spPr>
+        <p:txBody>
+          <a:bodyPr wrap="square" lIns="0" rIns="0" tIns="0" bIns="0">
+            <a:spAutoFit/>
+          </a:bodyPr>
+          <a:lstStyle/>
+          <a:p>
+            <a:pPr algn="ctr">
+              <a:lnSpc>
+                <a:spcPct val="108000"/>
+              </a:lnSpc>
+            </a:pPr>
+            <a:r>
+              <a:rPr sz="1200" b="1">
+                <a:solidFill>
+                  <a:srgbClr val="2A282A"/>
+                </a:solidFill>
+                <a:latin typeface="Arial"/>
+              </a:rPr>
+              <a:t>Report: findings labelled by source, with photo evidence</a:t>
+            </a:r>
+          </a:p>
+        </p:txBody>
+      </p:sp>
+      <p:sp>
+        <p:nvSpPr>
+          <p:cNvPr id="9" name="TextBox 8"/>
+          <p:cNvSpPr txBox="1"/>
+          <p:nvPr/>
+        </p:nvSpPr>
+        <p:spPr>
+          <a:xfrm>
+            <a:off x="502920" y="5989320"/>
+            <a:ext cx="11155680" cy="365760"/>
+          </a:xfrm>
+          <a:prstGeom prst="rect">
+            <a:avLst/>
+          </a:prstGeom>
+          <a:noFill/>
+        </p:spPr>
+        <p:txBody>
+          <a:bodyPr wrap="square" lIns="0" rIns="0" tIns="0" bIns="0">
+            <a:spAutoFit/>
+          </a:bodyPr>
+          <a:lstStyle/>
+          <a:p>
             <a:pPr algn="l">
               <a:lnSpc>
-                <a:spcPct val="105000"/>
+                <a:spcPct val="108000"/>
               </a:lnSpc>
             </a:pPr>
             <a:r>
-              <a:rPr sz="1500" b="1">
-                <a:solidFill>
-                  <a:srgbClr val="171B22"/>
-                </a:solidFill>
-                <a:latin typeface="Arial"/>
-              </a:rPr>
-              <a:t>Verify a car</a:t>
-            </a:r>
-          </a:p>
-        </p:txBody>
-      </p:sp>
-      <p:sp>
-        <p:nvSpPr>
-          <p:cNvPr id="7" name="Rectangle 6"/>
-          <p:cNvSpPr/>
-          <p:nvPr/>
-        </p:nvSpPr>
-        <p:spPr>
-          <a:xfrm>
-            <a:off x="1371600" y="2697480"/>
-            <a:ext cx="3657600" cy="457200"/>
-          </a:xfrm>
-          <a:prstGeom prst="rect">
-            <a:avLst/>
-          </a:prstGeom>
-          <a:solidFill>
-            <a:srgbClr val="F2F4F7"/>
-          </a:solidFill>
-          <a:ln w="12700">
-            <a:solidFill>
-              <a:srgbClr val="D4DAE2"/>
-            </a:solidFill>
-          </a:ln>
-          <a:effectLst/>
-        </p:spPr>
-        <p:style>
-          <a:lnRef idx="1">
-            <a:schemeClr val="accent1"/>
-          </a:lnRef>
-          <a:fillRef idx="3">
-            <a:schemeClr val="accent1"/>
-          </a:fillRef>
-          <a:effectRef idx="2">
-            <a:schemeClr val="accent1"/>
-          </a:effectRef>
-          <a:fontRef idx="minor">
-            <a:schemeClr val="lt1"/>
-          </a:fontRef>
-        </p:style>
-        <p:txBody>
-          <a:bodyPr rtlCol="0" anchor="ctr"/>
-          <a:lstStyle/>
-          <a:p>
-            <a:pPr algn="ctr"/>
-          </a:p>
-        </p:txBody>
-      </p:sp>
-      <p:sp>
-        <p:nvSpPr>
-          <p:cNvPr id="8" name="TextBox 7"/>
-          <p:cNvSpPr txBox="1"/>
-          <p:nvPr/>
-        </p:nvSpPr>
-        <p:spPr>
-          <a:xfrm>
-            <a:off x="1508760" y="2798064"/>
-            <a:ext cx="3474720" cy="274320"/>
-          </a:xfrm>
-          <a:prstGeom prst="rect">
-            <a:avLst/>
-          </a:prstGeom>
-          <a:noFill/>
-        </p:spPr>
-        <p:txBody>
-          <a:bodyPr wrap="square" anchor="t" lIns="0" rIns="0" tIns="0" bIns="0">
-            <a:spAutoFit/>
-          </a:bodyPr>
-          <a:lstStyle/>
-          <a:p>
-            <a:pPr algn="l">
-              <a:lnSpc>
-                <a:spcPct val="105000"/>
-              </a:lnSpc>
-            </a:pPr>
-            <a:r>
-              <a:rPr sz="1100" b="0">
-                <a:solidFill>
-                  <a:srgbClr val="55606E"/>
-                </a:solidFill>
-                <a:latin typeface="Arial"/>
-              </a:rPr>
-              <a:t>Registration number</a:t>
-            </a:r>
-          </a:p>
-        </p:txBody>
-      </p:sp>
-      <p:sp>
-        <p:nvSpPr>
-          <p:cNvPr id="9" name="Rounded Rectangle 8"/>
-          <p:cNvSpPr/>
-          <p:nvPr/>
-        </p:nvSpPr>
-        <p:spPr>
-          <a:xfrm>
-            <a:off x="1371600" y="3383280"/>
-            <a:ext cx="3657600" cy="1280160"/>
-          </a:xfrm>
-          <a:prstGeom prst="roundRect">
-            <a:avLst/>
-          </a:prstGeom>
-          <a:solidFill>
-            <a:srgbClr val="F2F4F7"/>
-          </a:solidFill>
-          <a:ln w="12700">
-            <a:solidFill>
-              <a:srgbClr val="D4DAE2"/>
-            </a:solidFill>
-          </a:ln>
-          <a:effectLst/>
-        </p:spPr>
-        <p:style>
-          <a:lnRef idx="1">
-            <a:schemeClr val="accent1"/>
-          </a:lnRef>
-          <a:fillRef idx="3">
-            <a:schemeClr val="accent1"/>
-          </a:fillRef>
-          <a:effectRef idx="2">
-            <a:schemeClr val="accent1"/>
-          </a:effectRef>
-          <a:fontRef idx="minor">
-            <a:schemeClr val="lt1"/>
-          </a:fontRef>
-        </p:style>
-        <p:txBody>
-          <a:bodyPr rtlCol="0" anchor="ctr"/>
-          <a:lstStyle/>
-          <a:p>
-            <a:pPr algn="ctr"/>
-          </a:p>
-        </p:txBody>
-      </p:sp>
-      <p:sp>
-        <p:nvSpPr>
-          <p:cNvPr id="10" name="TextBox 9"/>
-          <p:cNvSpPr txBox="1"/>
-          <p:nvPr/>
-        </p:nvSpPr>
-        <p:spPr>
-          <a:xfrm>
-            <a:off x="1371600" y="3749040"/>
-            <a:ext cx="3657600" cy="731520"/>
-          </a:xfrm>
-          <a:prstGeom prst="rect">
-            <a:avLst/>
-          </a:prstGeom>
-          <a:noFill/>
-        </p:spPr>
-        <p:txBody>
-          <a:bodyPr wrap="square" anchor="t" lIns="0" rIns="0" tIns="0" bIns="0">
-            <a:spAutoFit/>
-          </a:bodyPr>
-          <a:lstStyle/>
-          <a:p>
-            <a:pPr algn="ctr">
-              <a:lnSpc>
-                <a:spcPct val="105000"/>
-              </a:lnSpc>
-            </a:pPr>
-            <a:r>
-              <a:rPr sz="1100" b="0">
-                <a:solidFill>
-                  <a:srgbClr val="55606E"/>
-                </a:solidFill>
-                <a:latin typeface="Arial"/>
-              </a:rPr>
-              <a:t>↑  Upload car photos</a:t>
-            </a:r>
-          </a:p>
-          <a:p>
-            <a:pPr algn="ctr">
-              <a:lnSpc>
-                <a:spcPct val="105000"/>
-              </a:lnSpc>
-            </a:pPr>
-            <a:r>
-              <a:rPr sz="1100" b="0">
-                <a:solidFill>
-                  <a:srgbClr val="55606E"/>
-                </a:solidFill>
-                <a:latin typeface="Arial"/>
-              </a:rPr>
-              <a:t>(exterior, tyres, interior, odometer)</a:t>
-            </a:r>
-          </a:p>
-        </p:txBody>
-      </p:sp>
-      <p:sp>
-        <p:nvSpPr>
-          <p:cNvPr id="11" name="Rounded Rectangle 10"/>
-          <p:cNvSpPr/>
-          <p:nvPr/>
-        </p:nvSpPr>
-        <p:spPr>
-          <a:xfrm>
-            <a:off x="1371600" y="4892040"/>
-            <a:ext cx="3657600" cy="502920"/>
-          </a:xfrm>
-          <a:prstGeom prst="roundRect">
-            <a:avLst/>
-          </a:prstGeom>
-          <a:solidFill>
-            <a:srgbClr val="3B82F6"/>
-          </a:solidFill>
-          <a:ln>
-            <a:noFill/>
-          </a:ln>
-          <a:effectLst/>
-        </p:spPr>
-        <p:style>
-          <a:lnRef idx="1">
-            <a:schemeClr val="accent1"/>
-          </a:lnRef>
-          <a:fillRef idx="3">
-            <a:schemeClr val="accent1"/>
-          </a:fillRef>
-          <a:effectRef idx="2">
-            <a:schemeClr val="accent1"/>
-          </a:effectRef>
-          <a:fontRef idx="minor">
-            <a:schemeClr val="lt1"/>
-          </a:fontRef>
-        </p:style>
-        <p:txBody>
-          <a:bodyPr rtlCol="0" anchor="ctr"/>
-          <a:lstStyle/>
-          <a:p>
-            <a:pPr algn="ctr"/>
-          </a:p>
-        </p:txBody>
-      </p:sp>
-      <p:sp>
-        <p:nvSpPr>
-          <p:cNvPr id="12" name="TextBox 11"/>
-          <p:cNvSpPr txBox="1"/>
-          <p:nvPr/>
-        </p:nvSpPr>
-        <p:spPr>
-          <a:xfrm>
-            <a:off x="1371600" y="5001768"/>
-            <a:ext cx="3657600" cy="320040"/>
-          </a:xfrm>
-          <a:prstGeom prst="rect">
-            <a:avLst/>
-          </a:prstGeom>
-          <a:noFill/>
-        </p:spPr>
-        <p:txBody>
-          <a:bodyPr wrap="square" anchor="t" lIns="0" rIns="0" tIns="0" bIns="0">
-            <a:spAutoFit/>
-          </a:bodyPr>
-          <a:lstStyle/>
-          <a:p>
-            <a:pPr algn="ctr">
-              <a:lnSpc>
-                <a:spcPct val="105000"/>
-              </a:lnSpc>
-            </a:pPr>
-            <a:r>
-              <a:rPr sz="1300" b="1">
-                <a:solidFill>
-                  <a:srgbClr val="FFFFFF"/>
-                </a:solidFill>
-                <a:latin typeface="Arial"/>
-              </a:rPr>
-              <a:t>Verify car</a:t>
-            </a:r>
-          </a:p>
-        </p:txBody>
-      </p:sp>
-      <p:sp>
-        <p:nvSpPr>
-          <p:cNvPr id="13" name="Rounded Rectangle 12"/>
-          <p:cNvSpPr/>
-          <p:nvPr/>
-        </p:nvSpPr>
-        <p:spPr>
-          <a:xfrm>
-            <a:off x="6858000" y="1828800"/>
-            <a:ext cx="4206240" cy="3840480"/>
-          </a:xfrm>
-          <a:prstGeom prst="roundRect">
-            <a:avLst/>
-          </a:prstGeom>
-          <a:solidFill>
-            <a:srgbClr val="FFFFFF"/>
-          </a:solidFill>
-          <a:ln w="19050">
-            <a:solidFill>
-              <a:srgbClr val="D4DAE2"/>
-            </a:solidFill>
-          </a:ln>
-          <a:effectLst/>
-        </p:spPr>
-        <p:style>
-          <a:lnRef idx="1">
-            <a:schemeClr val="accent1"/>
-          </a:lnRef>
-          <a:fillRef idx="3">
-            <a:schemeClr val="accent1"/>
-          </a:fillRef>
-          <a:effectRef idx="2">
-            <a:schemeClr val="accent1"/>
-          </a:effectRef>
-          <a:fontRef idx="minor">
-            <a:schemeClr val="lt1"/>
-          </a:fontRef>
-        </p:style>
-        <p:txBody>
-          <a:bodyPr rtlCol="0" anchor="ctr"/>
-          <a:lstStyle/>
-          <a:p>
-            <a:pPr algn="ctr"/>
-          </a:p>
-        </p:txBody>
-      </p:sp>
-      <p:sp>
-        <p:nvSpPr>
-          <p:cNvPr id="14" name="TextBox 13"/>
-          <p:cNvSpPr txBox="1"/>
-          <p:nvPr/>
-        </p:nvSpPr>
-        <p:spPr>
-          <a:xfrm>
-            <a:off x="7132320" y="2057400"/>
-            <a:ext cx="3657600" cy="365760"/>
-          </a:xfrm>
-          <a:prstGeom prst="rect">
-            <a:avLst/>
-          </a:prstGeom>
-          <a:noFill/>
-        </p:spPr>
-        <p:txBody>
-          <a:bodyPr wrap="square" anchor="t" lIns="0" rIns="0" tIns="0" bIns="0">
-            <a:spAutoFit/>
-          </a:bodyPr>
-          <a:lstStyle/>
-          <a:p>
-            <a:pPr algn="l">
-              <a:lnSpc>
-                <a:spcPct val="105000"/>
-              </a:lnSpc>
-            </a:pPr>
-            <a:r>
-              <a:rPr sz="1500" b="1">
-                <a:solidFill>
-                  <a:srgbClr val="171B22"/>
-                </a:solidFill>
-                <a:latin typeface="Arial"/>
-              </a:rPr>
-              <a:t>Report</a:t>
-            </a:r>
-          </a:p>
-        </p:txBody>
-      </p:sp>
-      <p:sp>
-        <p:nvSpPr>
-          <p:cNvPr id="15" name="Rounded Rectangle 14"/>
-          <p:cNvSpPr/>
-          <p:nvPr/>
-        </p:nvSpPr>
-        <p:spPr>
-          <a:xfrm>
-            <a:off x="7132320" y="2560320"/>
-            <a:ext cx="3657600" cy="731520"/>
-          </a:xfrm>
-          <a:prstGeom prst="roundRect">
-            <a:avLst/>
-          </a:prstGeom>
-          <a:solidFill>
-            <a:srgbClr val="FDECEA"/>
-          </a:solidFill>
-          <a:ln w="12700">
-            <a:solidFill>
-              <a:srgbClr val="B42318"/>
-            </a:solidFill>
-          </a:ln>
-          <a:effectLst/>
-        </p:spPr>
-        <p:style>
-          <a:lnRef idx="1">
-            <a:schemeClr val="accent1"/>
-          </a:lnRef>
-          <a:fillRef idx="3">
-            <a:schemeClr val="accent1"/>
-          </a:fillRef>
-          <a:effectRef idx="2">
-            <a:schemeClr val="accent1"/>
-          </a:effectRef>
-          <a:fontRef idx="minor">
-            <a:schemeClr val="lt1"/>
-          </a:fontRef>
-        </p:style>
-        <p:txBody>
-          <a:bodyPr rtlCol="0" anchor="ctr"/>
-          <a:lstStyle/>
-          <a:p>
-            <a:pPr algn="ctr"/>
-          </a:p>
-        </p:txBody>
-      </p:sp>
-      <p:sp>
-        <p:nvSpPr>
-          <p:cNvPr id="16" name="TextBox 15"/>
-          <p:cNvSpPr txBox="1"/>
-          <p:nvPr/>
-        </p:nvSpPr>
-        <p:spPr>
-          <a:xfrm>
-            <a:off x="7315200" y="2743200"/>
-            <a:ext cx="3291840" cy="365760"/>
-          </a:xfrm>
-          <a:prstGeom prst="rect">
-            <a:avLst/>
-          </a:prstGeom>
-          <a:noFill/>
-        </p:spPr>
-        <p:txBody>
-          <a:bodyPr wrap="square" anchor="t" lIns="0" rIns="0" tIns="0" bIns="0">
-            <a:spAutoFit/>
-          </a:bodyPr>
-          <a:lstStyle/>
-          <a:p>
-            <a:pPr algn="l">
-              <a:lnSpc>
-                <a:spcPct val="105000"/>
-              </a:lnSpc>
-            </a:pPr>
-            <a:r>
-              <a:rPr sz="1600" b="1">
-                <a:solidFill>
-                  <a:srgbClr val="B42318"/>
-                </a:solidFill>
-                <a:latin typeface="Arial"/>
-              </a:rPr>
-              <a:t>74  ·  HIGH RISK</a:t>
-            </a:r>
-          </a:p>
-        </p:txBody>
-      </p:sp>
-      <p:sp>
-        <p:nvSpPr>
-          <p:cNvPr id="17" name="Rectangle 16"/>
-          <p:cNvSpPr/>
-          <p:nvPr/>
-        </p:nvSpPr>
-        <p:spPr>
-          <a:xfrm>
-            <a:off x="7132320" y="3474720"/>
-            <a:ext cx="109728" cy="365760"/>
-          </a:xfrm>
-          <a:prstGeom prst="rect">
-            <a:avLst/>
-          </a:prstGeom>
-          <a:solidFill>
-            <a:srgbClr val="3B82F6"/>
-          </a:solidFill>
-          <a:ln>
-            <a:noFill/>
-          </a:ln>
-          <a:effectLst/>
-        </p:spPr>
-        <p:style>
-          <a:lnRef idx="1">
-            <a:schemeClr val="accent1"/>
-          </a:lnRef>
-          <a:fillRef idx="3">
-            <a:schemeClr val="accent1"/>
-          </a:fillRef>
-          <a:effectRef idx="2">
-            <a:schemeClr val="accent1"/>
-          </a:effectRef>
-          <a:fontRef idx="minor">
-            <a:schemeClr val="lt1"/>
-          </a:fontRef>
-        </p:style>
-        <p:txBody>
-          <a:bodyPr rtlCol="0" anchor="ctr"/>
-          <a:lstStyle/>
-          <a:p>
-            <a:pPr algn="ctr"/>
-          </a:p>
-        </p:txBody>
-      </p:sp>
-      <p:sp>
-        <p:nvSpPr>
-          <p:cNvPr id="18" name="TextBox 17"/>
-          <p:cNvSpPr txBox="1"/>
-          <p:nvPr/>
-        </p:nvSpPr>
-        <p:spPr>
-          <a:xfrm>
-            <a:off x="7360920" y="3502152"/>
-            <a:ext cx="3383280" cy="365760"/>
-          </a:xfrm>
-          <a:prstGeom prst="rect">
-            <a:avLst/>
-          </a:prstGeom>
-          <a:noFill/>
-        </p:spPr>
-        <p:txBody>
-          <a:bodyPr wrap="square" anchor="t" lIns="0" rIns="0" tIns="0" bIns="0">
-            <a:spAutoFit/>
-          </a:bodyPr>
-          <a:lstStyle/>
-          <a:p>
-            <a:pPr algn="l">
-              <a:lnSpc>
-                <a:spcPct val="105000"/>
-              </a:lnSpc>
-            </a:pPr>
-            <a:r>
-              <a:rPr sz="1100" b="0">
-                <a:solidFill>
-                  <a:srgbClr val="171B22"/>
-                </a:solidFill>
-                <a:latin typeface="Arial"/>
-              </a:rPr>
-              <a:t>👁 Observed  ·  dent, paint mismatch</a:t>
-            </a:r>
-          </a:p>
-        </p:txBody>
-      </p:sp>
-      <p:sp>
-        <p:nvSpPr>
-          <p:cNvPr id="19" name="Rectangle 18"/>
-          <p:cNvSpPr/>
-          <p:nvPr/>
-        </p:nvSpPr>
-        <p:spPr>
-          <a:xfrm>
-            <a:off x="7132320" y="3977640"/>
-            <a:ext cx="109728" cy="365760"/>
-          </a:xfrm>
-          <a:prstGeom prst="rect">
-            <a:avLst/>
-          </a:prstGeom>
-          <a:solidFill>
-            <a:srgbClr val="8B5CF6"/>
-          </a:solidFill>
-          <a:ln>
-            <a:noFill/>
-          </a:ln>
-          <a:effectLst/>
-        </p:spPr>
-        <p:style>
-          <a:lnRef idx="1">
-            <a:schemeClr val="accent1"/>
-          </a:lnRef>
-          <a:fillRef idx="3">
-            <a:schemeClr val="accent1"/>
-          </a:fillRef>
-          <a:effectRef idx="2">
-            <a:schemeClr val="accent1"/>
-          </a:effectRef>
-          <a:fontRef idx="minor">
-            <a:schemeClr val="lt1"/>
-          </a:fontRef>
-        </p:style>
-        <p:txBody>
-          <a:bodyPr rtlCol="0" anchor="ctr"/>
-          <a:lstStyle/>
-          <a:p>
-            <a:pPr algn="ctr"/>
-          </a:p>
-        </p:txBody>
-      </p:sp>
-      <p:sp>
-        <p:nvSpPr>
-          <p:cNvPr id="20" name="TextBox 19"/>
-          <p:cNvSpPr txBox="1"/>
-          <p:nvPr/>
-        </p:nvSpPr>
-        <p:spPr>
-          <a:xfrm>
-            <a:off x="7360920" y="4005072"/>
-            <a:ext cx="3383280" cy="365760"/>
-          </a:xfrm>
-          <a:prstGeom prst="rect">
-            <a:avLst/>
-          </a:prstGeom>
-          <a:noFill/>
-        </p:spPr>
-        <p:txBody>
-          <a:bodyPr wrap="square" anchor="t" lIns="0" rIns="0" tIns="0" bIns="0">
-            <a:spAutoFit/>
-          </a:bodyPr>
-          <a:lstStyle/>
-          <a:p>
-            <a:pPr algn="l">
-              <a:lnSpc>
-                <a:spcPct val="105000"/>
-              </a:lnSpc>
-            </a:pPr>
-            <a:r>
-              <a:rPr sz="1100" b="0">
-                <a:solidFill>
-                  <a:srgbClr val="171B22"/>
-                </a:solidFill>
-                <a:latin typeface="Arial"/>
-              </a:rPr>
-              <a:t>📋 Record  ·  insurance expired, active loan</a:t>
-            </a:r>
-          </a:p>
-        </p:txBody>
-      </p:sp>
-      <p:sp>
-        <p:nvSpPr>
-          <p:cNvPr id="21" name="Rectangle 20"/>
-          <p:cNvSpPr/>
-          <p:nvPr/>
-        </p:nvSpPr>
-        <p:spPr>
-          <a:xfrm>
-            <a:off x="7132320" y="4480560"/>
-            <a:ext cx="109728" cy="365760"/>
-          </a:xfrm>
-          <a:prstGeom prst="rect">
-            <a:avLst/>
-          </a:prstGeom>
-          <a:solidFill>
-            <a:srgbClr val="0891B2"/>
-          </a:solidFill>
-          <a:ln>
-            <a:noFill/>
-          </a:ln>
-          <a:effectLst/>
-        </p:spPr>
-        <p:style>
-          <a:lnRef idx="1">
-            <a:schemeClr val="accent1"/>
-          </a:lnRef>
-          <a:fillRef idx="3">
-            <a:schemeClr val="accent1"/>
-          </a:fillRef>
-          <a:effectRef idx="2">
-            <a:schemeClr val="accent1"/>
-          </a:effectRef>
-          <a:fontRef idx="minor">
-            <a:schemeClr val="lt1"/>
-          </a:fontRef>
-        </p:style>
-        <p:txBody>
-          <a:bodyPr rtlCol="0" anchor="ctr"/>
-          <a:lstStyle/>
-          <a:p>
-            <a:pPr algn="ctr"/>
-          </a:p>
-        </p:txBody>
-      </p:sp>
-      <p:sp>
-        <p:nvSpPr>
-          <p:cNvPr id="22" name="TextBox 21"/>
-          <p:cNvSpPr txBox="1"/>
-          <p:nvPr/>
-        </p:nvSpPr>
-        <p:spPr>
-          <a:xfrm>
-            <a:off x="7360920" y="4507992"/>
-            <a:ext cx="3383280" cy="365760"/>
-          </a:xfrm>
-          <a:prstGeom prst="rect">
-            <a:avLst/>
-          </a:prstGeom>
-          <a:noFill/>
-        </p:spPr>
-        <p:txBody>
-          <a:bodyPr wrap="square" anchor="t" lIns="0" rIns="0" tIns="0" bIns="0">
-            <a:spAutoFit/>
-          </a:bodyPr>
-          <a:lstStyle/>
-          <a:p>
-            <a:pPr algn="l">
-              <a:lnSpc>
-                <a:spcPct val="105000"/>
-              </a:lnSpc>
-            </a:pPr>
-            <a:r>
-              <a:rPr sz="1100" b="0">
-                <a:solidFill>
-                  <a:srgbClr val="171B22"/>
-                </a:solidFill>
-                <a:latin typeface="Arial"/>
-              </a:rPr>
-              <a:t>🔗 Inferred  ·  rule cross-checks</a:t>
-            </a:r>
-          </a:p>
-        </p:txBody>
-      </p:sp>
-      <p:sp>
-        <p:nvSpPr>
-          <p:cNvPr id="23" name="Rectangle 22"/>
-          <p:cNvSpPr/>
-          <p:nvPr/>
-        </p:nvSpPr>
-        <p:spPr>
-          <a:xfrm>
-            <a:off x="7132320" y="4983480"/>
-            <a:ext cx="109728" cy="365760"/>
-          </a:xfrm>
-          <a:prstGeom prst="rect">
-            <a:avLst/>
-          </a:prstGeom>
-          <a:solidFill>
-            <a:srgbClr val="64748B"/>
-          </a:solidFill>
-          <a:ln>
-            <a:noFill/>
-          </a:ln>
-          <a:effectLst/>
-        </p:spPr>
-        <p:style>
-          <a:lnRef idx="1">
-            <a:schemeClr val="accent1"/>
-          </a:lnRef>
-          <a:fillRef idx="3">
-            <a:schemeClr val="accent1"/>
-          </a:fillRef>
-          <a:effectRef idx="2">
-            <a:schemeClr val="accent1"/>
-          </a:effectRef>
-          <a:fontRef idx="minor">
-            <a:schemeClr val="lt1"/>
-          </a:fontRef>
-        </p:style>
-        <p:txBody>
-          <a:bodyPr rtlCol="0" anchor="ctr"/>
-          <a:lstStyle/>
-          <a:p>
-            <a:pPr algn="ctr"/>
-          </a:p>
-        </p:txBody>
-      </p:sp>
-      <p:sp>
-        <p:nvSpPr>
-          <p:cNvPr id="24" name="TextBox 23"/>
-          <p:cNvSpPr txBox="1"/>
-          <p:nvPr/>
-        </p:nvSpPr>
-        <p:spPr>
-          <a:xfrm>
-            <a:off x="7360920" y="5010912"/>
-            <a:ext cx="3383280" cy="365760"/>
-          </a:xfrm>
-          <a:prstGeom prst="rect">
-            <a:avLst/>
-          </a:prstGeom>
-          <a:noFill/>
-        </p:spPr>
-        <p:txBody>
-          <a:bodyPr wrap="square" anchor="t" lIns="0" rIns="0" tIns="0" bIns="0">
-            <a:spAutoFit/>
-          </a:bodyPr>
-          <a:lstStyle/>
-          <a:p>
-            <a:pPr algn="l">
-              <a:lnSpc>
-                <a:spcPct val="105000"/>
-              </a:lnSpc>
-            </a:pPr>
-            <a:r>
-              <a:rPr sz="1100" b="0">
-                <a:solidFill>
-                  <a:srgbClr val="171B22"/>
-                </a:solidFill>
-                <a:latin typeface="Arial"/>
-              </a:rPr>
-              <a:t>❓ Not checked  ·  engine / underbody</a:t>
-            </a:r>
-          </a:p>
-        </p:txBody>
-      </p:sp>
-      <p:sp>
-        <p:nvSpPr>
-          <p:cNvPr id="25" name="TextBox 24"/>
-          <p:cNvSpPr txBox="1"/>
-          <p:nvPr/>
-        </p:nvSpPr>
-        <p:spPr>
-          <a:xfrm>
-            <a:off x="1097280" y="5806440"/>
-            <a:ext cx="9144000" cy="365760"/>
-          </a:xfrm>
-          <a:prstGeom prst="rect">
-            <a:avLst/>
-          </a:prstGeom>
-          <a:noFill/>
-        </p:spPr>
-        <p:txBody>
-          <a:bodyPr wrap="square" anchor="t" lIns="0" rIns="0" tIns="0" bIns="0">
-            <a:spAutoFit/>
-          </a:bodyPr>
-          <a:lstStyle/>
-          <a:p>
-            <a:pPr algn="l">
-              <a:lnSpc>
-                <a:spcPct val="105000"/>
-              </a:lnSpc>
-            </a:pPr>
-            <a:r>
               <a:rPr sz="1200" b="0">
                 <a:solidFill>
-                  <a:srgbClr val="55606E"/>
-                </a:solidFill>
-                <a:latin typeface="Arial"/>
-              </a:rPr>
-              <a:t>Live prototype screenshots go on the “Snapshots” slide.</a:t>
+                  <a:srgbClr val="5F6266"/>
+                </a:solidFill>
+                <a:latin typeface="Arial"/>
+              </a:rPr>
+              <a:t>Actual screens captured from the deployed app (veriqo-api-920194228751.us-central1.run.app) — not mockups.</a:t>
             </a:r>
           </a:p>
         </p:txBody>
@@ -8288,20 +7759,20 @@
           <a:noFill/>
         </p:spPr>
         <p:txBody>
-          <a:bodyPr wrap="square" anchor="t" lIns="0" rIns="0" tIns="0" bIns="0">
+          <a:bodyPr wrap="square" lIns="0" rIns="0" tIns="0" bIns="0">
             <a:spAutoFit/>
           </a:bodyPr>
           <a:lstStyle/>
           <a:p>
             <a:pPr algn="l">
               <a:lnSpc>
-                <a:spcPct val="105000"/>
+                <a:spcPct val="108000"/>
               </a:lnSpc>
             </a:pPr>
             <a:r>
               <a:rPr sz="2700" b="1">
                 <a:solidFill>
-                  <a:srgbClr val="171B22"/>
+                  <a:srgbClr val="2A282A"/>
                 </a:solidFill>
                 <a:latin typeface="Arial"/>
               </a:rPr>
@@ -8318,18 +7789,18 @@
         </p:nvSpPr>
         <p:spPr>
           <a:xfrm>
-            <a:off x="3566160" y="1645920"/>
-            <a:ext cx="5029200" cy="685800"/>
+            <a:off x="3337560" y="1600200"/>
+            <a:ext cx="5486400" cy="640080"/>
           </a:xfrm>
           <a:prstGeom prst="roundRect">
             <a:avLst/>
           </a:prstGeom>
           <a:solidFill>
-            <a:srgbClr val="E8F0FE"/>
+            <a:srgbClr val="F6F3F2"/>
           </a:solidFill>
-          <a:ln w="12700">
+          <a:ln w="15875">
             <a:solidFill>
-              <a:srgbClr val="3B82F6"/>
+              <a:srgbClr val="D6D2D0"/>
             </a:solidFill>
           </a:ln>
           <a:effectLst/>
@@ -8349,34 +7820,30 @@
           </a:fontRef>
         </p:style>
         <p:txBody>
-          <a:bodyPr rtlCol="0" anchor="ctr" wrap="square" lIns="76200" rIns="76200" tIns="50800" bIns="50800"/>
+          <a:bodyPr rtlCol="0" anchor="ctr" wrap="square" lIns="88900" rIns="88900" tIns="50800" bIns="50800"/>
           <a:lstStyle/>
           <a:p>
             <a:pPr algn="ctr"/>
             <a:r>
               <a:rPr b="1" sz="1300">
                 <a:solidFill>
-                  <a:srgbClr val="171B22"/>
-                </a:solidFill>
-                <a:latin typeface="Arial"/>
-              </a:rPr>
-              <a:t>Firebase Hosting</a:t>
-            </a:r>
-          </a:p>
-          <a:p>
-            <a:pPr algn="ctr">
-              <a:lnSpc>
-                <a:spcPct val="100000"/>
-              </a:lnSpc>
-            </a:pPr>
+                  <a:srgbClr val="2A282A"/>
+                </a:solidFill>
+                <a:latin typeface="Arial"/>
+              </a:rPr>
+              <a:t>Buyer's browser</a:t>
+            </a:r>
+          </a:p>
+          <a:p>
+            <a:pPr algn="ctr"/>
             <a:r>
               <a:rPr sz="1000">
                 <a:solidFill>
-                  <a:srgbClr val="171B22"/>
-                </a:solidFill>
-                <a:latin typeface="Arial"/>
-              </a:rPr>
-              <a:t>React web app (buyer)</a:t>
+                  <a:srgbClr val="2A282A"/>
+                </a:solidFill>
+                <a:latin typeface="Arial"/>
+              </a:rPr>
+              <a:t>React web app</a:t>
             </a:r>
           </a:p>
         </p:txBody>
@@ -8389,14 +7856,14 @@
         </p:nvSpPr>
         <p:spPr>
           <a:xfrm>
-            <a:off x="5943600" y="2377440"/>
+            <a:off x="5943600" y="2286000"/>
             <a:ext cx="274320" cy="320040"/>
           </a:xfrm>
           <a:prstGeom prst="downArrow">
             <a:avLst/>
           </a:prstGeom>
           <a:solidFill>
-            <a:srgbClr val="64748B"/>
+            <a:srgbClr val="74777B"/>
           </a:solidFill>
           <a:ln>
             <a:noFill/>
@@ -8433,18 +7900,18 @@
         </p:nvSpPr>
         <p:spPr>
           <a:xfrm>
-            <a:off x="3566160" y="2743200"/>
-            <a:ext cx="5029200" cy="731520"/>
+            <a:off x="3337560" y="2651760"/>
+            <a:ext cx="5486400" cy="777240"/>
           </a:xfrm>
           <a:prstGeom prst="roundRect">
             <a:avLst/>
           </a:prstGeom>
           <a:solidFill>
-            <a:srgbClr val="E6F4EA"/>
+            <a:srgbClr val="EEF5F0"/>
           </a:solidFill>
-          <a:ln w="12700">
+          <a:ln w="15875">
             <a:solidFill>
-              <a:srgbClr val="1A7F37"/>
+              <a:srgbClr val="2F8A4E"/>
             </a:solidFill>
           </a:ln>
           <a:effectLst/>
@@ -8464,59 +7931,53 @@
           </a:fontRef>
         </p:style>
         <p:txBody>
-          <a:bodyPr rtlCol="0" anchor="ctr" wrap="square" lIns="76200" rIns="76200" tIns="50800" bIns="50800"/>
+          <a:bodyPr rtlCol="0" anchor="ctr" wrap="square" lIns="88900" rIns="88900" tIns="50800" bIns="50800"/>
           <a:lstStyle/>
           <a:p>
             <a:pPr algn="ctr"/>
             <a:r>
               <a:rPr b="1" sz="1300">
                 <a:solidFill>
-                  <a:srgbClr val="171B22"/>
-                </a:solidFill>
-                <a:latin typeface="Arial"/>
-              </a:rPr>
-              <a:t>Cloud Run  ·  FastAPI</a:t>
-            </a:r>
-          </a:p>
-          <a:p>
-            <a:pPr algn="ctr">
-              <a:lnSpc>
-                <a:spcPct val="100000"/>
-              </a:lnSpc>
-            </a:pPr>
+                  <a:srgbClr val="2A282A"/>
+                </a:solidFill>
+                <a:latin typeface="Arial"/>
+              </a:rPr>
+              <a:t>Cloud Run · veriqo-api (us-central1)</a:t>
+            </a:r>
+          </a:p>
+          <a:p>
+            <a:pPr algn="ctr"/>
             <a:r>
               <a:rPr sz="1000">
                 <a:solidFill>
-                  <a:srgbClr val="171B22"/>
-                </a:solidFill>
-                <a:latin typeface="Arial"/>
-              </a:rPr>
-              <a:t>Orchestration + deterministic rules (the decision layer)</a:t>
-            </a:r>
-          </a:p>
-        </p:txBody>
-      </p:sp>
-      <p:sp>
-        <p:nvSpPr>
-          <p:cNvPr id="8" name="Rounded Rectangle 7"/>
+                  <a:srgbClr val="2A282A"/>
+                </a:solidFill>
+                <a:latin typeface="Arial"/>
+              </a:rPr>
+              <a:t>Serves the web app + FastAPI · image validation · deterministic rules</a:t>
+            </a:r>
+          </a:p>
+        </p:txBody>
+      </p:sp>
+      <p:sp>
+        <p:nvSpPr>
+          <p:cNvPr id="8" name="Down Arrow 7"/>
           <p:cNvSpPr/>
           <p:nvPr/>
         </p:nvSpPr>
         <p:spPr>
           <a:xfrm>
-            <a:off x="502920" y="4023360"/>
-            <a:ext cx="2651760" cy="1051560"/>
-          </a:xfrm>
-          <a:prstGeom prst="roundRect">
+            <a:off x="5943600" y="3474720"/>
+            <a:ext cx="274320" cy="411480"/>
+          </a:xfrm>
+          <a:prstGeom prst="downArrow">
             <a:avLst/>
           </a:prstGeom>
           <a:solidFill>
-            <a:srgbClr val="F2F4F7"/>
+            <a:srgbClr val="74777B"/>
           </a:solidFill>
-          <a:ln w="12700">
-            <a:solidFill>
-              <a:srgbClr val="3B82F6"/>
-            </a:solidFill>
+          <a:ln>
+            <a:noFill/>
           </a:ln>
           <a:effectLst/>
         </p:spPr>
@@ -8535,35 +7996,10 @@
           </a:fontRef>
         </p:style>
         <p:txBody>
-          <a:bodyPr rtlCol="0" anchor="ctr" wrap="square" lIns="76200" rIns="76200" tIns="50800" bIns="50800"/>
+          <a:bodyPr rtlCol="0" anchor="ctr"/>
           <a:lstStyle/>
           <a:p>
             <a:pPr algn="ctr"/>
-            <a:r>
-              <a:rPr b="1" sz="1200">
-                <a:solidFill>
-                  <a:srgbClr val="171B22"/>
-                </a:solidFill>
-                <a:latin typeface="Arial"/>
-              </a:rPr>
-              <a:t>Gemini 2.5 Flash</a:t>
-            </a:r>
-          </a:p>
-          <a:p>
-            <a:pPr algn="ctr">
-              <a:lnSpc>
-                <a:spcPct val="100000"/>
-              </a:lnSpc>
-            </a:pPr>
-            <a:r>
-              <a:rPr sz="950">
-                <a:solidFill>
-                  <a:srgbClr val="171B22"/>
-                </a:solidFill>
-                <a:latin typeface="Arial"/>
-              </a:rPr>
-              <a:t>Vertex AI — photo analysis</a:t>
-            </a:r>
           </a:p>
         </p:txBody>
       </p:sp>
@@ -8575,18 +8011,18 @@
         </p:nvSpPr>
         <p:spPr>
           <a:xfrm>
-            <a:off x="3383280" y="4023360"/>
-            <a:ext cx="2651760" cy="1051560"/>
+            <a:off x="502920" y="3977639"/>
+            <a:ext cx="2651760" cy="1005840"/>
           </a:xfrm>
           <a:prstGeom prst="roundRect">
             <a:avLst/>
           </a:prstGeom>
           <a:solidFill>
-            <a:srgbClr val="F2F4F7"/>
+            <a:srgbClr val="F6F3F2"/>
           </a:solidFill>
-          <a:ln w="12700">
+          <a:ln w="15875">
             <a:solidFill>
-              <a:srgbClr val="8B5CF6"/>
+              <a:srgbClr val="734B5E"/>
             </a:solidFill>
           </a:ln>
           <a:effectLst/>
@@ -8606,34 +8042,30 @@
           </a:fontRef>
         </p:style>
         <p:txBody>
-          <a:bodyPr rtlCol="0" anchor="ctr" wrap="square" lIns="76200" rIns="76200" tIns="50800" bIns="50800"/>
+          <a:bodyPr rtlCol="0" anchor="ctr" wrap="square" lIns="88900" rIns="88900" tIns="50800" bIns="50800"/>
           <a:lstStyle/>
           <a:p>
             <a:pPr algn="ctr"/>
             <a:r>
-              <a:rPr b="1" sz="1200">
-                <a:solidFill>
-                  <a:srgbClr val="171B22"/>
-                </a:solidFill>
-                <a:latin typeface="Arial"/>
-              </a:rPr>
-              <a:t>VAHAN RC API</a:t>
-            </a:r>
-          </a:p>
-          <a:p>
-            <a:pPr algn="ctr">
-              <a:lnSpc>
-                <a:spcPct val="100000"/>
-              </a:lnSpc>
-            </a:pPr>
-            <a:r>
-              <a:rPr sz="950">
-                <a:solidFill>
-                  <a:srgbClr val="171B22"/>
-                </a:solidFill>
-                <a:latin typeface="Arial"/>
-              </a:rPr>
-              <a:t>Authorized provider — Simulated in demo</a:t>
+              <a:rPr b="1" sz="1300">
+                <a:solidFill>
+                  <a:srgbClr val="2A282A"/>
+                </a:solidFill>
+                <a:latin typeface="Arial"/>
+              </a:rPr>
+              <a:t>Gemini 2.5 Flash</a:t>
+            </a:r>
+          </a:p>
+          <a:p>
+            <a:pPr algn="ctr"/>
+            <a:r>
+              <a:rPr sz="1000">
+                <a:solidFill>
+                  <a:srgbClr val="2A282A"/>
+                </a:solidFill>
+                <a:latin typeface="Arial"/>
+              </a:rPr>
+              <a:t>Vertex AI · structured findings</a:t>
             </a:r>
           </a:p>
         </p:txBody>
@@ -8646,18 +8078,18 @@
         </p:nvSpPr>
         <p:spPr>
           <a:xfrm>
-            <a:off x="6263640" y="4023360"/>
-            <a:ext cx="2651760" cy="1051560"/>
+            <a:off x="3337560" y="3977639"/>
+            <a:ext cx="2651760" cy="1005840"/>
           </a:xfrm>
           <a:prstGeom prst="roundRect">
             <a:avLst/>
           </a:prstGeom>
           <a:solidFill>
-            <a:srgbClr val="F2F4F7"/>
+            <a:srgbClr val="FDF3E4"/>
           </a:solidFill>
-          <a:ln w="12700">
+          <a:ln w="15875">
             <a:solidFill>
-              <a:srgbClr val="1A7F37"/>
+              <a:srgbClr val="A9700C"/>
             </a:solidFill>
           </a:ln>
           <a:effectLst/>
@@ -8677,34 +8109,30 @@
           </a:fontRef>
         </p:style>
         <p:txBody>
-          <a:bodyPr rtlCol="0" anchor="ctr" wrap="square" lIns="76200" rIns="76200" tIns="50800" bIns="50800"/>
+          <a:bodyPr rtlCol="0" anchor="ctr" wrap="square" lIns="88900" rIns="88900" tIns="50800" bIns="50800"/>
           <a:lstStyle/>
           <a:p>
             <a:pPr algn="ctr"/>
             <a:r>
-              <a:rPr b="1" sz="1200">
-                <a:solidFill>
-                  <a:srgbClr val="171B22"/>
-                </a:solidFill>
-                <a:latin typeface="Arial"/>
-              </a:rPr>
-              <a:t>Firestore</a:t>
-            </a:r>
-          </a:p>
-          <a:p>
-            <a:pPr algn="ctr">
-              <a:lnSpc>
-                <a:spcPct val="100000"/>
-              </a:lnSpc>
-            </a:pPr>
-            <a:r>
-              <a:rPr sz="950">
-                <a:solidFill>
-                  <a:srgbClr val="171B22"/>
-                </a:solidFill>
-                <a:latin typeface="Arial"/>
-              </a:rPr>
-              <a:t>Cases + append-only audit</a:t>
+              <a:rPr b="1" sz="1300">
+                <a:solidFill>
+                  <a:srgbClr val="2A282A"/>
+                </a:solidFill>
+                <a:latin typeface="Arial"/>
+              </a:rPr>
+              <a:t>Registration lookup</a:t>
+            </a:r>
+          </a:p>
+          <a:p>
+            <a:pPr algn="ctr"/>
+            <a:r>
+              <a:rPr sz="1000">
+                <a:solidFill>
+                  <a:srgbClr val="2A282A"/>
+                </a:solidFill>
+                <a:latin typeface="Arial"/>
+              </a:rPr>
+              <a:t>SIMULATED — synthetic test fixtures</a:t>
             </a:r>
           </a:p>
         </p:txBody>
@@ -8717,18 +8145,18 @@
         </p:nvSpPr>
         <p:spPr>
           <a:xfrm>
-            <a:off x="9144000" y="4023360"/>
-            <a:ext cx="2651760" cy="1051560"/>
+            <a:off x="6172200" y="3977639"/>
+            <a:ext cx="2651760" cy="1005840"/>
           </a:xfrm>
           <a:prstGeom prst="roundRect">
             <a:avLst/>
           </a:prstGeom>
           <a:solidFill>
-            <a:srgbClr val="F2F4F7"/>
+            <a:srgbClr val="F6F3F2"/>
           </a:solidFill>
-          <a:ln w="12700">
+          <a:ln w="15875">
             <a:solidFill>
-              <a:srgbClr val="64748B"/>
+              <a:srgbClr val="2F8A4E"/>
             </a:solidFill>
           </a:ln>
           <a:effectLst/>
@@ -8748,57 +8176,55 @@
           </a:fontRef>
         </p:style>
         <p:txBody>
-          <a:bodyPr rtlCol="0" anchor="ctr" wrap="square" lIns="76200" rIns="76200" tIns="50800" bIns="50800"/>
+          <a:bodyPr rtlCol="0" anchor="ctr" wrap="square" lIns="88900" rIns="88900" tIns="50800" bIns="50800"/>
           <a:lstStyle/>
           <a:p>
             <a:pPr algn="ctr"/>
             <a:r>
-              <a:rPr b="1" sz="1200">
-                <a:solidFill>
-                  <a:srgbClr val="171B22"/>
-                </a:solidFill>
-                <a:latin typeface="Arial"/>
-              </a:rPr>
-              <a:t>Cloud Storage</a:t>
-            </a:r>
-          </a:p>
-          <a:p>
-            <a:pPr algn="ctr">
-              <a:lnSpc>
-                <a:spcPct val="100000"/>
-              </a:lnSpc>
-            </a:pPr>
-            <a:r>
-              <a:rPr sz="950">
-                <a:solidFill>
-                  <a:srgbClr val="171B22"/>
-                </a:solidFill>
-                <a:latin typeface="Arial"/>
-              </a:rPr>
-              <a:t>Uploaded photos</a:t>
-            </a:r>
-          </a:p>
-        </p:txBody>
-      </p:sp>
-      <p:sp>
-        <p:nvSpPr>
-          <p:cNvPr id="12" name="Down Arrow 11"/>
+              <a:rPr b="1" sz="1300">
+                <a:solidFill>
+                  <a:srgbClr val="2A282A"/>
+                </a:solidFill>
+                <a:latin typeface="Arial"/>
+              </a:rPr>
+              <a:t>Cloud Firestore</a:t>
+            </a:r>
+          </a:p>
+          <a:p>
+            <a:pPr algn="ctr"/>
+            <a:r>
+              <a:rPr sz="1000">
+                <a:solidFill>
+                  <a:srgbClr val="2A282A"/>
+                </a:solidFill>
+                <a:latin typeface="Arial"/>
+              </a:rPr>
+              <a:t>Reports + append-only audit trail</a:t>
+            </a:r>
+          </a:p>
+        </p:txBody>
+      </p:sp>
+      <p:sp>
+        <p:nvSpPr>
+          <p:cNvPr id="12" name="Rounded Rectangle 11"/>
           <p:cNvSpPr/>
           <p:nvPr/>
         </p:nvSpPr>
         <p:spPr>
           <a:xfrm>
-            <a:off x="5943600" y="3520440"/>
-            <a:ext cx="274320" cy="457200"/>
-          </a:xfrm>
-          <a:prstGeom prst="downArrow">
+            <a:off x="9006840" y="3977639"/>
+            <a:ext cx="2651760" cy="1005840"/>
+          </a:xfrm>
+          <a:prstGeom prst="roundRect">
             <a:avLst/>
           </a:prstGeom>
           <a:solidFill>
-            <a:srgbClr val="64748B"/>
+            <a:srgbClr val="F6F3F2"/>
           </a:solidFill>
-          <a:ln>
-            <a:noFill/>
+          <a:ln w="15875">
+            <a:solidFill>
+              <a:srgbClr val="3F6EA3"/>
+            </a:solidFill>
           </a:ln>
           <a:effectLst/>
         </p:spPr>
@@ -8817,10 +8243,31 @@
           </a:fontRef>
         </p:style>
         <p:txBody>
-          <a:bodyPr rtlCol="0" anchor="ctr"/>
+          <a:bodyPr rtlCol="0" anchor="ctr" wrap="square" lIns="88900" rIns="88900" tIns="50800" bIns="50800"/>
           <a:lstStyle/>
           <a:p>
             <a:pPr algn="ctr"/>
+            <a:r>
+              <a:rPr b="1" sz="1300">
+                <a:solidFill>
+                  <a:srgbClr val="2A282A"/>
+                </a:solidFill>
+                <a:latin typeface="Arial"/>
+              </a:rPr>
+              <a:t>Cloud Storage</a:t>
+            </a:r>
+          </a:p>
+          <a:p>
+            <a:pPr algn="ctr"/>
+            <a:r>
+              <a:rPr sz="1000">
+                <a:solidFill>
+                  <a:srgbClr val="2A282A"/>
+                </a:solidFill>
+                <a:latin typeface="Arial"/>
+              </a:rPr>
+              <a:t>Private bucket · 30-day expiry</a:t>
+            </a:r>
           </a:p>
         </p:txBody>
       </p:sp>
@@ -8833,7 +8280,7 @@
         <p:spPr>
           <a:xfrm>
             <a:off x="502920" y="5257800"/>
-            <a:ext cx="11155680" cy="731520"/>
+            <a:ext cx="11155680" cy="822960"/>
           </a:xfrm>
           <a:prstGeom prst="rect">
             <a:avLst/>
@@ -8841,24 +8288,24 @@
           <a:noFill/>
         </p:spPr>
         <p:txBody>
-          <a:bodyPr wrap="square" anchor="t" lIns="0" rIns="0" tIns="0" bIns="0">
+          <a:bodyPr wrap="square" lIns="0" rIns="0" tIns="0" bIns="0">
             <a:spAutoFit/>
           </a:bodyPr>
           <a:lstStyle/>
           <a:p>
             <a:pPr algn="l">
               <a:lnSpc>
-                <a:spcPct val="110000"/>
+                <a:spcPct val="112000"/>
               </a:lnSpc>
             </a:pPr>
             <a:r>
               <a:rPr sz="1300" b="0">
                 <a:solidFill>
-                  <a:srgbClr val="55606E"/>
-                </a:solidFill>
-                <a:latin typeface="Arial"/>
-              </a:rPr>
-              <a:t>Gemini perceives; Cloud Run decides with deterministic rules; Firestore keeps the auditable record. Only one external dependency (RC) is simulated until the live key is connected.</a:t>
+                  <a:srgbClr val="5F6266"/>
+                </a:solidFill>
+                <a:latin typeface="Arial"/>
+              </a:rPr>
+              <a:t>Gemini perceives; Cloud Run decides with fixed rules; Firestore keeps the auditable record. Not used in this prototype: Firebase Hosting and Firebase Authentication (Cloud Run serves the app; there is no sign-in).</a:t>
             </a:r>
           </a:p>
         </p:txBody>
@@ -8966,243 +8413,271 @@
           <a:noFill/>
         </p:spPr>
         <p:txBody>
-          <a:bodyPr wrap="square" anchor="t" lIns="0" rIns="0" tIns="0" bIns="0">
-            <a:spAutoFit/>
-          </a:bodyPr>
-          <a:lstStyle/>
-          <a:p>
-            <a:pPr algn="l">
-              <a:lnSpc>
-                <a:spcPct val="105000"/>
-              </a:lnSpc>
-            </a:pPr>
-            <a:r>
-              <a:rPr sz="2700" b="1">
-                <a:solidFill>
-                  <a:srgbClr val="171B22"/>
-                </a:solidFill>
-                <a:latin typeface="Arial"/>
-              </a:rPr>
-              <a:t>Technologies to be used in the solution</a:t>
-            </a:r>
-          </a:p>
-        </p:txBody>
-      </p:sp>
-      <p:sp>
-        <p:nvSpPr>
-          <p:cNvPr id="5" name="TextBox 4"/>
-          <p:cNvSpPr txBox="1"/>
-          <p:nvPr/>
-        </p:nvSpPr>
-        <p:spPr>
-          <a:xfrm>
-            <a:off x="502920" y="1737360"/>
-            <a:ext cx="11155680" cy="4389120"/>
-          </a:xfrm>
-          <a:prstGeom prst="rect">
-            <a:avLst/>
-          </a:prstGeom>
-          <a:noFill/>
-        </p:spPr>
-        <p:txBody>
           <a:bodyPr wrap="square" lIns="0" rIns="0" tIns="0" bIns="0">
             <a:spAutoFit/>
           </a:bodyPr>
           <a:lstStyle/>
           <a:p>
+            <a:pPr algn="l">
+              <a:lnSpc>
+                <a:spcPct val="108000"/>
+              </a:lnSpc>
+            </a:pPr>
+            <a:r>
+              <a:rPr sz="2700" b="1">
+                <a:solidFill>
+                  <a:srgbClr val="2A282A"/>
+                </a:solidFill>
+                <a:latin typeface="Arial"/>
+              </a:rPr>
+              <a:t>Technologies to be used in the solution</a:t>
+            </a:r>
+          </a:p>
+        </p:txBody>
+      </p:sp>
+      <p:sp>
+        <p:nvSpPr>
+          <p:cNvPr id="5" name="TextBox 4"/>
+          <p:cNvSpPr txBox="1"/>
+          <p:nvPr/>
+        </p:nvSpPr>
+        <p:spPr>
+          <a:xfrm>
+            <a:off x="502920" y="1691640"/>
+            <a:ext cx="11155680" cy="4572000"/>
+          </a:xfrm>
+          <a:prstGeom prst="rect">
+            <a:avLst/>
+          </a:prstGeom>
+          <a:noFill/>
+        </p:spPr>
+        <p:txBody>
+          <a:bodyPr wrap="square" lIns="0" rIns="0" tIns="0" bIns="0">
+            <a:spAutoFit/>
+          </a:bodyPr>
+          <a:lstStyle/>
+          <a:p>
             <a:pPr>
               <a:lnSpc>
-                <a:spcPct val="105000"/>
+                <a:spcPct val="108000"/>
               </a:lnSpc>
               <a:spcAft>
-                <a:spcPts val="1100"/>
+                <a:spcPts val="900"/>
               </a:spcAft>
             </a:pPr>
             <a:r>
-              <a:rPr b="1" sz="1500">
-                <a:solidFill>
-                  <a:srgbClr val="171B22"/>
-                </a:solidFill>
-                <a:latin typeface="Arial"/>
-              </a:rPr>
-              <a:t>•  Gemini 2.5 Flash (Vertex AI). </a:t>
-            </a:r>
-            <a:r>
-              <a:rPr sz="1500">
-                <a:solidFill>
-                  <a:srgbClr val="171B22"/>
-                </a:solidFill>
-                <a:latin typeface="Arial"/>
-              </a:rPr>
-              <a:t>Multimodal photo understanding with structured JSON output.</a:t>
+              <a:rPr b="1" sz="1450">
+                <a:solidFill>
+                  <a:srgbClr val="2A282A"/>
+                </a:solidFill>
+                <a:latin typeface="Arial"/>
+              </a:rPr>
+              <a:t>•  Gemini 2.5 Flash on Vertex AI — </a:t>
+            </a:r>
+            <a:r>
+              <a:rPr sz="1450">
+                <a:solidFill>
+                  <a:srgbClr val="2A282A"/>
+                </a:solidFill>
+                <a:latin typeface="Arial"/>
+              </a:rPr>
+              <a:t>multimodal photo analysis with a typed JSON response schema (temperature 0).</a:t>
             </a:r>
           </a:p>
           <a:p>
             <a:pPr>
               <a:lnSpc>
-                <a:spcPct val="105000"/>
+                <a:spcPct val="108000"/>
               </a:lnSpc>
               <a:spcAft>
-                <a:spcPts val="1100"/>
+                <a:spcPts val="900"/>
               </a:spcAft>
             </a:pPr>
             <a:r>
-              <a:rPr b="1" sz="1500">
-                <a:solidFill>
-                  <a:srgbClr val="171B22"/>
-                </a:solidFill>
-                <a:latin typeface="Arial"/>
-              </a:rPr>
-              <a:t>•  Cloud Run. </a:t>
-            </a:r>
-            <a:r>
-              <a:rPr sz="1500">
-                <a:solidFill>
-                  <a:srgbClr val="171B22"/>
-                </a:solidFill>
-                <a:latin typeface="Arial"/>
-              </a:rPr>
-              <a:t>FastAPI backend: orchestration + deterministic scoring, autoscaling, kept warm.</a:t>
+              <a:rPr b="1" sz="1450">
+                <a:solidFill>
+                  <a:srgbClr val="2A282A"/>
+                </a:solidFill>
+                <a:latin typeface="Arial"/>
+              </a:rPr>
+              <a:t>•  Cloud Run — </a:t>
+            </a:r>
+            <a:r>
+              <a:rPr sz="1450">
+                <a:solidFill>
+                  <a:srgbClr val="2A282A"/>
+                </a:solidFill>
+                <a:latin typeface="Arial"/>
+              </a:rPr>
+              <a:t>one service serving the React app and the FastAPI backend; 1 warm instance.</a:t>
             </a:r>
           </a:p>
           <a:p>
             <a:pPr>
               <a:lnSpc>
-                <a:spcPct val="105000"/>
+                <a:spcPct val="108000"/>
               </a:lnSpc>
               <a:spcAft>
-                <a:spcPts val="1100"/>
+                <a:spcPts val="900"/>
               </a:spcAft>
             </a:pPr>
             <a:r>
-              <a:rPr b="1" sz="1500">
-                <a:solidFill>
-                  <a:srgbClr val="171B22"/>
-                </a:solidFill>
-                <a:latin typeface="Arial"/>
-              </a:rPr>
-              <a:t>•  Cloud Firestore. </a:t>
-            </a:r>
-            <a:r>
-              <a:rPr sz="1500">
-                <a:solidFill>
-                  <a:srgbClr val="171B22"/>
-                </a:solidFill>
-                <a:latin typeface="Arial"/>
-              </a:rPr>
-              <a:t>Verification cases + append-only audit trail; shareable reports.</a:t>
+              <a:rPr b="1" sz="1450">
+                <a:solidFill>
+                  <a:srgbClr val="2A282A"/>
+                </a:solidFill>
+                <a:latin typeface="Arial"/>
+              </a:rPr>
+              <a:t>•  Cloud Firestore (Firebase) — </a:t>
+            </a:r>
+            <a:r>
+              <a:rPr sz="1450">
+                <a:solidFill>
+                  <a:srgbClr val="2A282A"/>
+                </a:solidFill>
+                <a:latin typeface="Arial"/>
+              </a:rPr>
+              <a:t>saved reports and an append-only audit trail.</a:t>
             </a:r>
           </a:p>
           <a:p>
             <a:pPr>
               <a:lnSpc>
-                <a:spcPct val="105000"/>
+                <a:spcPct val="108000"/>
               </a:lnSpc>
               <a:spcAft>
-                <a:spcPts val="1100"/>
+                <a:spcPts val="900"/>
               </a:spcAft>
             </a:pPr>
             <a:r>
-              <a:rPr b="1" sz="1500">
-                <a:solidFill>
-                  <a:srgbClr val="171B22"/>
-                </a:solidFill>
-                <a:latin typeface="Arial"/>
-              </a:rPr>
-              <a:t>•  Firebase Hosting + Auth. </a:t>
-            </a:r>
-            <a:r>
-              <a:rPr sz="1500">
-                <a:solidFill>
-                  <a:srgbClr val="171B22"/>
-                </a:solidFill>
-                <a:latin typeface="Arial"/>
-              </a:rPr>
-              <a:t>Serves the web app; rewrites /api to Cloud Run; optional sign-in.</a:t>
+              <a:rPr b="1" sz="1450">
+                <a:solidFill>
+                  <a:srgbClr val="2A282A"/>
+                </a:solidFill>
+                <a:latin typeface="Arial"/>
+              </a:rPr>
+              <a:t>•  Cloud Storage — </a:t>
+            </a:r>
+            <a:r>
+              <a:rPr sz="1450">
+                <a:solidFill>
+                  <a:srgbClr val="2A282A"/>
+                </a:solidFill>
+                <a:latin typeface="Arial"/>
+              </a:rPr>
+              <a:t>uploaded photos in a private bucket, deleted automatically after 30 days.</a:t>
             </a:r>
           </a:p>
           <a:p>
             <a:pPr>
               <a:lnSpc>
-                <a:spcPct val="105000"/>
+                <a:spcPct val="108000"/>
               </a:lnSpc>
               <a:spcAft>
-                <a:spcPts val="1100"/>
+                <a:spcPts val="900"/>
               </a:spcAft>
             </a:pPr>
             <a:r>
-              <a:rPr b="1" sz="1500">
-                <a:solidFill>
-                  <a:srgbClr val="171B22"/>
-                </a:solidFill>
-                <a:latin typeface="Arial"/>
-              </a:rPr>
-              <a:t>•  Cloud Storage. </a:t>
-            </a:r>
-            <a:r>
-              <a:rPr sz="1500">
-                <a:solidFill>
-                  <a:srgbClr val="171B22"/>
-                </a:solidFill>
-                <a:latin typeface="Arial"/>
-              </a:rPr>
-              <a:t>Stores uploaded car photos (evidence).</a:t>
+              <a:rPr b="1" sz="1450">
+                <a:solidFill>
+                  <a:srgbClr val="2A282A"/>
+                </a:solidFill>
+                <a:latin typeface="Arial"/>
+              </a:rPr>
+              <a:t>•  Cloud Build + Artifact Registry — </a:t>
+            </a:r>
+            <a:r>
+              <a:rPr sz="1450">
+                <a:solidFill>
+                  <a:srgbClr val="2A282A"/>
+                </a:solidFill>
+                <a:latin typeface="Arial"/>
+              </a:rPr>
+              <a:t>builds and stores the container on every deploy.</a:t>
             </a:r>
           </a:p>
           <a:p>
             <a:pPr>
               <a:lnSpc>
-                <a:spcPct val="105000"/>
+                <a:spcPct val="108000"/>
               </a:lnSpc>
               <a:spcAft>
-                <a:spcPts val="1100"/>
+                <a:spcPts val="900"/>
               </a:spcAft>
             </a:pPr>
             <a:r>
-              <a:rPr b="1" sz="1500">
-                <a:solidFill>
-                  <a:srgbClr val="171B22"/>
-                </a:solidFill>
-                <a:latin typeface="Arial"/>
-              </a:rPr>
-              <a:t>•  Authorized RC / VAHAN provider API. </a:t>
-            </a:r>
-            <a:r>
-              <a:rPr sz="1500">
-                <a:solidFill>
-                  <a:srgbClr val="171B22"/>
-                </a:solidFill>
-                <a:latin typeface="Arial"/>
-              </a:rPr>
-              <a:t>Registration facts (Surepass / Signzy class) — simulated until key is live.</a:t>
+              <a:rPr b="1" sz="1450">
+                <a:solidFill>
+                  <a:srgbClr val="2A282A"/>
+                </a:solidFill>
+                <a:latin typeface="Arial"/>
+              </a:rPr>
+              <a:t>•  React + Vite + TypeScript · FastAPI + Pydantic (Python) — </a:t>
+            </a:r>
+            <a:r>
+              <a:rPr sz="1450">
+                <a:solidFill>
+                  <a:srgbClr val="2A282A"/>
+                </a:solidFill>
+                <a:latin typeface="Arial"/>
+              </a:rPr>
+              <a:t>app and API.</a:t>
             </a:r>
           </a:p>
           <a:p>
             <a:pPr>
               <a:lnSpc>
-                <a:spcPct val="105000"/>
+                <a:spcPct val="108000"/>
               </a:lnSpc>
               <a:spcAft>
-                <a:spcPts val="1100"/>
+                <a:spcPts val="900"/>
               </a:spcAft>
             </a:pPr>
             <a:r>
-              <a:rPr b="1" sz="1500">
-                <a:solidFill>
-                  <a:srgbClr val="171B22"/>
-                </a:solidFill>
-                <a:latin typeface="Arial"/>
-              </a:rPr>
-              <a:t>•  React + Vite + TypeScript. </a:t>
-            </a:r>
-            <a:r>
-              <a:rPr sz="1500">
-                <a:solidFill>
-                  <a:srgbClr val="171B22"/>
-                </a:solidFill>
-                <a:latin typeface="Arial"/>
-              </a:rPr>
-              <a:t>Fast, responsive buyer UI.</a:t>
+              <a:rPr b="1" sz="1450">
+                <a:solidFill>
+                  <a:srgbClr val="2A282A"/>
+                </a:solidFill>
+                <a:latin typeface="Arial"/>
+              </a:rPr>
+              <a:t>•  pytest + Playwright — </a:t>
+            </a:r>
+            <a:r>
+              <a:rPr sz="1450">
+                <a:solidFill>
+                  <a:srgbClr val="2A282A"/>
+                </a:solidFill>
+                <a:latin typeface="Arial"/>
+              </a:rPr>
+              <a:t>API tests and browser tests run against the live deployment.</a:t>
+            </a:r>
+          </a:p>
+          <a:p>
+            <a:pPr>
+              <a:lnSpc>
+                <a:spcPct val="108000"/>
+              </a:lnSpc>
+              <a:spcAft>
+                <a:spcPts val="900"/>
+              </a:spcAft>
+            </a:pPr>
+            <a:r>
+              <a:rPr b="1" sz="1450">
+                <a:solidFill>
+                  <a:srgbClr val="2A282A"/>
+                </a:solidFill>
+                <a:latin typeface="Arial"/>
+              </a:rPr>
+              <a:t>•  Registration data — </a:t>
+            </a:r>
+            <a:r>
+              <a:rPr sz="1450">
+                <a:solidFill>
+                  <a:srgbClr val="2A282A"/>
+                </a:solidFill>
+                <a:latin typeface="Arial"/>
+              </a:rPr>
+              <a:t>synthetic fixtures today; built to plug in a licensed provider (Surepass / Signzy class).</a:t>
             </a:r>
           </a:p>
         </p:txBody>
@@ -9310,20 +8785,20 @@
           <a:noFill/>
         </p:spPr>
         <p:txBody>
-          <a:bodyPr wrap="square" anchor="t" lIns="0" rIns="0" tIns="0" bIns="0">
+          <a:bodyPr wrap="square" lIns="0" rIns="0" tIns="0" bIns="0">
             <a:spAutoFit/>
           </a:bodyPr>
           <a:lstStyle/>
           <a:p>
             <a:pPr algn="l">
               <a:lnSpc>
-                <a:spcPct val="105000"/>
+                <a:spcPct val="108000"/>
               </a:lnSpc>
             </a:pPr>
             <a:r>
               <a:rPr sz="2700" b="1">
                 <a:solidFill>
-                  <a:srgbClr val="171B22"/>
+                  <a:srgbClr val="2A282A"/>
                 </a:solidFill>
                 <a:latin typeface="Arial"/>
               </a:rPr>
@@ -9349,24 +8824,24 @@
           <a:noFill/>
         </p:spPr>
         <p:txBody>
-          <a:bodyPr wrap="square" anchor="t" lIns="0" rIns="0" tIns="0" bIns="0">
+          <a:bodyPr wrap="square" lIns="0" rIns="0" tIns="0" bIns="0">
             <a:spAutoFit/>
           </a:bodyPr>
           <a:lstStyle/>
           <a:p>
             <a:pPr algn="l">
               <a:lnSpc>
-                <a:spcPct val="105000"/>
+                <a:spcPct val="108000"/>
               </a:lnSpc>
             </a:pPr>
             <a:r>
               <a:rPr sz="1400" b="0">
                 <a:solidFill>
-                  <a:srgbClr val="55606E"/>
-                </a:solidFill>
-                <a:latin typeface="Arial"/>
-              </a:rPr>
-              <a:t>Indicative, prototype-scale — built to stay within Google Cloud's free tiers; cost is dominated by the RC lookup.</a:t>
+                  <a:srgbClr val="5F6266"/>
+                </a:solidFill>
+                <a:latin typeface="Arial"/>
+              </a:rPr>
+              <a:t>Indicative, prototype scale. These are estimates, not measured bills.</a:t>
             </a:r>
           </a:p>
         </p:txBody>
@@ -9381,7 +8856,7 @@
         </p:nvGraphicFramePr>
         <p:xfrm>
           <a:off x="502920" y="2286000"/>
-          <a:ext cx="11155680" cy="3291840"/>
+          <a:ext cx="11155680" cy="1920240"/>
         </p:xfrm>
         <a:graphic>
           <a:graphicData uri="http://schemas.openxmlformats.org/drawingml/2006/table">
@@ -9390,18 +8865,18 @@
                 <a:tableStyleId>{5C22544A-7EE6-4342-B048-85BDC9FD1C3A}</a:tableStyleId>
               </a:tblPr>
               <a:tblGrid>
-                <a:gridCol w="3840480"/>
-                <a:gridCol w="4572000"/>
-                <a:gridCol w="2743200"/>
+                <a:gridCol w="3291840"/>
+                <a:gridCol w="4846320"/>
+                <a:gridCol w="3017520"/>
               </a:tblGrid>
-              <a:tr h="548640">
+              <a:tr h="384048">
                 <a:tc>
                   <a:txBody>
                     <a:bodyPr/>
                     <a:lstStyle/>
                     <a:p>
                       <a:r>
-                        <a:rPr sz="1250" b="1">
+                        <a:rPr sz="1300" b="1">
                           <a:solidFill>
                             <a:srgbClr val="FFFFFF"/>
                           </a:solidFill>
@@ -9413,7 +8888,7 @@
                   </a:txBody>
                   <a:tcPr>
                     <a:solidFill>
-                      <a:srgbClr val="171B22"/>
+                      <a:srgbClr val="2A282A"/>
                     </a:solidFill>
                   </a:tcPr>
                 </a:tc>
@@ -9423,19 +8898,19 @@
                     <a:lstStyle/>
                     <a:p>
                       <a:r>
-                        <a:rPr sz="1250" b="1">
+                        <a:rPr sz="1300" b="1">
                           <a:solidFill>
                             <a:srgbClr val="FFFFFF"/>
                           </a:solidFill>
                           <a:latin typeface="Arial"/>
                         </a:rPr>
-                        <a:t>Basis</a:t>
+                        <a:t>Driver</a:t>
                       </a:r>
                     </a:p>
                   </a:txBody>
                   <a:tcPr>
                     <a:solidFill>
-                      <a:srgbClr val="171B22"/>
+                      <a:srgbClr val="2A282A"/>
                     </a:solidFill>
                   </a:tcPr>
                 </a:tc>
@@ -9445,7 +8920,7 @@
                     <a:lstStyle/>
                     <a:p>
                       <a:r>
-                        <a:rPr sz="1250" b="1">
+                        <a:rPr sz="1300" b="1">
                           <a:solidFill>
                             <a:srgbClr val="FFFFFF"/>
                           </a:solidFill>
@@ -9457,21 +8932,21 @@
                   </a:txBody>
                   <a:tcPr>
                     <a:solidFill>
-                      <a:srgbClr val="171B22"/>
+                      <a:srgbClr val="2A282A"/>
                     </a:solidFill>
                   </a:tcPr>
                 </a:tc>
               </a:tr>
-              <a:tr h="548640">
+              <a:tr h="384048">
                 <a:tc>
                   <a:txBody>
                     <a:bodyPr/>
                     <a:lstStyle/>
                     <a:p>
                       <a:r>
-                        <a:rPr sz="1250" b="0">
+                        <a:rPr sz="1300" b="0">
                           <a:solidFill>
-                            <a:srgbClr val="171B22"/>
+                            <a:srgbClr val="2A282A"/>
                           </a:solidFill>
                           <a:latin typeface="Arial"/>
                         </a:rPr>
@@ -9491,13 +8966,13 @@
                     <a:lstStyle/>
                     <a:p>
                       <a:r>
-                        <a:rPr sz="1250" b="0">
+                        <a:rPr sz="1300" b="0">
                           <a:solidFill>
-                            <a:srgbClr val="171B22"/>
+                            <a:srgbClr val="2A282A"/>
                           </a:solidFill>
                           <a:latin typeface="Arial"/>
                         </a:rPr>
-                        <a:t>A few images per verification</a:t>
+                        <a:t>≈5 photos per report</a:t>
                       </a:r>
                     </a:p>
                   </a:txBody>
@@ -9513,13 +8988,13 @@
                     <a:lstStyle/>
                     <a:p>
                       <a:r>
-                        <a:rPr sz="1250" b="0">
+                        <a:rPr sz="1300" b="0">
                           <a:solidFill>
-                            <a:srgbClr val="171B22"/>
+                            <a:srgbClr val="2A282A"/>
                           </a:solidFill>
                           <a:latin typeface="Arial"/>
                         </a:rPr>
-                        <a:t>Fraction of ₹ per report</a:t>
+                        <a:t>Fractions of ₹ per report</a:t>
                       </a:r>
                     </a:p>
                   </a:txBody>
@@ -9530,20 +9005,88 @@
                   </a:tcPr>
                 </a:tc>
               </a:tr>
-              <a:tr h="548640">
+              <a:tr h="384048">
                 <a:tc>
                   <a:txBody>
                     <a:bodyPr/>
                     <a:lstStyle/>
                     <a:p>
                       <a:r>
-                        <a:rPr sz="1250" b="0">
+                        <a:rPr sz="1300" b="0">
                           <a:solidFill>
-                            <a:srgbClr val="171B22"/>
+                            <a:srgbClr val="2A282A"/>
                           </a:solidFill>
                           <a:latin typeface="Arial"/>
                         </a:rPr>
-                        <a:t>RC / VAHAN lookup</a:t>
+                        <a:t>Cloud Run</a:t>
+                      </a:r>
+                    </a:p>
+                  </a:txBody>
+                  <a:tcPr>
+                    <a:solidFill>
+                      <a:srgbClr val="F6F3F2"/>
+                    </a:solidFill>
+                  </a:tcPr>
+                </a:tc>
+                <a:tc>
+                  <a:txBody>
+                    <a:bodyPr/>
+                    <a:lstStyle/>
+                    <a:p>
+                      <a:r>
+                        <a:rPr sz="1300" b="0">
+                          <a:solidFill>
+                            <a:srgbClr val="2A282A"/>
+                          </a:solidFill>
+                          <a:latin typeface="Arial"/>
+                        </a:rPr>
+                        <a:t>1 always-warm instance (avoids cold starts)</a:t>
+                      </a:r>
+                    </a:p>
+                  </a:txBody>
+                  <a:tcPr>
+                    <a:solidFill>
+                      <a:srgbClr val="F6F3F2"/>
+                    </a:solidFill>
+                  </a:tcPr>
+                </a:tc>
+                <a:tc>
+                  <a:txBody>
+                    <a:bodyPr/>
+                    <a:lstStyle/>
+                    <a:p>
+                      <a:r>
+                        <a:rPr sz="1300" b="0">
+                          <a:solidFill>
+                            <a:srgbClr val="2A282A"/>
+                          </a:solidFill>
+                          <a:latin typeface="Arial"/>
+                        </a:rPr>
+                        <a:t>Small fixed monthly cost</a:t>
+                      </a:r>
+                    </a:p>
+                  </a:txBody>
+                  <a:tcPr>
+                    <a:solidFill>
+                      <a:srgbClr val="F6F3F2"/>
+                    </a:solidFill>
+                  </a:tcPr>
+                </a:tc>
+              </a:tr>
+              <a:tr h="384048">
+                <a:tc>
+                  <a:txBody>
+                    <a:bodyPr/>
+                    <a:lstStyle/>
+                    <a:p>
+                      <a:r>
+                        <a:rPr sz="1300" b="0">
+                          <a:solidFill>
+                            <a:srgbClr val="2A282A"/>
+                          </a:solidFill>
+                          <a:latin typeface="Arial"/>
+                        </a:rPr>
+                        <a:t>Firestore + Cloud Storage</a:t>
                       </a:r>
                     </a:p>
                   </a:txBody>
@@ -9559,13 +9102,13 @@
                     <a:lstStyle/>
                     <a:p>
                       <a:r>
-                        <a:rPr sz="1250" b="0">
+                        <a:rPr sz="1300" b="0">
                           <a:solidFill>
-                            <a:srgbClr val="171B22"/>
+                            <a:srgbClr val="2A282A"/>
                           </a:solidFill>
                           <a:latin typeface="Arial"/>
                         </a:rPr>
-                        <a:t>Per registration lookup (provider-priced)</a:t>
+                        <a:t>Prototype volumes; photos auto-deleted at 30 days</a:t>
                       </a:r>
                     </a:p>
                   </a:txBody>
@@ -9581,145 +9124,9 @@
                     <a:lstStyle/>
                     <a:p>
                       <a:r>
-                        <a:rPr sz="1250" b="0">
+                        <a:rPr sz="1300" b="0">
                           <a:solidFill>
-                            <a:srgbClr val="171B22"/>
-                          </a:solidFill>
-                          <a:latin typeface="Arial"/>
-                        </a:rPr>
-                        <a:t>≈ ₹ a few per report</a:t>
-                      </a:r>
-                    </a:p>
-                  </a:txBody>
-                  <a:tcPr>
-                    <a:solidFill>
-                      <a:srgbClr val="FFFFFF"/>
-                    </a:solidFill>
-                  </a:tcPr>
-                </a:tc>
-              </a:tr>
-              <a:tr h="548640">
-                <a:tc>
-                  <a:txBody>
-                    <a:bodyPr/>
-                    <a:lstStyle/>
-                    <a:p>
-                      <a:r>
-                        <a:rPr sz="1250" b="0">
-                          <a:solidFill>
-                            <a:srgbClr val="171B22"/>
-                          </a:solidFill>
-                          <a:latin typeface="Arial"/>
-                        </a:rPr>
-                        <a:t>Cloud Run</a:t>
-                      </a:r>
-                    </a:p>
-                  </a:txBody>
-                  <a:tcPr>
-                    <a:solidFill>
-                      <a:srgbClr val="FFFFFF"/>
-                    </a:solidFill>
-                  </a:tcPr>
-                </a:tc>
-                <a:tc>
-                  <a:txBody>
-                    <a:bodyPr/>
-                    <a:lstStyle/>
-                    <a:p>
-                      <a:r>
-                        <a:rPr sz="1250" b="0">
-                          <a:solidFill>
-                            <a:srgbClr val="171B22"/>
-                          </a:solidFill>
-                          <a:latin typeface="Arial"/>
-                        </a:rPr>
-                        <a:t>Free tier; small cost if kept warm (min-instance)</a:t>
-                      </a:r>
-                    </a:p>
-                  </a:txBody>
-                  <a:tcPr>
-                    <a:solidFill>
-                      <a:srgbClr val="FFFFFF"/>
-                    </a:solidFill>
-                  </a:tcPr>
-                </a:tc>
-                <a:tc>
-                  <a:txBody>
-                    <a:bodyPr/>
-                    <a:lstStyle/>
-                    <a:p>
-                      <a:r>
-                        <a:rPr sz="1250" b="0">
-                          <a:solidFill>
-                            <a:srgbClr val="171B22"/>
-                          </a:solidFill>
-                          <a:latin typeface="Arial"/>
-                        </a:rPr>
-                        <a:t>≈ free – low ₹/month</a:t>
-                      </a:r>
-                    </a:p>
-                  </a:txBody>
-                  <a:tcPr>
-                    <a:solidFill>
-                      <a:srgbClr val="FFFFFF"/>
-                    </a:solidFill>
-                  </a:tcPr>
-                </a:tc>
-              </a:tr>
-              <a:tr h="548640">
-                <a:tc>
-                  <a:txBody>
-                    <a:bodyPr/>
-                    <a:lstStyle/>
-                    <a:p>
-                      <a:r>
-                        <a:rPr sz="1250" b="0">
-                          <a:solidFill>
-                            <a:srgbClr val="171B22"/>
-                          </a:solidFill>
-                          <a:latin typeface="Arial"/>
-                        </a:rPr>
-                        <a:t>Firestore / Storage / Hosting</a:t>
-                      </a:r>
-                    </a:p>
-                  </a:txBody>
-                  <a:tcPr>
-                    <a:solidFill>
-                      <a:srgbClr val="FFFFFF"/>
-                    </a:solidFill>
-                  </a:tcPr>
-                </a:tc>
-                <a:tc>
-                  <a:txBody>
-                    <a:bodyPr/>
-                    <a:lstStyle/>
-                    <a:p>
-                      <a:r>
-                        <a:rPr sz="1250" b="0">
-                          <a:solidFill>
-                            <a:srgbClr val="171B22"/>
-                          </a:solidFill>
-                          <a:latin typeface="Arial"/>
-                        </a:rPr>
-                        <a:t>Prototype volumes</a:t>
-                      </a:r>
-                    </a:p>
-                  </a:txBody>
-                  <a:tcPr>
-                    <a:solidFill>
-                      <a:srgbClr val="FFFFFF"/>
-                    </a:solidFill>
-                  </a:tcPr>
-                </a:tc>
-                <a:tc>
-                  <a:txBody>
-                    <a:bodyPr/>
-                    <a:lstStyle/>
-                    <a:p>
-                      <a:r>
-                        <a:rPr sz="1250" b="0">
-                          <a:solidFill>
-                            <a:srgbClr val="171B22"/>
+                            <a:srgbClr val="2A282A"/>
                           </a:solidFill>
                           <a:latin typeface="Arial"/>
                         </a:rPr>
@@ -9734,26 +9141,26 @@
                   </a:tcPr>
                 </a:tc>
               </a:tr>
-              <a:tr h="548640">
+              <a:tr h="384048">
                 <a:tc>
                   <a:txBody>
                     <a:bodyPr/>
                     <a:lstStyle/>
                     <a:p>
                       <a:r>
-                        <a:rPr sz="1250" b="1">
+                        <a:rPr sz="1300" b="0">
                           <a:solidFill>
-                            <a:srgbClr val="171B22"/>
+                            <a:srgbClr val="2A282A"/>
                           </a:solidFill>
                           <a:latin typeface="Arial"/>
                         </a:rPr>
-                        <a:t>Per-report (low volume)</a:t>
+                        <a:t>Registration provider (when live)</a:t>
                       </a:r>
                     </a:p>
                   </a:txBody>
                   <a:tcPr>
                     <a:solidFill>
-                      <a:srgbClr val="F2F4F7"/>
+                      <a:srgbClr val="F6F3F2"/>
                     </a:solidFill>
                   </a:tcPr>
                 </a:tc>
@@ -9763,19 +9170,19 @@
                     <a:lstStyle/>
                     <a:p>
                       <a:r>
-                        <a:rPr sz="1250" b="1">
+                        <a:rPr sz="1300" b="0">
                           <a:solidFill>
-                            <a:srgbClr val="171B22"/>
+                            <a:srgbClr val="2A282A"/>
                           </a:solidFill>
                           <a:latin typeface="Arial"/>
                         </a:rPr>
-                        <a:t>Sum, RC-dominated</a:t>
+                        <a:t>Per-lookup fee</a:t>
                       </a:r>
                     </a:p>
                   </a:txBody>
                   <a:tcPr>
                     <a:solidFill>
-                      <a:srgbClr val="F2F4F7"/>
+                      <a:srgbClr val="F6F3F2"/>
                     </a:solidFill>
                   </a:tcPr>
                 </a:tc>
@@ -9785,19 +9192,19 @@
                     <a:lstStyle/>
                     <a:p>
                       <a:r>
-                        <a:rPr sz="1250" b="1">
+                        <a:rPr sz="1300" b="0">
                           <a:solidFill>
-                            <a:srgbClr val="171B22"/>
+                            <a:srgbClr val="2A282A"/>
                           </a:solidFill>
                           <a:latin typeface="Arial"/>
                         </a:rPr>
-                        <a:t>≈ ₹ 5 – 15 (indicative)</a:t>
+                        <a:t>Likely the largest per-report cost</a:t>
                       </a:r>
                     </a:p>
                   </a:txBody>
                   <a:tcPr>
                     <a:solidFill>
-                      <a:srgbClr val="F2F4F7"/>
+                      <a:srgbClr val="F6F3F2"/>
                     </a:solidFill>
                   </a:tcPr>
                 </a:tc>
@@ -9806,45 +9213,6 @@
           </a:graphicData>
         </a:graphic>
       </p:graphicFrame>
-      <p:sp>
-        <p:nvSpPr>
-          <p:cNvPr id="7" name="TextBox 6"/>
-          <p:cNvSpPr txBox="1"/>
-          <p:nvPr/>
-        </p:nvSpPr>
-        <p:spPr>
-          <a:xfrm>
-            <a:off x="502920" y="5760720"/>
-            <a:ext cx="10972800" cy="365760"/>
-          </a:xfrm>
-          <a:prstGeom prst="rect">
-            <a:avLst/>
-          </a:prstGeom>
-          <a:noFill/>
-        </p:spPr>
-        <p:txBody>
-          <a:bodyPr wrap="square" anchor="t" lIns="0" rIns="0" tIns="0" bIns="0">
-            <a:spAutoFit/>
-          </a:bodyPr>
-          <a:lstStyle/>
-          <a:p>
-            <a:pPr algn="l">
-              <a:lnSpc>
-                <a:spcPct val="105000"/>
-              </a:lnSpc>
-            </a:pPr>
-            <a:r>
-              <a:rPr sz="1150" b="0">
-                <a:solidFill>
-                  <a:srgbClr val="55606E"/>
-                </a:solidFill>
-                <a:latin typeface="Arial"/>
-              </a:rPr>
-              <a:t>Figures are indicative estimates for a prototype, not a quoted price.</a:t>
-            </a:r>
-          </a:p>
-        </p:txBody>
-      </p:sp>
     </p:spTree>
   </p:cSld>
   <p:clrMapOvr>

--- a/docs/Veriqo_AI_Builder_Cup_Deck.pptx
+++ b/docs/Veriqo_AI_Builder_Cup_Deck.pptx
@@ -4885,9 +4885,10 @@
             <a:r>
               <a:rPr sz="1300" b="0">
                 <a:solidFill>
-                  <a:srgbClr val="2A282A"/>
-                </a:solidFill>
-                <a:latin typeface="Arial"/>
+                  <a:srgbClr val="3F6EA3"/>
+                </a:solidFill>
+                <a:latin typeface="Arial"/>
+                <a:hlinkClick r:id="rId3"/>
               </a:rPr>
               <a:t>https://github.com/radhikaaudi/Veriqo</a:t>
             </a:r>
@@ -5009,11 +5010,12 @@
             <a:r>
               <a:rPr sz="1300" b="0">
                 <a:solidFill>
-                  <a:srgbClr val="5F6266"/>
-                </a:solidFill>
-                <a:latin typeface="Arial"/>
-              </a:rPr>
-              <a:t>[ paste the video link after upload ]</a:t>
+                  <a:srgbClr val="3F6EA3"/>
+                </a:solidFill>
+                <a:latin typeface="Arial"/>
+                <a:hlinkClick r:id="rId4"/>
+              </a:rPr>
+              <a:t>https://youtu.be/B015EyHjXNM</a:t>
             </a:r>
           </a:p>
         </p:txBody>
@@ -5133,9 +5135,10 @@
             <a:r>
               <a:rPr sz="1300" b="0">
                 <a:solidFill>
-                  <a:srgbClr val="2A282A"/>
-                </a:solidFill>
-                <a:latin typeface="Arial"/>
+                  <a:srgbClr val="3F6EA3"/>
+                </a:solidFill>
+                <a:latin typeface="Arial"/>
+                <a:hlinkClick r:id="rId5"/>
               </a:rPr>
               <a:t>https://veriqo-api-920194228751.us-central1.run.app</a:t>
             </a:r>

--- a/docs/Veriqo_AI_Builder_Cup_Deck.pptx
+++ b/docs/Veriqo_AI_Builder_Cup_Deck.pptx
@@ -5015,7 +5015,7 @@
                 <a:latin typeface="Arial"/>
                 <a:hlinkClick r:id="rId4"/>
               </a:rPr>
-              <a:t>https://youtu.be/B015EyHjXNM</a:t>
+              <a:t>https://youtu.be/zZbVIwDWArE</a:t>
             </a:r>
           </a:p>
         </p:txBody>
